--- a/data-eng/decks/w5d2s4.pptx
+++ b/data-eng/decks/w5d2s4.pptx
@@ -15,6 +15,7 @@
     <p:sldId id="263" r:id="rId14"/>
     <p:sldId id="264" r:id="rId15"/>
     <p:sldId id="265" r:id="rId16"/>
+    <p:sldId id="266" r:id="rId17"/>
   </p:sldIdLst>
   <p:sldSz cx="18288000" cy="10287000" type="screen4x3"/>
   <p:notesSz cx="6858000" cy="9144000"/>
@@ -3099,7 +3100,7 @@
       <p:grpSpPr/>
       <p:sp>
         <p:nvSpPr>
-          <p:cNvPr id="2" name="Oval 1"/>
+          <p:cNvPr id="2" name="deckgen:decor"/>
           <p:cNvSpPr/>
           <p:nvPr/>
         </p:nvSpPr>
@@ -3129,7 +3130,7 @@
       </p:sp>
       <p:sp>
         <p:nvSpPr>
-          <p:cNvPr id="3" name="Oval 2"/>
+          <p:cNvPr id="3" name="deckgen:decor"/>
           <p:cNvSpPr/>
           <p:nvPr/>
         </p:nvSpPr>
@@ -3159,7 +3160,7 @@
       </p:sp>
       <p:sp>
         <p:nvSpPr>
-          <p:cNvPr id="4" name="Oval 3"/>
+          <p:cNvPr id="4" name="deckgen:decor"/>
           <p:cNvSpPr/>
           <p:nvPr/>
         </p:nvSpPr>
@@ -3189,7 +3190,7 @@
       </p:sp>
       <p:sp>
         <p:nvSpPr>
-          <p:cNvPr id="5" name="Rectangle 4"/>
+          <p:cNvPr id="5" name="deckgen:decor"/>
           <p:cNvSpPr/>
           <p:nvPr/>
         </p:nvSpPr>
@@ -3219,7 +3220,7 @@
       </p:sp>
       <p:sp>
         <p:nvSpPr>
-          <p:cNvPr id="6" name="Oval 5"/>
+          <p:cNvPr id="6" name="deckgen:decor"/>
           <p:cNvSpPr/>
           <p:nvPr/>
         </p:nvSpPr>
@@ -3249,7 +3250,7 @@
       </p:sp>
       <p:sp>
         <p:nvSpPr>
-          <p:cNvPr id="7" name="Oval 6"/>
+          <p:cNvPr id="7" name="deckgen:decor"/>
           <p:cNvSpPr/>
           <p:nvPr/>
         </p:nvSpPr>
@@ -3279,7 +3280,7 @@
       </p:sp>
       <p:sp>
         <p:nvSpPr>
-          <p:cNvPr id="8" name="Oval 7"/>
+          <p:cNvPr id="8" name="deckgen:decor"/>
           <p:cNvSpPr/>
           <p:nvPr/>
         </p:nvSpPr>
@@ -3309,7 +3310,7 @@
       </p:sp>
       <p:sp>
         <p:nvSpPr>
-          <p:cNvPr id="9" name="Oval 8"/>
+          <p:cNvPr id="9" name="deckgen:decor"/>
           <p:cNvSpPr/>
           <p:nvPr/>
         </p:nvSpPr>
@@ -3339,7 +3340,7 @@
       </p:sp>
       <p:sp>
         <p:nvSpPr>
-          <p:cNvPr id="10" name="Rectangle 9"/>
+          <p:cNvPr id="10" name="deckgen:decor"/>
           <p:cNvSpPr/>
           <p:nvPr/>
         </p:nvSpPr>
@@ -3599,7 +3600,1150 @@
       <p:grpSpPr/>
       <p:sp>
         <p:nvSpPr>
-          <p:cNvPr id="2" name="Oval 1"/>
+          <p:cNvPr id="2" name="deckgen:decor"/>
+          <p:cNvSpPr/>
+          <p:nvPr/>
+        </p:nvSpPr>
+        <p:spPr>
+          <a:xfrm>
+            <a:off x="15811500" y="8382000"/>
+            <a:ext cx="4953000" cy="4953000"/>
+          </a:xfrm>
+          <a:prstGeom prst="ellipse">
+            <a:avLst/>
+          </a:prstGeom>
+          <a:solidFill>
+            <a:srgbClr val="F3F6FC"/>
+          </a:solidFill>
+          <a:ln>
+            <a:noFill/>
+          </a:ln>
+          <a:effectLst/>
+        </p:spPr>
+        <p:txBody>
+          <a:bodyPr rtlCol="0" anchor="ctr" wrap="square"/>
+          <a:lstStyle/>
+          <a:p>
+            <a:pPr algn="ctr"/>
+          </a:p>
+        </p:txBody>
+      </p:sp>
+      <p:sp>
+        <p:nvSpPr>
+          <p:cNvPr id="3" name="deckgen:decor"/>
+          <p:cNvSpPr/>
+          <p:nvPr/>
+        </p:nvSpPr>
+        <p:spPr>
+          <a:xfrm>
+            <a:off x="16859250" y="9429750"/>
+            <a:ext cx="2857500" cy="2857500"/>
+          </a:xfrm>
+          <a:prstGeom prst="ellipse">
+            <a:avLst/>
+          </a:prstGeom>
+          <a:solidFill>
+            <a:srgbClr val="FFFFFF"/>
+          </a:solidFill>
+          <a:ln>
+            <a:noFill/>
+          </a:ln>
+          <a:effectLst/>
+        </p:spPr>
+        <p:txBody>
+          <a:bodyPr rtlCol="0" anchor="ctr" wrap="square"/>
+          <a:lstStyle/>
+          <a:p>
+            <a:pPr algn="ctr"/>
+          </a:p>
+        </p:txBody>
+      </p:sp>
+      <p:sp>
+        <p:nvSpPr>
+          <p:cNvPr id="4" name="deckgen:decor"/>
+          <p:cNvSpPr/>
+          <p:nvPr/>
+        </p:nvSpPr>
+        <p:spPr>
+          <a:xfrm>
+            <a:off x="-1428750" y="1428750"/>
+            <a:ext cx="2857500" cy="2857500"/>
+          </a:xfrm>
+          <a:prstGeom prst="ellipse">
+            <a:avLst/>
+          </a:prstGeom>
+          <a:solidFill>
+            <a:srgbClr val="F7F8FA"/>
+          </a:solidFill>
+          <a:ln>
+            <a:noFill/>
+          </a:ln>
+          <a:effectLst/>
+        </p:spPr>
+        <p:txBody>
+          <a:bodyPr rtlCol="0" anchor="ctr" wrap="square"/>
+          <a:lstStyle/>
+          <a:p>
+            <a:pPr algn="ctr"/>
+          </a:p>
+        </p:txBody>
+      </p:sp>
+      <p:sp>
+        <p:nvSpPr>
+          <p:cNvPr id="5" name="TextBox 4"/>
+          <p:cNvSpPr txBox="1"/>
+          <p:nvPr/>
+        </p:nvSpPr>
+        <p:spPr>
+          <a:xfrm>
+            <a:off x="1143000" y="838200"/>
+            <a:ext cx="16002000" cy="342900"/>
+          </a:xfrm>
+          <a:prstGeom prst="rect">
+            <a:avLst/>
+          </a:prstGeom>
+          <a:noFill/>
+        </p:spPr>
+        <p:txBody>
+          <a:bodyPr wrap="square" lIns="0" rIns="0" tIns="0" bIns="0" anchor="t">
+            <a:spAutoFit/>
+          </a:bodyPr>
+          <a:lstStyle/>
+          <a:p>
+            <a:pPr algn="l">
+              <a:lnSpc>
+                <a:spcPct val="100000"/>
+              </a:lnSpc>
+            </a:pPr>
+            <a:r>
+              <a:rPr sz="1950" b="1" spc="160">
+                <a:solidFill>
+                  <a:srgbClr val="1E5BC6"/>
+                </a:solidFill>
+                <a:latin typeface="Pretendard"/>
+                <a:ea typeface="Pretendard"/>
+                <a:cs typeface="Pretendard"/>
+              </a:rPr>
+              <a:t>다음 회차 예고 · 10-27(화)</a:t>
+            </a:r>
+          </a:p>
+        </p:txBody>
+      </p:sp>
+      <p:sp>
+        <p:nvSpPr>
+          <p:cNvPr id="6" name="TextBox 5"/>
+          <p:cNvSpPr txBox="1"/>
+          <p:nvPr/>
+        </p:nvSpPr>
+        <p:spPr>
+          <a:xfrm>
+            <a:off x="1143000" y="1162050"/>
+            <a:ext cx="16002000" cy="762000"/>
+          </a:xfrm>
+          <a:prstGeom prst="rect">
+            <a:avLst/>
+          </a:prstGeom>
+          <a:noFill/>
+        </p:spPr>
+        <p:txBody>
+          <a:bodyPr wrap="square" lIns="0" rIns="0" tIns="0" bIns="0" anchor="t">
+            <a:spAutoFit/>
+          </a:bodyPr>
+          <a:lstStyle/>
+          <a:p>
+            <a:pPr algn="l">
+              <a:lnSpc>
+                <a:spcPct val="100000"/>
+              </a:lnSpc>
+            </a:pPr>
+            <a:r>
+              <a:rPr sz="5100" b="1">
+                <a:solidFill>
+                  <a:srgbClr val="0D2B5E"/>
+                </a:solidFill>
+                <a:latin typeface="Pretendard"/>
+                <a:ea typeface="Pretendard"/>
+                <a:cs typeface="Pretendard"/>
+              </a:rPr>
+              <a:t>5-3 · Iceberg · MinIO 연결과 대용량 분석 준비</a:t>
+            </a:r>
+          </a:p>
+        </p:txBody>
+      </p:sp>
+      <p:sp>
+        <p:nvSpPr>
+          <p:cNvPr id="7" name="Rectangle 6"/>
+          <p:cNvSpPr/>
+          <p:nvPr/>
+        </p:nvSpPr>
+        <p:spPr>
+          <a:xfrm>
+            <a:off x="1143000" y="2038350"/>
+            <a:ext cx="16002000" cy="28575"/>
+          </a:xfrm>
+          <a:prstGeom prst="rect">
+            <a:avLst/>
+          </a:prstGeom>
+          <a:solidFill>
+            <a:srgbClr val="0D2B5E"/>
+          </a:solidFill>
+          <a:ln>
+            <a:noFill/>
+          </a:ln>
+          <a:effectLst/>
+        </p:spPr>
+        <p:txBody>
+          <a:bodyPr rtlCol="0" anchor="ctr" wrap="square"/>
+          <a:lstStyle/>
+          <a:p>
+            <a:pPr algn="ctr"/>
+          </a:p>
+        </p:txBody>
+      </p:sp>
+      <p:sp>
+        <p:nvSpPr>
+          <p:cNvPr id="8" name="Rounded Rectangle 7"/>
+          <p:cNvSpPr/>
+          <p:nvPr/>
+        </p:nvSpPr>
+        <p:spPr>
+          <a:xfrm>
+            <a:off x="1143000" y="3429000"/>
+            <a:ext cx="3714750" cy="2476500"/>
+          </a:xfrm>
+          <a:prstGeom prst="roundRect">
+            <a:avLst>
+              <a:gd name="adj" fmla="val 1923"/>
+            </a:avLst>
+          </a:prstGeom>
+          <a:solidFill>
+            <a:srgbClr val="FAFBFD"/>
+          </a:solidFill>
+          <a:ln w="9525">
+            <a:solidFill>
+              <a:srgbClr val="DCE1E8"/>
+            </a:solidFill>
+          </a:ln>
+          <a:effectLst/>
+        </p:spPr>
+        <p:txBody>
+          <a:bodyPr rtlCol="0" anchor="ctr" wrap="square"/>
+          <a:lstStyle/>
+          <a:p>
+            <a:pPr algn="ctr"/>
+          </a:p>
+        </p:txBody>
+      </p:sp>
+      <p:sp>
+        <p:nvSpPr>
+          <p:cNvPr id="9" name="Rectangle 8"/>
+          <p:cNvSpPr/>
+          <p:nvPr/>
+        </p:nvSpPr>
+        <p:spPr>
+          <a:xfrm>
+            <a:off x="1143000" y="3429000"/>
+            <a:ext cx="3714750" cy="47625"/>
+          </a:xfrm>
+          <a:prstGeom prst="rect">
+            <a:avLst/>
+          </a:prstGeom>
+          <a:solidFill>
+            <a:srgbClr val="1E5BC6"/>
+          </a:solidFill>
+          <a:ln>
+            <a:noFill/>
+          </a:ln>
+          <a:effectLst/>
+        </p:spPr>
+        <p:txBody>
+          <a:bodyPr rtlCol="0" anchor="ctr" wrap="square"/>
+          <a:lstStyle/>
+          <a:p>
+            <a:pPr algn="ctr"/>
+          </a:p>
+        </p:txBody>
+      </p:sp>
+      <p:sp>
+        <p:nvSpPr>
+          <p:cNvPr id="10" name="deckgen:ornament"/>
+          <p:cNvSpPr txBox="1"/>
+          <p:nvPr/>
+        </p:nvSpPr>
+        <p:spPr>
+          <a:xfrm>
+            <a:off x="4000500" y="3638550"/>
+            <a:ext cx="590550" cy="400050"/>
+          </a:xfrm>
+          <a:prstGeom prst="rect">
+            <a:avLst/>
+          </a:prstGeom>
+          <a:noFill/>
+        </p:spPr>
+        <p:txBody>
+          <a:bodyPr wrap="square" lIns="0" rIns="0" tIns="0" bIns="0" anchor="t">
+            <a:spAutoFit/>
+          </a:bodyPr>
+          <a:lstStyle/>
+          <a:p>
+            <a:pPr algn="r">
+              <a:lnSpc>
+                <a:spcPct val="100000"/>
+              </a:lnSpc>
+            </a:pPr>
+            <a:r>
+              <a:rPr sz="2550" b="1">
+                <a:solidFill>
+                  <a:srgbClr val="E4EBF4"/>
+                </a:solidFill>
+                <a:latin typeface="Pretendard"/>
+                <a:ea typeface="Pretendard"/>
+                <a:cs typeface="Pretendard"/>
+              </a:rPr>
+              <a:t>01</a:t>
+            </a:r>
+          </a:p>
+        </p:txBody>
+      </p:sp>
+      <p:sp>
+        <p:nvSpPr>
+          <p:cNvPr id="11" name="TextBox 10"/>
+          <p:cNvSpPr txBox="1"/>
+          <p:nvPr/>
+        </p:nvSpPr>
+        <p:spPr>
+          <a:xfrm>
+            <a:off x="1466850" y="3752850"/>
+            <a:ext cx="3067050" cy="1828800"/>
+          </a:xfrm>
+          <a:prstGeom prst="rect">
+            <a:avLst/>
+          </a:prstGeom>
+          <a:noFill/>
+        </p:spPr>
+        <p:txBody>
+          <a:bodyPr wrap="square" lIns="0" rIns="0" tIns="0" bIns="0" anchor="ctr">
+            <a:spAutoFit/>
+          </a:bodyPr>
+          <a:lstStyle/>
+          <a:p>
+            <a:pPr>
+              <a:lnSpc>
+                <a:spcPct val="115000"/>
+              </a:lnSpc>
+            </a:pPr>
+            <a:r>
+              <a:rPr sz="2700" b="1">
+                <a:solidFill>
+                  <a:srgbClr val="0D2B5E"/>
+                </a:solidFill>
+                <a:latin typeface="Pretendard"/>
+                <a:ea typeface="Pretendard"/>
+                <a:cs typeface="Pretendard"/>
+              </a:rPr>
+              <a:t>이론 1H</a:t>
+            </a:r>
+          </a:p>
+          <a:p>
+            <a:pPr>
+              <a:lnSpc>
+                <a:spcPct val="146000"/>
+              </a:lnSpc>
+              <a:spcBef>
+                <a:spcPts val="1050"/>
+              </a:spcBef>
+            </a:pPr>
+            <a:r>
+              <a:rPr sz="2025" b="0">
+                <a:solidFill>
+                  <a:srgbClr val="3D3D3D"/>
+                </a:solidFill>
+                <a:latin typeface="Pretendard"/>
+                <a:ea typeface="Pretendard"/>
+                <a:cs typeface="Pretendard"/>
+              </a:rPr>
+              <a:t>레이크하우스와</a:t>
+            </a:r>
+          </a:p>
+          <a:p>
+            <a:pPr>
+              <a:lnSpc>
+                <a:spcPct val="146000"/>
+              </a:lnSpc>
+            </a:pPr>
+            <a:r>
+              <a:rPr sz="2025" b="0">
+                <a:solidFill>
+                  <a:srgbClr val="3D3D3D"/>
+                </a:solidFill>
+                <a:latin typeface="Pretendard"/>
+                <a:ea typeface="Pretendard"/>
+                <a:cs typeface="Pretendard"/>
+              </a:rPr>
+              <a:t>Spark 연동 구조</a:t>
+            </a:r>
+          </a:p>
+        </p:txBody>
+      </p:sp>
+      <p:sp>
+        <p:nvSpPr>
+          <p:cNvPr id="12" name="Rounded Rectangle 11"/>
+          <p:cNvSpPr/>
+          <p:nvPr/>
+        </p:nvSpPr>
+        <p:spPr>
+          <a:xfrm>
+            <a:off x="5238750" y="3429000"/>
+            <a:ext cx="3714750" cy="2476500"/>
+          </a:xfrm>
+          <a:prstGeom prst="roundRect">
+            <a:avLst>
+              <a:gd name="adj" fmla="val 1923"/>
+            </a:avLst>
+          </a:prstGeom>
+          <a:solidFill>
+            <a:srgbClr val="0D2B5E"/>
+          </a:solidFill>
+          <a:ln w="9525">
+            <a:solidFill>
+              <a:srgbClr val="0D2B5E"/>
+            </a:solidFill>
+          </a:ln>
+          <a:effectLst/>
+        </p:spPr>
+        <p:txBody>
+          <a:bodyPr rtlCol="0" anchor="ctr" wrap="square"/>
+          <a:lstStyle/>
+          <a:p>
+            <a:pPr algn="ctr"/>
+          </a:p>
+        </p:txBody>
+      </p:sp>
+      <p:sp>
+        <p:nvSpPr>
+          <p:cNvPr id="13" name="Rectangle 12"/>
+          <p:cNvSpPr/>
+          <p:nvPr/>
+        </p:nvSpPr>
+        <p:spPr>
+          <a:xfrm>
+            <a:off x="5238750" y="3429000"/>
+            <a:ext cx="3714750" cy="47625"/>
+          </a:xfrm>
+          <a:prstGeom prst="rect">
+            <a:avLst/>
+          </a:prstGeom>
+          <a:solidFill>
+            <a:srgbClr val="1E5BC6"/>
+          </a:solidFill>
+          <a:ln>
+            <a:noFill/>
+          </a:ln>
+          <a:effectLst/>
+        </p:spPr>
+        <p:txBody>
+          <a:bodyPr rtlCol="0" anchor="ctr" wrap="square"/>
+          <a:lstStyle/>
+          <a:p>
+            <a:pPr algn="ctr"/>
+          </a:p>
+        </p:txBody>
+      </p:sp>
+      <p:sp>
+        <p:nvSpPr>
+          <p:cNvPr id="14" name="deckgen:ornament"/>
+          <p:cNvSpPr txBox="1"/>
+          <p:nvPr/>
+        </p:nvSpPr>
+        <p:spPr>
+          <a:xfrm>
+            <a:off x="8096250" y="3638550"/>
+            <a:ext cx="590550" cy="400050"/>
+          </a:xfrm>
+          <a:prstGeom prst="rect">
+            <a:avLst/>
+          </a:prstGeom>
+          <a:noFill/>
+        </p:spPr>
+        <p:txBody>
+          <a:bodyPr wrap="square" lIns="0" rIns="0" tIns="0" bIns="0" anchor="t">
+            <a:spAutoFit/>
+          </a:bodyPr>
+          <a:lstStyle/>
+          <a:p>
+            <a:pPr algn="r">
+              <a:lnSpc>
+                <a:spcPct val="100000"/>
+              </a:lnSpc>
+            </a:pPr>
+            <a:r>
+              <a:rPr sz="2550" b="1">
+                <a:solidFill>
+                  <a:srgbClr val="3B4B7C"/>
+                </a:solidFill>
+                <a:latin typeface="Pretendard"/>
+                <a:ea typeface="Pretendard"/>
+                <a:cs typeface="Pretendard"/>
+              </a:rPr>
+              <a:t>02</a:t>
+            </a:r>
+          </a:p>
+        </p:txBody>
+      </p:sp>
+      <p:sp>
+        <p:nvSpPr>
+          <p:cNvPr id="15" name="TextBox 14"/>
+          <p:cNvSpPr txBox="1"/>
+          <p:nvPr/>
+        </p:nvSpPr>
+        <p:spPr>
+          <a:xfrm>
+            <a:off x="5562600" y="3752850"/>
+            <a:ext cx="3067050" cy="1828800"/>
+          </a:xfrm>
+          <a:prstGeom prst="rect">
+            <a:avLst/>
+          </a:prstGeom>
+          <a:noFill/>
+        </p:spPr>
+        <p:txBody>
+          <a:bodyPr wrap="square" lIns="0" rIns="0" tIns="0" bIns="0" anchor="ctr">
+            <a:spAutoFit/>
+          </a:bodyPr>
+          <a:lstStyle/>
+          <a:p>
+            <a:pPr>
+              <a:lnSpc>
+                <a:spcPct val="115000"/>
+              </a:lnSpc>
+            </a:pPr>
+            <a:r>
+              <a:rPr sz="2700" b="1">
+                <a:solidFill>
+                  <a:srgbClr val="FFFFFF"/>
+                </a:solidFill>
+                <a:latin typeface="Pretendard"/>
+                <a:ea typeface="Pretendard"/>
+                <a:cs typeface="Pretendard"/>
+              </a:rPr>
+              <a:t>실습 1.5H</a:t>
+            </a:r>
+          </a:p>
+          <a:p>
+            <a:pPr>
+              <a:lnSpc>
+                <a:spcPct val="146000"/>
+              </a:lnSpc>
+              <a:spcBef>
+                <a:spcPts val="1050"/>
+              </a:spcBef>
+            </a:pPr>
+            <a:r>
+              <a:rPr sz="2025" b="0">
+                <a:solidFill>
+                  <a:srgbClr val="D9E2F0"/>
+                </a:solidFill>
+                <a:latin typeface="Pretendard"/>
+                <a:ea typeface="Pretendard"/>
+                <a:cs typeface="Pretendard"/>
+              </a:rPr>
+              <a:t>Spark ↔ MinIO</a:t>
+            </a:r>
+          </a:p>
+          <a:p>
+            <a:pPr>
+              <a:lnSpc>
+                <a:spcPct val="146000"/>
+              </a:lnSpc>
+            </a:pPr>
+            <a:r>
+              <a:rPr sz="2025" b="0">
+                <a:solidFill>
+                  <a:srgbClr val="D9E2F0"/>
+                </a:solidFill>
+                <a:latin typeface="Pretendard"/>
+                <a:ea typeface="Pretendard"/>
+                <a:cs typeface="Pretendard"/>
+              </a:rPr>
+              <a:t>(s3a) 연결</a:t>
+            </a:r>
+          </a:p>
+        </p:txBody>
+      </p:sp>
+      <p:sp>
+        <p:nvSpPr>
+          <p:cNvPr id="16" name="Rounded Rectangle 15"/>
+          <p:cNvSpPr/>
+          <p:nvPr/>
+        </p:nvSpPr>
+        <p:spPr>
+          <a:xfrm>
+            <a:off x="9334500" y="3429000"/>
+            <a:ext cx="3714750" cy="2476500"/>
+          </a:xfrm>
+          <a:prstGeom prst="roundRect">
+            <a:avLst>
+              <a:gd name="adj" fmla="val 1923"/>
+            </a:avLst>
+          </a:prstGeom>
+          <a:solidFill>
+            <a:srgbClr val="FAFBFD"/>
+          </a:solidFill>
+          <a:ln w="9525">
+            <a:solidFill>
+              <a:srgbClr val="DCE1E8"/>
+            </a:solidFill>
+          </a:ln>
+          <a:effectLst/>
+        </p:spPr>
+        <p:txBody>
+          <a:bodyPr rtlCol="0" anchor="ctr" wrap="square"/>
+          <a:lstStyle/>
+          <a:p>
+            <a:pPr algn="ctr"/>
+          </a:p>
+        </p:txBody>
+      </p:sp>
+      <p:sp>
+        <p:nvSpPr>
+          <p:cNvPr id="17" name="Rectangle 16"/>
+          <p:cNvSpPr/>
+          <p:nvPr/>
+        </p:nvSpPr>
+        <p:spPr>
+          <a:xfrm>
+            <a:off x="9334500" y="3429000"/>
+            <a:ext cx="3714750" cy="47625"/>
+          </a:xfrm>
+          <a:prstGeom prst="rect">
+            <a:avLst/>
+          </a:prstGeom>
+          <a:solidFill>
+            <a:srgbClr val="1E5BC6"/>
+          </a:solidFill>
+          <a:ln>
+            <a:noFill/>
+          </a:ln>
+          <a:effectLst/>
+        </p:spPr>
+        <p:txBody>
+          <a:bodyPr rtlCol="0" anchor="ctr" wrap="square"/>
+          <a:lstStyle/>
+          <a:p>
+            <a:pPr algn="ctr"/>
+          </a:p>
+        </p:txBody>
+      </p:sp>
+      <p:sp>
+        <p:nvSpPr>
+          <p:cNvPr id="18" name="deckgen:ornament"/>
+          <p:cNvSpPr txBox="1"/>
+          <p:nvPr/>
+        </p:nvSpPr>
+        <p:spPr>
+          <a:xfrm>
+            <a:off x="12192000" y="3638550"/>
+            <a:ext cx="590550" cy="400050"/>
+          </a:xfrm>
+          <a:prstGeom prst="rect">
+            <a:avLst/>
+          </a:prstGeom>
+          <a:noFill/>
+        </p:spPr>
+        <p:txBody>
+          <a:bodyPr wrap="square" lIns="0" rIns="0" tIns="0" bIns="0" anchor="t">
+            <a:spAutoFit/>
+          </a:bodyPr>
+          <a:lstStyle/>
+          <a:p>
+            <a:pPr algn="r">
+              <a:lnSpc>
+                <a:spcPct val="100000"/>
+              </a:lnSpc>
+            </a:pPr>
+            <a:r>
+              <a:rPr sz="2550" b="1">
+                <a:solidFill>
+                  <a:srgbClr val="E4EBF4"/>
+                </a:solidFill>
+                <a:latin typeface="Pretendard"/>
+                <a:ea typeface="Pretendard"/>
+                <a:cs typeface="Pretendard"/>
+              </a:rPr>
+              <a:t>03</a:t>
+            </a:r>
+          </a:p>
+        </p:txBody>
+      </p:sp>
+      <p:sp>
+        <p:nvSpPr>
+          <p:cNvPr id="19" name="TextBox 18"/>
+          <p:cNvSpPr txBox="1"/>
+          <p:nvPr/>
+        </p:nvSpPr>
+        <p:spPr>
+          <a:xfrm>
+            <a:off x="9658350" y="3752850"/>
+            <a:ext cx="3067050" cy="1828800"/>
+          </a:xfrm>
+          <a:prstGeom prst="rect">
+            <a:avLst/>
+          </a:prstGeom>
+          <a:noFill/>
+        </p:spPr>
+        <p:txBody>
+          <a:bodyPr wrap="square" lIns="0" rIns="0" tIns="0" bIns="0" anchor="ctr">
+            <a:spAutoFit/>
+          </a:bodyPr>
+          <a:lstStyle/>
+          <a:p>
+            <a:pPr>
+              <a:lnSpc>
+                <a:spcPct val="115000"/>
+              </a:lnSpc>
+            </a:pPr>
+            <a:r>
+              <a:rPr sz="2700" b="1">
+                <a:solidFill>
+                  <a:srgbClr val="0D2B5E"/>
+                </a:solidFill>
+                <a:latin typeface="Pretendard"/>
+                <a:ea typeface="Pretendard"/>
+                <a:cs typeface="Pretendard"/>
+              </a:rPr>
+              <a:t>실습 1H</a:t>
+            </a:r>
+          </a:p>
+          <a:p>
+            <a:pPr>
+              <a:lnSpc>
+                <a:spcPct val="146000"/>
+              </a:lnSpc>
+              <a:spcBef>
+                <a:spcPts val="1050"/>
+              </a:spcBef>
+            </a:pPr>
+            <a:r>
+              <a:rPr sz="2025" b="0">
+                <a:solidFill>
+                  <a:srgbClr val="3D3D3D"/>
+                </a:solidFill>
+                <a:latin typeface="Pretendard"/>
+                <a:ea typeface="Pretendard"/>
+                <a:cs typeface="Pretendard"/>
+              </a:rPr>
+              <a:t>Iceberg 카탈로그</a:t>
+            </a:r>
+          </a:p>
+          <a:p>
+            <a:pPr>
+              <a:lnSpc>
+                <a:spcPct val="146000"/>
+              </a:lnSpc>
+            </a:pPr>
+            <a:r>
+              <a:rPr sz="2025" b="0">
+                <a:solidFill>
+                  <a:srgbClr val="3D3D3D"/>
+                </a:solidFill>
+                <a:latin typeface="Pretendard"/>
+                <a:ea typeface="Pretendard"/>
+                <a:cs typeface="Pretendard"/>
+              </a:rPr>
+              <a:t>구성·테이블 생성</a:t>
+            </a:r>
+          </a:p>
+        </p:txBody>
+      </p:sp>
+      <p:sp>
+        <p:nvSpPr>
+          <p:cNvPr id="20" name="Rounded Rectangle 19"/>
+          <p:cNvSpPr/>
+          <p:nvPr/>
+        </p:nvSpPr>
+        <p:spPr>
+          <a:xfrm>
+            <a:off x="13430250" y="3429000"/>
+            <a:ext cx="3714750" cy="2476500"/>
+          </a:xfrm>
+          <a:prstGeom prst="roundRect">
+            <a:avLst>
+              <a:gd name="adj" fmla="val 1923"/>
+            </a:avLst>
+          </a:prstGeom>
+          <a:solidFill>
+            <a:srgbClr val="FAFBFD"/>
+          </a:solidFill>
+          <a:ln w="9525">
+            <a:solidFill>
+              <a:srgbClr val="DCE1E8"/>
+            </a:solidFill>
+          </a:ln>
+          <a:effectLst/>
+        </p:spPr>
+        <p:txBody>
+          <a:bodyPr rtlCol="0" anchor="ctr" wrap="square"/>
+          <a:lstStyle/>
+          <a:p>
+            <a:pPr algn="ctr"/>
+          </a:p>
+        </p:txBody>
+      </p:sp>
+      <p:sp>
+        <p:nvSpPr>
+          <p:cNvPr id="21" name="Rectangle 20"/>
+          <p:cNvSpPr/>
+          <p:nvPr/>
+        </p:nvSpPr>
+        <p:spPr>
+          <a:xfrm>
+            <a:off x="13430250" y="3429000"/>
+            <a:ext cx="3714750" cy="47625"/>
+          </a:xfrm>
+          <a:prstGeom prst="rect">
+            <a:avLst/>
+          </a:prstGeom>
+          <a:solidFill>
+            <a:srgbClr val="1E5BC6"/>
+          </a:solidFill>
+          <a:ln>
+            <a:noFill/>
+          </a:ln>
+          <a:effectLst/>
+        </p:spPr>
+        <p:txBody>
+          <a:bodyPr rtlCol="0" anchor="ctr" wrap="square"/>
+          <a:lstStyle/>
+          <a:p>
+            <a:pPr algn="ctr"/>
+          </a:p>
+        </p:txBody>
+      </p:sp>
+      <p:sp>
+        <p:nvSpPr>
+          <p:cNvPr id="22" name="deckgen:ornament"/>
+          <p:cNvSpPr txBox="1"/>
+          <p:nvPr/>
+        </p:nvSpPr>
+        <p:spPr>
+          <a:xfrm>
+            <a:off x="16287750" y="3638550"/>
+            <a:ext cx="590550" cy="400050"/>
+          </a:xfrm>
+          <a:prstGeom prst="rect">
+            <a:avLst/>
+          </a:prstGeom>
+          <a:noFill/>
+        </p:spPr>
+        <p:txBody>
+          <a:bodyPr wrap="square" lIns="0" rIns="0" tIns="0" bIns="0" anchor="t">
+            <a:spAutoFit/>
+          </a:bodyPr>
+          <a:lstStyle/>
+          <a:p>
+            <a:pPr algn="r">
+              <a:lnSpc>
+                <a:spcPct val="100000"/>
+              </a:lnSpc>
+            </a:pPr>
+            <a:r>
+              <a:rPr sz="2550" b="1">
+                <a:solidFill>
+                  <a:srgbClr val="E4EBF4"/>
+                </a:solidFill>
+                <a:latin typeface="Pretendard"/>
+                <a:ea typeface="Pretendard"/>
+                <a:cs typeface="Pretendard"/>
+              </a:rPr>
+              <a:t>04</a:t>
+            </a:r>
+          </a:p>
+        </p:txBody>
+      </p:sp>
+      <p:sp>
+        <p:nvSpPr>
+          <p:cNvPr id="23" name="TextBox 22"/>
+          <p:cNvSpPr txBox="1"/>
+          <p:nvPr/>
+        </p:nvSpPr>
+        <p:spPr>
+          <a:xfrm>
+            <a:off x="13754100" y="3752850"/>
+            <a:ext cx="3067050" cy="1828800"/>
+          </a:xfrm>
+          <a:prstGeom prst="rect">
+            <a:avLst/>
+          </a:prstGeom>
+          <a:noFill/>
+        </p:spPr>
+        <p:txBody>
+          <a:bodyPr wrap="square" lIns="0" rIns="0" tIns="0" bIns="0" anchor="ctr">
+            <a:spAutoFit/>
+          </a:bodyPr>
+          <a:lstStyle/>
+          <a:p>
+            <a:pPr>
+              <a:lnSpc>
+                <a:spcPct val="115000"/>
+              </a:lnSpc>
+            </a:pPr>
+            <a:r>
+              <a:rPr sz="2700" b="1">
+                <a:solidFill>
+                  <a:srgbClr val="0D2B5E"/>
+                </a:solidFill>
+                <a:latin typeface="Pretendard"/>
+                <a:ea typeface="Pretendard"/>
+                <a:cs typeface="Pretendard"/>
+              </a:rPr>
+              <a:t>정리 0.5H</a:t>
+            </a:r>
+          </a:p>
+          <a:p>
+            <a:pPr>
+              <a:lnSpc>
+                <a:spcPct val="146000"/>
+              </a:lnSpc>
+              <a:spcBef>
+                <a:spcPts val="1050"/>
+              </a:spcBef>
+            </a:pPr>
+            <a:r>
+              <a:rPr sz="2025" b="0">
+                <a:solidFill>
+                  <a:srgbClr val="3D3D3D"/>
+                </a:solidFill>
+                <a:latin typeface="Pretendard"/>
+                <a:ea typeface="Pretendard"/>
+                <a:cs typeface="Pretendard"/>
+              </a:rPr>
+              <a:t>정리·회고</a:t>
+            </a:r>
+          </a:p>
+          <a:p>
+            <a:pPr>
+              <a:lnSpc>
+                <a:spcPct val="146000"/>
+              </a:lnSpc>
+            </a:pPr>
+            <a:r>
+              <a:rPr sz="2025" b="0">
+                <a:solidFill>
+                  <a:srgbClr val="3D3D3D"/>
+                </a:solidFill>
+                <a:latin typeface="Pretendard"/>
+                <a:ea typeface="Pretendard"/>
+                <a:cs typeface="Pretendard"/>
+              </a:rPr>
+              <a:t>(이론·실습)</a:t>
+            </a:r>
+          </a:p>
+        </p:txBody>
+      </p:sp>
+      <p:sp>
+        <p:nvSpPr>
+          <p:cNvPr id="24" name="Rectangle 23"/>
+          <p:cNvSpPr/>
+          <p:nvPr/>
+        </p:nvSpPr>
+        <p:spPr>
+          <a:xfrm>
+            <a:off x="1143000" y="6496050"/>
+            <a:ext cx="47625" cy="723900"/>
+          </a:xfrm>
+          <a:prstGeom prst="rect">
+            <a:avLst/>
+          </a:prstGeom>
+          <a:solidFill>
+            <a:srgbClr val="1E5BC6"/>
+          </a:solidFill>
+          <a:ln>
+            <a:noFill/>
+          </a:ln>
+          <a:effectLst/>
+        </p:spPr>
+        <p:txBody>
+          <a:bodyPr rtlCol="0" anchor="ctr" wrap="square"/>
+          <a:lstStyle/>
+          <a:p>
+            <a:pPr algn="ctr"/>
+          </a:p>
+        </p:txBody>
+      </p:sp>
+      <p:sp>
+        <p:nvSpPr>
+          <p:cNvPr id="25" name="TextBox 24"/>
+          <p:cNvSpPr txBox="1"/>
+          <p:nvPr/>
+        </p:nvSpPr>
+        <p:spPr>
+          <a:xfrm>
+            <a:off x="1390650" y="6553200"/>
+            <a:ext cx="15754350" cy="762000"/>
+          </a:xfrm>
+          <a:prstGeom prst="rect">
+            <a:avLst/>
+          </a:prstGeom>
+          <a:noFill/>
+        </p:spPr>
+        <p:txBody>
+          <a:bodyPr wrap="square" lIns="0" rIns="0" tIns="0" bIns="0" anchor="t">
+            <a:spAutoFit/>
+          </a:bodyPr>
+          <a:lstStyle/>
+          <a:p>
+            <a:pPr algn="l">
+              <a:lnSpc>
+                <a:spcPct val="150000"/>
+              </a:lnSpc>
+            </a:pPr>
+            <a:r>
+              <a:rPr sz="2025" b="1">
+                <a:solidFill>
+                  <a:srgbClr val="7D7D7D"/>
+                </a:solidFill>
+                <a:latin typeface="Pretendard"/>
+                <a:ea typeface="Pretendard"/>
+                <a:cs typeface="Pretendard"/>
+              </a:rPr>
+              <a:t>준비: 4주차 MinIO 컨테이너 필요 · 5-2 compose 에 MinIO 서비스를 합쳐 같은 네트워크에서 · Iceberg 스냅샷·메타데이터 복습</a:t>
+            </a:r>
+          </a:p>
+        </p:txBody>
+      </p:sp>
+      <p:sp>
+        <p:nvSpPr>
+          <p:cNvPr id="26" name="Rectangle 25"/>
+          <p:cNvSpPr/>
+          <p:nvPr/>
+        </p:nvSpPr>
+        <p:spPr>
+          <a:xfrm>
+            <a:off x="1143000" y="8058150"/>
+            <a:ext cx="16002000" cy="9525"/>
+          </a:xfrm>
+          <a:prstGeom prst="rect">
+            <a:avLst/>
+          </a:prstGeom>
+          <a:solidFill>
+            <a:srgbClr val="DCE1E8"/>
+          </a:solidFill>
+          <a:ln>
+            <a:noFill/>
+          </a:ln>
+          <a:effectLst/>
+        </p:spPr>
+        <p:txBody>
+          <a:bodyPr rtlCol="0" anchor="ctr" wrap="square"/>
+          <a:lstStyle/>
+          <a:p>
+            <a:pPr algn="ctr"/>
+          </a:p>
+        </p:txBody>
+      </p:sp>
+      <p:sp>
+        <p:nvSpPr>
+          <p:cNvPr id="27" name="TextBox 26"/>
+          <p:cNvSpPr txBox="1"/>
+          <p:nvPr/>
+        </p:nvSpPr>
+        <p:spPr>
+          <a:xfrm>
+            <a:off x="1143000" y="8248650"/>
+            <a:ext cx="13335000" cy="323850"/>
+          </a:xfrm>
+          <a:prstGeom prst="rect">
+            <a:avLst/>
+          </a:prstGeom>
+          <a:noFill/>
+        </p:spPr>
+        <p:txBody>
+          <a:bodyPr wrap="square" lIns="0" rIns="0" tIns="0" bIns="0" anchor="t">
+            <a:spAutoFit/>
+          </a:bodyPr>
+          <a:lstStyle/>
+          <a:p>
+            <a:pPr algn="l">
+              <a:lnSpc>
+                <a:spcPct val="100000"/>
+              </a:lnSpc>
+            </a:pPr>
+            <a:r>
+              <a:rPr sz="1725" b="0">
+                <a:solidFill>
+                  <a:srgbClr val="7D7D7D"/>
+                </a:solidFill>
+                <a:latin typeface="Pretendard"/>
+                <a:ea typeface="Pretendard"/>
+                <a:cs typeface="Pretendard"/>
+              </a:rPr>
+              <a:t>데이터 엔지니어링 &amp; RAG 파이프라인 160H · 5-2 · 정리·회고 0.5H</a:t>
+            </a:r>
+          </a:p>
+        </p:txBody>
+      </p:sp>
+      <p:sp>
+        <p:nvSpPr>
+          <p:cNvPr id="28" name="TextBox 27"/>
+          <p:cNvSpPr txBox="1"/>
+          <p:nvPr/>
+        </p:nvSpPr>
+        <p:spPr>
+          <a:xfrm>
+            <a:off x="15240000" y="8248650"/>
+            <a:ext cx="1905000" cy="323850"/>
+          </a:xfrm>
+          <a:prstGeom prst="rect">
+            <a:avLst/>
+          </a:prstGeom>
+          <a:noFill/>
+        </p:spPr>
+        <p:txBody>
+          <a:bodyPr wrap="square" lIns="0" rIns="0" tIns="0" bIns="0" anchor="t">
+            <a:spAutoFit/>
+          </a:bodyPr>
+          <a:lstStyle/>
+          <a:p>
+            <a:pPr algn="r">
+              <a:lnSpc>
+                <a:spcPct val="100000"/>
+              </a:lnSpc>
+            </a:pPr>
+            <a:r>
+              <a:rPr sz="1725" b="0">
+                <a:solidFill>
+                  <a:srgbClr val="7D7D7D"/>
+                </a:solidFill>
+                <a:latin typeface="Pretendard"/>
+                <a:ea typeface="Pretendard"/>
+                <a:cs typeface="Pretendard"/>
+              </a:rPr>
+              <a:t>10</a:t>
+            </a:r>
+          </a:p>
+        </p:txBody>
+      </p:sp>
+    </p:spTree>
+  </p:cSld>
+  <p:clrMapOvr>
+    <a:masterClrMapping/>
+  </p:clrMapOvr>
+</p:sld>
+</file>
+
+<file path=ppt/slides/slide11.xml><?xml version="1.0" encoding="utf-8"?>
+<p:sld xmlns:a="http://schemas.openxmlformats.org/drawingml/2006/main" xmlns:p="http://schemas.openxmlformats.org/presentationml/2006/main" xmlns:r="http://schemas.openxmlformats.org/officeDocument/2006/relationships">
+  <p:cSld>
+    <p:spTree>
+      <p:nvGrpSpPr>
+        <p:cNvPr id="1" name=""/>
+        <p:cNvGrpSpPr/>
+        <p:nvPr/>
+      </p:nvGrpSpPr>
+      <p:grpSpPr/>
+      <p:sp>
+        <p:nvSpPr>
+          <p:cNvPr id="2" name="deckgen:decor"/>
           <p:cNvSpPr/>
           <p:nvPr/>
         </p:nvSpPr>
@@ -3629,7 +4773,7 @@
       </p:sp>
       <p:sp>
         <p:nvSpPr>
-          <p:cNvPr id="3" name="Oval 2"/>
+          <p:cNvPr id="3" name="deckgen:decor"/>
           <p:cNvSpPr/>
           <p:nvPr/>
         </p:nvSpPr>
@@ -4029,7 +5173,7 @@
               </a:lnSpc>
             </a:pPr>
             <a:r>
-              <a:rPr sz="2250" b="1">
+              <a:rPr sz="2475" b="1">
                 <a:solidFill>
                   <a:srgbClr val="0D2B5E"/>
                 </a:solidFill>
@@ -4037,7 +5181,7 @@
                 <a:ea typeface="Pretendard"/>
                 <a:cs typeface="Pretendard"/>
               </a:rPr>
-              <a:t>hadoop-aws · iceberg-spark-runtime 왜 필요한가</a:t>
+              <a:t>hadoop-aws · iceberg-spark-runtime 구분</a:t>
             </a:r>
           </a:p>
         </p:txBody>
@@ -4406,7 +5550,7 @@
       <p:grpSpPr/>
       <p:sp>
         <p:nvSpPr>
-          <p:cNvPr id="2" name="Oval 1"/>
+          <p:cNvPr id="2" name="deckgen:decor"/>
           <p:cNvSpPr/>
           <p:nvPr/>
         </p:nvSpPr>
@@ -4436,7 +5580,7 @@
       </p:sp>
       <p:sp>
         <p:nvSpPr>
-          <p:cNvPr id="3" name="Oval 2"/>
+          <p:cNvPr id="3" name="deckgen:decor"/>
           <p:cNvSpPr/>
           <p:nvPr/>
         </p:nvSpPr>
@@ -4466,7 +5610,7 @@
       </p:sp>
       <p:sp>
         <p:nvSpPr>
-          <p:cNvPr id="4" name="Oval 3"/>
+          <p:cNvPr id="4" name="deckgen:decor"/>
           <p:cNvSpPr/>
           <p:nvPr/>
         </p:nvSpPr>
@@ -5185,7 +6329,7 @@
                 <a:ea typeface="Pretendard"/>
                 <a:cs typeface="Pretendard"/>
               </a:rPr>
-              <a:t>마스터 UI 200 · MinIO 컨테이너 — 5-3 준비 상태를 확인한다</a:t>
+              <a:t>셋 Up · UI 200 · 4주차 iceberg-rest·minio Exited 를 확인한다</a:t>
             </a:r>
           </a:p>
         </p:txBody>
@@ -5397,7 +6541,7 @@
       <p:grpSpPr/>
       <p:sp>
         <p:nvSpPr>
-          <p:cNvPr id="2" name="Oval 1"/>
+          <p:cNvPr id="2" name="deckgen:decor"/>
           <p:cNvSpPr/>
           <p:nvPr/>
         </p:nvSpPr>
@@ -5427,7 +6571,7 @@
       </p:sp>
       <p:sp>
         <p:nvSpPr>
-          <p:cNvPr id="3" name="Oval 2"/>
+          <p:cNvPr id="3" name="deckgen:decor"/>
           <p:cNvSpPr/>
           <p:nvPr/>
         </p:nvSpPr>
@@ -5457,7 +6601,7 @@
       </p:sp>
       <p:sp>
         <p:nvSpPr>
-          <p:cNvPr id="4" name="Oval 3"/>
+          <p:cNvPr id="4" name="deckgen:decor"/>
           <p:cNvSpPr/>
           <p:nvPr/>
         </p:nvSpPr>
@@ -7112,7 +8256,7 @@
       <p:grpSpPr/>
       <p:sp>
         <p:nvSpPr>
-          <p:cNvPr id="2" name="Oval 1"/>
+          <p:cNvPr id="2" name="deckgen:decor"/>
           <p:cNvSpPr/>
           <p:nvPr/>
         </p:nvSpPr>
@@ -7142,7 +8286,7 @@
       </p:sp>
       <p:sp>
         <p:nvSpPr>
-          <p:cNvPr id="3" name="Oval 2"/>
+          <p:cNvPr id="3" name="deckgen:decor"/>
           <p:cNvSpPr/>
           <p:nvPr/>
         </p:nvSpPr>
@@ -7172,7 +8316,7 @@
       </p:sp>
       <p:sp>
         <p:nvSpPr>
-          <p:cNvPr id="4" name="Oval 3"/>
+          <p:cNvPr id="4" name="deckgen:decor"/>
           <p:cNvSpPr/>
           <p:nvPr/>
         </p:nvSpPr>
@@ -8823,7 +9967,7 @@
       <p:grpSpPr/>
       <p:sp>
         <p:nvSpPr>
-          <p:cNvPr id="2" name="Oval 1"/>
+          <p:cNvPr id="2" name="deckgen:decor"/>
           <p:cNvSpPr/>
           <p:nvPr/>
         </p:nvSpPr>
@@ -8853,7 +9997,7 @@
       </p:sp>
       <p:sp>
         <p:nvSpPr>
-          <p:cNvPr id="3" name="Oval 2"/>
+          <p:cNvPr id="3" name="deckgen:decor"/>
           <p:cNvSpPr/>
           <p:nvPr/>
         </p:nvSpPr>
@@ -8883,7 +10027,7 @@
       </p:sp>
       <p:sp>
         <p:nvSpPr>
-          <p:cNvPr id="4" name="Oval 3"/>
+          <p:cNvPr id="4" name="deckgen:decor"/>
           <p:cNvSpPr/>
           <p:nvPr/>
         </p:nvSpPr>
@@ -8947,7 +10091,7 @@
                 <a:ea typeface="Pretendard"/>
                 <a:cs typeface="Pretendard"/>
               </a:rPr>
-              <a:t>오늘의 체크리스트</a:t>
+              <a:t>오늘의 체크리스트 1/2</a:t>
             </a:r>
           </a:p>
         </p:txBody>
@@ -8988,7 +10132,7 @@
                 <a:ea typeface="Pretendard"/>
                 <a:cs typeface="Pretendard"/>
               </a:rPr>
-              <a:t>여덟 개를 스스로 확인해 보세요</a:t>
+              <a:t>열두 개를 스스로 확인해 보세요 — 구축</a:t>
             </a:r>
           </a:p>
         </p:txBody>
@@ -9031,12 +10175,12 @@
         </p:nvSpPr>
         <p:spPr>
           <a:xfrm>
-            <a:off x="1143000" y="2886075"/>
-            <a:ext cx="16002000" cy="523875"/>
+            <a:off x="1143000" y="2867025"/>
+            <a:ext cx="16002000" cy="742950"/>
           </a:xfrm>
           <a:prstGeom prst="roundRect">
             <a:avLst>
-              <a:gd name="adj" fmla="val 9090"/>
+              <a:gd name="adj" fmla="val 6410"/>
             </a:avLst>
           </a:prstGeom>
           <a:solidFill>
@@ -9065,7 +10209,7 @@
         </p:nvSpPr>
         <p:spPr>
           <a:xfrm>
-            <a:off x="1390650" y="2881312"/>
+            <a:off x="1390650" y="2971800"/>
             <a:ext cx="533400" cy="533400"/>
           </a:xfrm>
           <a:prstGeom prst="ellipse">
@@ -9095,7 +10239,7 @@
         </p:nvSpPr>
         <p:spPr>
           <a:xfrm>
-            <a:off x="1390650" y="3005138"/>
+            <a:off x="1390650" y="3095625"/>
             <a:ext cx="533400" cy="323850"/>
           </a:xfrm>
           <a:prstGeom prst="rect">
@@ -9136,8 +10280,8 @@
         </p:nvSpPr>
         <p:spPr>
           <a:xfrm>
-            <a:off x="2190750" y="2886075"/>
-            <a:ext cx="14573250" cy="523875"/>
+            <a:off x="2190750" y="2867025"/>
+            <a:ext cx="14573250" cy="742950"/>
           </a:xfrm>
           <a:prstGeom prst="rect">
             <a:avLst/>
@@ -9177,12 +10321,12 @@
         </p:nvSpPr>
         <p:spPr>
           <a:xfrm>
-            <a:off x="1143000" y="3524250"/>
-            <a:ext cx="16002000" cy="523875"/>
+            <a:off x="1143000" y="3724275"/>
+            <a:ext cx="16002000" cy="742950"/>
           </a:xfrm>
           <a:prstGeom prst="roundRect">
             <a:avLst>
-              <a:gd name="adj" fmla="val 9090"/>
+              <a:gd name="adj" fmla="val 6410"/>
             </a:avLst>
           </a:prstGeom>
           <a:solidFill>
@@ -9211,7 +10355,7 @@
         </p:nvSpPr>
         <p:spPr>
           <a:xfrm>
-            <a:off x="1390650" y="3519488"/>
+            <a:off x="1390650" y="3829050"/>
             <a:ext cx="533400" cy="533400"/>
           </a:xfrm>
           <a:prstGeom prst="ellipse">
@@ -9241,7 +10385,7 @@
         </p:nvSpPr>
         <p:spPr>
           <a:xfrm>
-            <a:off x="1390650" y="3643312"/>
+            <a:off x="1390650" y="3952875"/>
             <a:ext cx="533400" cy="323850"/>
           </a:xfrm>
           <a:prstGeom prst="rect">
@@ -9282,8 +10426,8 @@
         </p:nvSpPr>
         <p:spPr>
           <a:xfrm>
-            <a:off x="2190750" y="3524250"/>
-            <a:ext cx="14573250" cy="523875"/>
+            <a:off x="2190750" y="3724275"/>
+            <a:ext cx="14573250" cy="742950"/>
           </a:xfrm>
           <a:prstGeom prst="rect">
             <a:avLst/>
@@ -9323,12 +10467,12 @@
         </p:nvSpPr>
         <p:spPr>
           <a:xfrm>
-            <a:off x="1143000" y="4162425"/>
-            <a:ext cx="16002000" cy="523875"/>
+            <a:off x="1143000" y="4581525"/>
+            <a:ext cx="16002000" cy="742950"/>
           </a:xfrm>
           <a:prstGeom prst="roundRect">
             <a:avLst>
-              <a:gd name="adj" fmla="val 9090"/>
+              <a:gd name="adj" fmla="val 6410"/>
             </a:avLst>
           </a:prstGeom>
           <a:solidFill>
@@ -9357,7 +10501,7 @@
         </p:nvSpPr>
         <p:spPr>
           <a:xfrm>
-            <a:off x="1390650" y="4157662"/>
+            <a:off x="1390650" y="4686300"/>
             <a:ext cx="533400" cy="533400"/>
           </a:xfrm>
           <a:prstGeom prst="ellipse">
@@ -9387,7 +10531,7 @@
         </p:nvSpPr>
         <p:spPr>
           <a:xfrm>
-            <a:off x="1390650" y="4281488"/>
+            <a:off x="1390650" y="4810125"/>
             <a:ext cx="533400" cy="323850"/>
           </a:xfrm>
           <a:prstGeom prst="rect">
@@ -9428,8 +10572,8 @@
         </p:nvSpPr>
         <p:spPr>
           <a:xfrm>
-            <a:off x="2190750" y="4162425"/>
-            <a:ext cx="14573250" cy="523875"/>
+            <a:off x="2190750" y="4581525"/>
+            <a:ext cx="14573250" cy="742950"/>
           </a:xfrm>
           <a:prstGeom prst="rect">
             <a:avLst/>
@@ -9469,12 +10613,12 @@
         </p:nvSpPr>
         <p:spPr>
           <a:xfrm>
-            <a:off x="1143000" y="4800600"/>
-            <a:ext cx="16002000" cy="523875"/>
+            <a:off x="1143000" y="5438775"/>
+            <a:ext cx="16002000" cy="742950"/>
           </a:xfrm>
           <a:prstGeom prst="roundRect">
             <a:avLst>
-              <a:gd name="adj" fmla="val 9090"/>
+              <a:gd name="adj" fmla="val 6410"/>
             </a:avLst>
           </a:prstGeom>
           <a:solidFill>
@@ -9503,7 +10647,7 @@
         </p:nvSpPr>
         <p:spPr>
           <a:xfrm>
-            <a:off x="1390650" y="4795838"/>
+            <a:off x="1390650" y="5543550"/>
             <a:ext cx="533400" cy="533400"/>
           </a:xfrm>
           <a:prstGeom prst="ellipse">
@@ -9533,7 +10677,7 @@
         </p:nvSpPr>
         <p:spPr>
           <a:xfrm>
-            <a:off x="1390650" y="4919662"/>
+            <a:off x="1390650" y="5667375"/>
             <a:ext cx="533400" cy="323850"/>
           </a:xfrm>
           <a:prstGeom prst="rect">
@@ -9574,8 +10718,8 @@
         </p:nvSpPr>
         <p:spPr>
           <a:xfrm>
-            <a:off x="2190750" y="4800600"/>
-            <a:ext cx="14573250" cy="523875"/>
+            <a:off x="2190750" y="5438775"/>
+            <a:ext cx="14573250" cy="742950"/>
           </a:xfrm>
           <a:prstGeom prst="rect">
             <a:avLst/>
@@ -9602,7 +10746,7 @@
                 <a:ea typeface="Pretendard"/>
                 <a:cs typeface="Pretendard"/>
               </a:rPr>
-              <a:t>마스터 UI(8080)에서 워커의 ALIVE 상태와 코어/메모리를 확인했다</a:t>
+              <a:t>마스터·워커 로그에서 등록 기록을 찾아봤다</a:t>
             </a:r>
           </a:p>
         </p:txBody>
@@ -9615,12 +10759,12 @@
         </p:nvSpPr>
         <p:spPr>
           <a:xfrm>
-            <a:off x="1143000" y="5438775"/>
-            <a:ext cx="16002000" cy="523875"/>
+            <a:off x="1143000" y="6296025"/>
+            <a:ext cx="16002000" cy="742950"/>
           </a:xfrm>
           <a:prstGeom prst="roundRect">
             <a:avLst>
-              <a:gd name="adj" fmla="val 9090"/>
+              <a:gd name="adj" fmla="val 6410"/>
             </a:avLst>
           </a:prstGeom>
           <a:solidFill>
@@ -9649,7 +10793,7 @@
         </p:nvSpPr>
         <p:spPr>
           <a:xfrm>
-            <a:off x="1390650" y="5434012"/>
+            <a:off x="1390650" y="6400800"/>
             <a:ext cx="533400" cy="533400"/>
           </a:xfrm>
           <a:prstGeom prst="ellipse">
@@ -9679,7 +10823,7 @@
         </p:nvSpPr>
         <p:spPr>
           <a:xfrm>
-            <a:off x="1390650" y="5557838"/>
+            <a:off x="1390650" y="6524625"/>
             <a:ext cx="533400" cy="323850"/>
           </a:xfrm>
           <a:prstGeom prst="rect">
@@ -9720,8 +10864,8 @@
         </p:nvSpPr>
         <p:spPr>
           <a:xfrm>
-            <a:off x="2190750" y="5438775"/>
-            <a:ext cx="14573250" cy="523875"/>
+            <a:off x="2190750" y="6296025"/>
+            <a:ext cx="14573250" cy="742950"/>
           </a:xfrm>
           <a:prstGeom prst="rect">
             <a:avLst/>
@@ -9748,7 +10892,7 @@
                 <a:ea typeface="Pretendard"/>
                 <a:cs typeface="Pretendard"/>
               </a:rPr>
-              <a:t>--scale 로 워커를 늘렸다 줄이며 UI 가 따라 바뀌는 것을 봤다</a:t>
+              <a:t>마스터 UI(8080)에서 워커의 ALIVE 상태와 코어/메모리를 확인했다</a:t>
             </a:r>
           </a:p>
         </p:txBody>
@@ -9761,12 +10905,12 @@
         </p:nvSpPr>
         <p:spPr>
           <a:xfrm>
-            <a:off x="1143000" y="6076950"/>
-            <a:ext cx="16002000" cy="523875"/>
+            <a:off x="1143000" y="7153275"/>
+            <a:ext cx="16002000" cy="742950"/>
           </a:xfrm>
           <a:prstGeom prst="roundRect">
             <a:avLst>
-              <a:gd name="adj" fmla="val 9090"/>
+              <a:gd name="adj" fmla="val 6410"/>
             </a:avLst>
           </a:prstGeom>
           <a:solidFill>
@@ -9795,7 +10939,7 @@
         </p:nvSpPr>
         <p:spPr>
           <a:xfrm>
-            <a:off x="1390650" y="6072188"/>
+            <a:off x="1390650" y="7258050"/>
             <a:ext cx="533400" cy="533400"/>
           </a:xfrm>
           <a:prstGeom prst="ellipse">
@@ -9825,7 +10969,7 @@
         </p:nvSpPr>
         <p:spPr>
           <a:xfrm>
-            <a:off x="1390650" y="6196012"/>
+            <a:off x="1390650" y="7381875"/>
             <a:ext cx="533400" cy="323850"/>
           </a:xfrm>
           <a:prstGeom prst="rect">
@@ -9866,8 +11010,8 @@
         </p:nvSpPr>
         <p:spPr>
           <a:xfrm>
-            <a:off x="2190750" y="6076950"/>
-            <a:ext cx="14573250" cy="523875"/>
+            <a:off x="2190750" y="7153275"/>
+            <a:ext cx="14573250" cy="742950"/>
           </a:xfrm>
           <a:prstGeom prst="rect">
             <a:avLst/>
@@ -9894,61 +11038,27 @@
                 <a:ea typeface="Pretendard"/>
                 <a:cs typeface="Pretendard"/>
               </a:rPr>
-              <a:t>직접 작성한 PySpark 스크립트를 클러스터에서 실행했다</a:t>
-            </a:r>
-          </a:p>
-        </p:txBody>
-      </p:sp>
-      <p:sp>
-        <p:nvSpPr>
-          <p:cNvPr id="32" name="Rounded Rectangle 31"/>
-          <p:cNvSpPr/>
-          <p:nvPr/>
-        </p:nvSpPr>
-        <p:spPr>
-          <a:xfrm>
-            <a:off x="1143000" y="6715125"/>
-            <a:ext cx="16002000" cy="523875"/>
-          </a:xfrm>
-          <a:prstGeom prst="roundRect">
-            <a:avLst>
-              <a:gd name="adj" fmla="val 9090"/>
-            </a:avLst>
-          </a:prstGeom>
-          <a:solidFill>
-            <a:srgbClr val="FAFBFD"/>
-          </a:solidFill>
-          <a:ln w="9525">
-            <a:solidFill>
-              <a:srgbClr val="DCE1E8"/>
-            </a:solidFill>
-          </a:ln>
-          <a:effectLst/>
-        </p:spPr>
-        <p:txBody>
-          <a:bodyPr rtlCol="0" anchor="ctr" wrap="square"/>
-          <a:lstStyle/>
-          <a:p>
-            <a:pPr algn="ctr"/>
-          </a:p>
-        </p:txBody>
-      </p:sp>
-      <p:sp>
-        <p:nvSpPr>
-          <p:cNvPr id="33" name="Oval 32"/>
-          <p:cNvSpPr/>
-          <p:nvPr/>
-        </p:nvSpPr>
-        <p:spPr>
-          <a:xfrm>
-            <a:off x="1390650" y="6710362"/>
-            <a:ext cx="533400" cy="533400"/>
-          </a:xfrm>
-          <a:prstGeom prst="ellipse">
-            <a:avLst/>
-          </a:prstGeom>
-          <a:solidFill>
-            <a:srgbClr val="0D2B5E"/>
+              <a:t>--scale 로 워커를 늘렸다 줄이며 UI 변화를 봤다(지운 워커는 DEAD)</a:t>
+            </a:r>
+          </a:p>
+        </p:txBody>
+      </p:sp>
+      <p:sp>
+        <p:nvSpPr>
+          <p:cNvPr id="32" name="Rectangle 31"/>
+          <p:cNvSpPr/>
+          <p:nvPr/>
+        </p:nvSpPr>
+        <p:spPr>
+          <a:xfrm>
+            <a:off x="1143000" y="8058150"/>
+            <a:ext cx="16002000" cy="9525"/>
+          </a:xfrm>
+          <a:prstGeom prst="rect">
+            <a:avLst/>
+          </a:prstGeom>
+          <a:solidFill>
+            <a:srgbClr val="DCE1E8"/>
           </a:solidFill>
           <a:ln>
             <a:noFill/>
@@ -9965,265 +11075,7 @@
       </p:sp>
       <p:sp>
         <p:nvSpPr>
-          <p:cNvPr id="34" name="TextBox 33"/>
-          <p:cNvSpPr txBox="1"/>
-          <p:nvPr/>
-        </p:nvSpPr>
-        <p:spPr>
-          <a:xfrm>
-            <a:off x="1390650" y="6834188"/>
-            <a:ext cx="533400" cy="323850"/>
-          </a:xfrm>
-          <a:prstGeom prst="rect">
-            <a:avLst/>
-          </a:prstGeom>
-          <a:noFill/>
-        </p:spPr>
-        <p:txBody>
-          <a:bodyPr wrap="square" lIns="0" rIns="0" tIns="0" bIns="0" anchor="t">
-            <a:spAutoFit/>
-          </a:bodyPr>
-          <a:lstStyle/>
-          <a:p>
-            <a:pPr algn="ctr">
-              <a:lnSpc>
-                <a:spcPct val="100000"/>
-              </a:lnSpc>
-            </a:pPr>
-            <a:r>
-              <a:rPr sz="2100" b="1">
-                <a:solidFill>
-                  <a:srgbClr val="FFFFFF"/>
-                </a:solidFill>
-                <a:latin typeface="Pretendard"/>
-                <a:ea typeface="Pretendard"/>
-                <a:cs typeface="Pretendard"/>
-              </a:rPr>
-              <a:t>7</a:t>
-            </a:r>
-          </a:p>
-        </p:txBody>
-      </p:sp>
-      <p:sp>
-        <p:nvSpPr>
-          <p:cNvPr id="35" name="TextBox 34"/>
-          <p:cNvSpPr txBox="1"/>
-          <p:nvPr/>
-        </p:nvSpPr>
-        <p:spPr>
-          <a:xfrm>
-            <a:off x="2190750" y="6715125"/>
-            <a:ext cx="14573250" cy="523875"/>
-          </a:xfrm>
-          <a:prstGeom prst="rect">
-            <a:avLst/>
-          </a:prstGeom>
-          <a:noFill/>
-        </p:spPr>
-        <p:txBody>
-          <a:bodyPr wrap="square" lIns="0" rIns="0" tIns="0" bIns="0" anchor="ctr">
-            <a:spAutoFit/>
-          </a:bodyPr>
-          <a:lstStyle/>
-          <a:p>
-            <a:pPr algn="l">
-              <a:lnSpc>
-                <a:spcPct val="100000"/>
-              </a:lnSpc>
-            </a:pPr>
-            <a:r>
-              <a:rPr sz="2100" b="1">
-                <a:solidFill>
-                  <a:srgbClr val="0D2B5E"/>
-                </a:solidFill>
-                <a:latin typeface="Pretendard"/>
-                <a:ea typeface="Pretendard"/>
-                <a:cs typeface="Pretendard"/>
-              </a:rPr>
-              <a:t>master 값이 local[*] 에서 spark://… 로 바뀐 것을 확인했다</a:t>
-            </a:r>
-          </a:p>
-        </p:txBody>
-      </p:sp>
-      <p:sp>
-        <p:nvSpPr>
-          <p:cNvPr id="36" name="Rounded Rectangle 35"/>
-          <p:cNvSpPr/>
-          <p:nvPr/>
-        </p:nvSpPr>
-        <p:spPr>
-          <a:xfrm>
-            <a:off x="1143000" y="7353300"/>
-            <a:ext cx="16002000" cy="523875"/>
-          </a:xfrm>
-          <a:prstGeom prst="roundRect">
-            <a:avLst>
-              <a:gd name="adj" fmla="val 9090"/>
-            </a:avLst>
-          </a:prstGeom>
-          <a:solidFill>
-            <a:srgbClr val="FAFBFD"/>
-          </a:solidFill>
-          <a:ln w="9525">
-            <a:solidFill>
-              <a:srgbClr val="DCE1E8"/>
-            </a:solidFill>
-          </a:ln>
-          <a:effectLst/>
-        </p:spPr>
-        <p:txBody>
-          <a:bodyPr rtlCol="0" anchor="ctr" wrap="square"/>
-          <a:lstStyle/>
-          <a:p>
-            <a:pPr algn="ctr"/>
-          </a:p>
-        </p:txBody>
-      </p:sp>
-      <p:sp>
-        <p:nvSpPr>
-          <p:cNvPr id="37" name="Oval 36"/>
-          <p:cNvSpPr/>
-          <p:nvPr/>
-        </p:nvSpPr>
-        <p:spPr>
-          <a:xfrm>
-            <a:off x="1390650" y="7348538"/>
-            <a:ext cx="533400" cy="533400"/>
-          </a:xfrm>
-          <a:prstGeom prst="ellipse">
-            <a:avLst/>
-          </a:prstGeom>
-          <a:solidFill>
-            <a:srgbClr val="0D2B5E"/>
-          </a:solidFill>
-          <a:ln>
-            <a:noFill/>
-          </a:ln>
-          <a:effectLst/>
-        </p:spPr>
-        <p:txBody>
-          <a:bodyPr rtlCol="0" anchor="ctr" wrap="square"/>
-          <a:lstStyle/>
-          <a:p>
-            <a:pPr algn="ctr"/>
-          </a:p>
-        </p:txBody>
-      </p:sp>
-      <p:sp>
-        <p:nvSpPr>
-          <p:cNvPr id="38" name="TextBox 37"/>
-          <p:cNvSpPr txBox="1"/>
-          <p:nvPr/>
-        </p:nvSpPr>
-        <p:spPr>
-          <a:xfrm>
-            <a:off x="1390650" y="7472362"/>
-            <a:ext cx="533400" cy="323850"/>
-          </a:xfrm>
-          <a:prstGeom prst="rect">
-            <a:avLst/>
-          </a:prstGeom>
-          <a:noFill/>
-        </p:spPr>
-        <p:txBody>
-          <a:bodyPr wrap="square" lIns="0" rIns="0" tIns="0" bIns="0" anchor="t">
-            <a:spAutoFit/>
-          </a:bodyPr>
-          <a:lstStyle/>
-          <a:p>
-            <a:pPr algn="ctr">
-              <a:lnSpc>
-                <a:spcPct val="100000"/>
-              </a:lnSpc>
-            </a:pPr>
-            <a:r>
-              <a:rPr sz="2100" b="1">
-                <a:solidFill>
-                  <a:srgbClr val="FFFFFF"/>
-                </a:solidFill>
-                <a:latin typeface="Pretendard"/>
-                <a:ea typeface="Pretendard"/>
-                <a:cs typeface="Pretendard"/>
-              </a:rPr>
-              <a:t>8</a:t>
-            </a:r>
-          </a:p>
-        </p:txBody>
-      </p:sp>
-      <p:sp>
-        <p:nvSpPr>
-          <p:cNvPr id="39" name="TextBox 38"/>
-          <p:cNvSpPr txBox="1"/>
-          <p:nvPr/>
-        </p:nvSpPr>
-        <p:spPr>
-          <a:xfrm>
-            <a:off x="2190750" y="7353300"/>
-            <a:ext cx="14573250" cy="523875"/>
-          </a:xfrm>
-          <a:prstGeom prst="rect">
-            <a:avLst/>
-          </a:prstGeom>
-          <a:noFill/>
-        </p:spPr>
-        <p:txBody>
-          <a:bodyPr wrap="square" lIns="0" rIns="0" tIns="0" bIns="0" anchor="ctr">
-            <a:spAutoFit/>
-          </a:bodyPr>
-          <a:lstStyle/>
-          <a:p>
-            <a:pPr algn="l">
-              <a:lnSpc>
-                <a:spcPct val="100000"/>
-              </a:lnSpc>
-            </a:pPr>
-            <a:r>
-              <a:rPr sz="2100" b="1">
-                <a:solidFill>
-                  <a:srgbClr val="0D2B5E"/>
-                </a:solidFill>
-                <a:latin typeface="Pretendard"/>
-                <a:ea typeface="Pretendard"/>
-                <a:cs typeface="Pretendard"/>
-              </a:rPr>
-              <a:t>자원을 과하게 요구해 WAITING 을 만들고, 두 잡을 동시에 돌려 봤다</a:t>
-            </a:r>
-          </a:p>
-        </p:txBody>
-      </p:sp>
-      <p:sp>
-        <p:nvSpPr>
-          <p:cNvPr id="40" name="Rectangle 39"/>
-          <p:cNvSpPr/>
-          <p:nvPr/>
-        </p:nvSpPr>
-        <p:spPr>
-          <a:xfrm>
-            <a:off x="1143000" y="8058150"/>
-            <a:ext cx="16002000" cy="9525"/>
-          </a:xfrm>
-          <a:prstGeom prst="rect">
-            <a:avLst/>
-          </a:prstGeom>
-          <a:solidFill>
-            <a:srgbClr val="DCE1E8"/>
-          </a:solidFill>
-          <a:ln>
-            <a:noFill/>
-          </a:ln>
-          <a:effectLst/>
-        </p:spPr>
-        <p:txBody>
-          <a:bodyPr rtlCol="0" anchor="ctr" wrap="square"/>
-          <a:lstStyle/>
-          <a:p>
-            <a:pPr algn="ctr"/>
-          </a:p>
-        </p:txBody>
-      </p:sp>
-      <p:sp>
-        <p:nvSpPr>
-          <p:cNvPr id="41" name="TextBox 40"/>
+          <p:cNvPr id="33" name="TextBox 32"/>
           <p:cNvSpPr txBox="1"/>
           <p:nvPr/>
         </p:nvSpPr>
@@ -10264,7 +11116,7 @@
       </p:sp>
       <p:sp>
         <p:nvSpPr>
-          <p:cNvPr id="42" name="TextBox 41"/>
+          <p:cNvPr id="34" name="TextBox 33"/>
           <p:cNvSpPr txBox="1"/>
           <p:nvPr/>
         </p:nvSpPr>
@@ -10323,7 +11175,7 @@
       <p:grpSpPr/>
       <p:sp>
         <p:nvSpPr>
-          <p:cNvPr id="2" name="Oval 1"/>
+          <p:cNvPr id="2" name="deckgen:decor"/>
           <p:cNvSpPr/>
           <p:nvPr/>
         </p:nvSpPr>
@@ -10353,7 +11205,7 @@
       </p:sp>
       <p:sp>
         <p:nvSpPr>
-          <p:cNvPr id="3" name="Oval 2"/>
+          <p:cNvPr id="3" name="deckgen:decor"/>
           <p:cNvSpPr/>
           <p:nvPr/>
         </p:nvSpPr>
@@ -10383,7 +11235,7 @@
       </p:sp>
       <p:sp>
         <p:nvSpPr>
-          <p:cNvPr id="4" name="Oval 3"/>
+          <p:cNvPr id="4" name="deckgen:decor"/>
           <p:cNvSpPr/>
           <p:nvPr/>
         </p:nvSpPr>
@@ -10447,7 +11299,7 @@
                 <a:ea typeface="Pretendard"/>
                 <a:cs typeface="Pretendard"/>
               </a:rPr>
-              <a:t>자주 겪는 오류</a:t>
+              <a:t>오늘의 체크리스트 2/2</a:t>
             </a:r>
           </a:p>
         </p:txBody>
@@ -10488,7 +11340,7 @@
                 <a:ea typeface="Pretendard"/>
                 <a:cs typeface="Pretendard"/>
               </a:rPr>
-              <a:t>증상으로 찾는 원인과 해결</a:t>
+              <a:t>열두 개를 스스로 확인해 보세요 — 제출</a:t>
             </a:r>
           </a:p>
         </p:txBody>
@@ -10531,8 +11383,8 @@
         </p:nvSpPr>
         <p:spPr>
           <a:xfrm>
-            <a:off x="1143000" y="2781300"/>
-            <a:ext cx="4122420" cy="590550"/>
+            <a:off x="1143000" y="2876550"/>
+            <a:ext cx="1428750" cy="542925"/>
           </a:xfrm>
           <a:prstGeom prst="rect">
             <a:avLst/>
@@ -10561,8 +11413,8 @@
         </p:nvSpPr>
         <p:spPr>
           <a:xfrm>
-            <a:off x="1143000" y="2781300"/>
-            <a:ext cx="4122420" cy="590550"/>
+            <a:off x="1409700" y="2876550"/>
+            <a:ext cx="895350" cy="542925"/>
           </a:xfrm>
           <a:prstGeom prst="rect">
             <a:avLst/>
@@ -10575,13 +11427,13 @@
           </a:bodyPr>
           <a:lstStyle/>
           <a:p>
-            <a:pPr algn="ctr">
+            <a:pPr algn="l">
               <a:lnSpc>
                 <a:spcPct val="100000"/>
               </a:lnSpc>
             </a:pPr>
             <a:r>
-              <a:rPr sz="2025" b="1">
+              <a:rPr sz="2175" b="1">
                 <a:solidFill>
                   <a:srgbClr val="FFFFFF"/>
                 </a:solidFill>
@@ -10589,7 +11441,7 @@
                 <a:ea typeface="Pretendard"/>
                 <a:cs typeface="Pretendard"/>
               </a:rPr>
-              <a:t>증상</a:t>
+              <a:t>7</a:t>
             </a:r>
           </a:p>
         </p:txBody>
@@ -10602,14 +11454,87 @@
         </p:nvSpPr>
         <p:spPr>
           <a:xfrm>
-            <a:off x="5303520" y="2781300"/>
-            <a:ext cx="5402580" cy="590550"/>
-          </a:xfrm>
-          <a:prstGeom prst="rect">
-            <a:avLst/>
-          </a:prstGeom>
-          <a:solidFill>
-            <a:srgbClr val="1E5BC6"/>
+            <a:off x="2571750" y="2876550"/>
+            <a:ext cx="14573250" cy="542925"/>
+          </a:xfrm>
+          <a:prstGeom prst="rect">
+            <a:avLst/>
+          </a:prstGeom>
+          <a:solidFill>
+            <a:srgbClr val="FAFBFD"/>
+          </a:solidFill>
+          <a:ln w="9525">
+            <a:solidFill>
+              <a:srgbClr val="DCE1E8"/>
+            </a:solidFill>
+          </a:ln>
+          <a:effectLst/>
+        </p:spPr>
+        <p:txBody>
+          <a:bodyPr rtlCol="0" anchor="ctr" wrap="square"/>
+          <a:lstStyle/>
+          <a:p>
+            <a:pPr algn="ctr"/>
+          </a:p>
+        </p:txBody>
+      </p:sp>
+      <p:sp>
+        <p:nvSpPr>
+          <p:cNvPr id="11" name="TextBox 10"/>
+          <p:cNvSpPr txBox="1"/>
+          <p:nvPr/>
+        </p:nvSpPr>
+        <p:spPr>
+          <a:xfrm>
+            <a:off x="2857500" y="2876550"/>
+            <a:ext cx="14001750" cy="542925"/>
+          </a:xfrm>
+          <a:prstGeom prst="rect">
+            <a:avLst/>
+          </a:prstGeom>
+          <a:noFill/>
+        </p:spPr>
+        <p:txBody>
+          <a:bodyPr wrap="square" lIns="0" rIns="0" tIns="0" bIns="0" anchor="ctr">
+            <a:spAutoFit/>
+          </a:bodyPr>
+          <a:lstStyle/>
+          <a:p>
+            <a:pPr algn="l">
+              <a:lnSpc>
+                <a:spcPct val="100000"/>
+              </a:lnSpc>
+            </a:pPr>
+            <a:r>
+              <a:rPr sz="2100" b="0">
+                <a:solidFill>
+                  <a:srgbClr val="3D3D3D"/>
+                </a:solidFill>
+                <a:latin typeface="Pretendard"/>
+                <a:ea typeface="Pretendard"/>
+                <a:cs typeface="Pretendard"/>
+              </a:rPr>
+              <a:t>마스터를 껐다 켜도 워커가 스스로 다시 등록되는 것을 로그로 확인했다</a:t>
+            </a:r>
+          </a:p>
+        </p:txBody>
+      </p:sp>
+      <p:sp>
+        <p:nvSpPr>
+          <p:cNvPr id="12" name="Rectangle 11"/>
+          <p:cNvSpPr/>
+          <p:nvPr/>
+        </p:nvSpPr>
+        <p:spPr>
+          <a:xfrm>
+            <a:off x="1143000" y="3533775"/>
+            <a:ext cx="1428750" cy="542925"/>
+          </a:xfrm>
+          <a:prstGeom prst="rect">
+            <a:avLst/>
+          </a:prstGeom>
+          <a:solidFill>
+            <a:srgbClr val="0D2B5E"/>
           </a:solidFill>
           <a:ln>
             <a:noFill/>
@@ -10626,14 +11551,14 @@
       </p:sp>
       <p:sp>
         <p:nvSpPr>
-          <p:cNvPr id="11" name="TextBox 10"/>
-          <p:cNvSpPr txBox="1"/>
-          <p:nvPr/>
-        </p:nvSpPr>
-        <p:spPr>
-          <a:xfrm>
-            <a:off x="5303520" y="2781300"/>
-            <a:ext cx="5402580" cy="590550"/>
+          <p:cNvPr id="13" name="TextBox 12"/>
+          <p:cNvSpPr txBox="1"/>
+          <p:nvPr/>
+        </p:nvSpPr>
+        <p:spPr>
+          <a:xfrm>
+            <a:off x="1409700" y="3533775"/>
+            <a:ext cx="895350" cy="542925"/>
           </a:xfrm>
           <a:prstGeom prst="rect">
             <a:avLst/>
@@ -10646,13 +11571,13 @@
           </a:bodyPr>
           <a:lstStyle/>
           <a:p>
-            <a:pPr algn="ctr">
+            <a:pPr algn="l">
               <a:lnSpc>
                 <a:spcPct val="100000"/>
               </a:lnSpc>
             </a:pPr>
             <a:r>
-              <a:rPr sz="2025" b="1">
+              <a:rPr sz="2175" b="1">
                 <a:solidFill>
                   <a:srgbClr val="FFFFFF"/>
                 </a:solidFill>
@@ -10660,27 +11585,100 @@
                 <a:ea typeface="Pretendard"/>
                 <a:cs typeface="Pretendard"/>
               </a:rPr>
-              <a:t>원인</a:t>
-            </a:r>
-          </a:p>
-        </p:txBody>
-      </p:sp>
-      <p:sp>
-        <p:nvSpPr>
-          <p:cNvPr id="12" name="Rectangle 11"/>
-          <p:cNvSpPr/>
-          <p:nvPr/>
-        </p:nvSpPr>
-        <p:spPr>
-          <a:xfrm>
-            <a:off x="10744200" y="2781300"/>
-            <a:ext cx="6400800" cy="590550"/>
-          </a:xfrm>
-          <a:prstGeom prst="rect">
-            <a:avLst/>
-          </a:prstGeom>
-          <a:solidFill>
-            <a:srgbClr val="1E5BC6"/>
+              <a:t>8</a:t>
+            </a:r>
+          </a:p>
+        </p:txBody>
+      </p:sp>
+      <p:sp>
+        <p:nvSpPr>
+          <p:cNvPr id="14" name="Rectangle 13"/>
+          <p:cNvSpPr/>
+          <p:nvPr/>
+        </p:nvSpPr>
+        <p:spPr>
+          <a:xfrm>
+            <a:off x="2571750" y="3533775"/>
+            <a:ext cx="14573250" cy="542925"/>
+          </a:xfrm>
+          <a:prstGeom prst="rect">
+            <a:avLst/>
+          </a:prstGeom>
+          <a:solidFill>
+            <a:srgbClr val="FAFBFD"/>
+          </a:solidFill>
+          <a:ln w="9525">
+            <a:solidFill>
+              <a:srgbClr val="DCE1E8"/>
+            </a:solidFill>
+          </a:ln>
+          <a:effectLst/>
+        </p:spPr>
+        <p:txBody>
+          <a:bodyPr rtlCol="0" anchor="ctr" wrap="square"/>
+          <a:lstStyle/>
+          <a:p>
+            <a:pPr algn="ctr"/>
+          </a:p>
+        </p:txBody>
+      </p:sp>
+      <p:sp>
+        <p:nvSpPr>
+          <p:cNvPr id="15" name="TextBox 14"/>
+          <p:cNvSpPr txBox="1"/>
+          <p:nvPr/>
+        </p:nvSpPr>
+        <p:spPr>
+          <a:xfrm>
+            <a:off x="2857500" y="3533775"/>
+            <a:ext cx="14001750" cy="542925"/>
+          </a:xfrm>
+          <a:prstGeom prst="rect">
+            <a:avLst/>
+          </a:prstGeom>
+          <a:noFill/>
+        </p:spPr>
+        <p:txBody>
+          <a:bodyPr wrap="square" lIns="0" rIns="0" tIns="0" bIns="0" anchor="ctr">
+            <a:spAutoFit/>
+          </a:bodyPr>
+          <a:lstStyle/>
+          <a:p>
+            <a:pPr algn="l">
+              <a:lnSpc>
+                <a:spcPct val="100000"/>
+              </a:lnSpc>
+            </a:pPr>
+            <a:r>
+              <a:rPr sz="2100" b="0">
+                <a:solidFill>
+                  <a:srgbClr val="3D3D3D"/>
+                </a:solidFill>
+                <a:latin typeface="Pretendard"/>
+                <a:ea typeface="Pretendard"/>
+                <a:cs typeface="Pretendard"/>
+              </a:rPr>
+              <a:t>spark-submit --master 옵션의 의미를 설명할 수 있다</a:t>
+            </a:r>
+          </a:p>
+        </p:txBody>
+      </p:sp>
+      <p:sp>
+        <p:nvSpPr>
+          <p:cNvPr id="16" name="Rectangle 15"/>
+          <p:cNvSpPr/>
+          <p:nvPr/>
+        </p:nvSpPr>
+        <p:spPr>
+          <a:xfrm>
+            <a:off x="1143000" y="4191000"/>
+            <a:ext cx="1428750" cy="542925"/>
+          </a:xfrm>
+          <a:prstGeom prst="rect">
+            <a:avLst/>
+          </a:prstGeom>
+          <a:solidFill>
+            <a:srgbClr val="0D2B5E"/>
           </a:solidFill>
           <a:ln>
             <a:noFill/>
@@ -10697,14 +11695,14 @@
       </p:sp>
       <p:sp>
         <p:nvSpPr>
-          <p:cNvPr id="13" name="TextBox 12"/>
-          <p:cNvSpPr txBox="1"/>
-          <p:nvPr/>
-        </p:nvSpPr>
-        <p:spPr>
-          <a:xfrm>
-            <a:off x="10744200" y="2781300"/>
-            <a:ext cx="6400800" cy="590550"/>
+          <p:cNvPr id="17" name="TextBox 16"/>
+          <p:cNvSpPr txBox="1"/>
+          <p:nvPr/>
+        </p:nvSpPr>
+        <p:spPr>
+          <a:xfrm>
+            <a:off x="1409700" y="4191000"/>
+            <a:ext cx="895350" cy="542925"/>
           </a:xfrm>
           <a:prstGeom prst="rect">
             <a:avLst/>
@@ -10717,13 +11715,13 @@
           </a:bodyPr>
           <a:lstStyle/>
           <a:p>
-            <a:pPr algn="ctr">
+            <a:pPr algn="l">
               <a:lnSpc>
                 <a:spcPct val="100000"/>
               </a:lnSpc>
             </a:pPr>
             <a:r>
-              <a:rPr sz="2025" b="1">
+              <a:rPr sz="2175" b="1">
                 <a:solidFill>
                   <a:srgbClr val="FFFFFF"/>
                 </a:solidFill>
@@ -10731,25 +11729,530 @@
                 <a:ea typeface="Pretendard"/>
                 <a:cs typeface="Pretendard"/>
               </a:rPr>
-              <a:t>해결</a:t>
-            </a:r>
-          </a:p>
-        </p:txBody>
-      </p:sp>
-      <p:sp>
-        <p:nvSpPr>
-          <p:cNvPr id="14" name="Rounded Rectangle 13"/>
-          <p:cNvSpPr/>
-          <p:nvPr/>
-        </p:nvSpPr>
-        <p:spPr>
-          <a:xfrm>
-            <a:off x="1143000" y="3448050"/>
-            <a:ext cx="4122420" cy="647700"/>
+              <a:t>9</a:t>
+            </a:r>
+          </a:p>
+        </p:txBody>
+      </p:sp>
+      <p:sp>
+        <p:nvSpPr>
+          <p:cNvPr id="18" name="Rectangle 17"/>
+          <p:cNvSpPr/>
+          <p:nvPr/>
+        </p:nvSpPr>
+        <p:spPr>
+          <a:xfrm>
+            <a:off x="2571750" y="4191000"/>
+            <a:ext cx="14573250" cy="542925"/>
+          </a:xfrm>
+          <a:prstGeom prst="rect">
+            <a:avLst/>
+          </a:prstGeom>
+          <a:solidFill>
+            <a:srgbClr val="FAFBFD"/>
+          </a:solidFill>
+          <a:ln w="9525">
+            <a:solidFill>
+              <a:srgbClr val="DCE1E8"/>
+            </a:solidFill>
+          </a:ln>
+          <a:effectLst/>
+        </p:spPr>
+        <p:txBody>
+          <a:bodyPr rtlCol="0" anchor="ctr" wrap="square"/>
+          <a:lstStyle/>
+          <a:p>
+            <a:pPr algn="ctr"/>
+          </a:p>
+        </p:txBody>
+      </p:sp>
+      <p:sp>
+        <p:nvSpPr>
+          <p:cNvPr id="19" name="TextBox 18"/>
+          <p:cNvSpPr txBox="1"/>
+          <p:nvPr/>
+        </p:nvSpPr>
+        <p:spPr>
+          <a:xfrm>
+            <a:off x="2857500" y="4191000"/>
+            <a:ext cx="14001750" cy="542925"/>
+          </a:xfrm>
+          <a:prstGeom prst="rect">
+            <a:avLst/>
+          </a:prstGeom>
+          <a:noFill/>
+        </p:spPr>
+        <p:txBody>
+          <a:bodyPr wrap="square" lIns="0" rIns="0" tIns="0" bIns="0" anchor="ctr">
+            <a:spAutoFit/>
+          </a:bodyPr>
+          <a:lstStyle/>
+          <a:p>
+            <a:pPr algn="l">
+              <a:lnSpc>
+                <a:spcPct val="100000"/>
+              </a:lnSpc>
+            </a:pPr>
+            <a:r>
+              <a:rPr sz="2100" b="0">
+                <a:solidFill>
+                  <a:srgbClr val="3D3D3D"/>
+                </a:solidFill>
+                <a:latin typeface="Pretendard"/>
+                <a:ea typeface="Pretendard"/>
+                <a:cs typeface="Pretendard"/>
+              </a:rPr>
+              <a:t>직접 작성한 PySpark 스크립트를 클러스터에서 실행했다</a:t>
+            </a:r>
+          </a:p>
+        </p:txBody>
+      </p:sp>
+      <p:sp>
+        <p:nvSpPr>
+          <p:cNvPr id="20" name="Rectangle 19"/>
+          <p:cNvSpPr/>
+          <p:nvPr/>
+        </p:nvSpPr>
+        <p:spPr>
+          <a:xfrm>
+            <a:off x="1143000" y="4848225"/>
+            <a:ext cx="1428750" cy="542925"/>
+          </a:xfrm>
+          <a:prstGeom prst="rect">
+            <a:avLst/>
+          </a:prstGeom>
+          <a:solidFill>
+            <a:srgbClr val="0D2B5E"/>
+          </a:solidFill>
+          <a:ln>
+            <a:noFill/>
+          </a:ln>
+          <a:effectLst/>
+        </p:spPr>
+        <p:txBody>
+          <a:bodyPr rtlCol="0" anchor="ctr" wrap="square"/>
+          <a:lstStyle/>
+          <a:p>
+            <a:pPr algn="ctr"/>
+          </a:p>
+        </p:txBody>
+      </p:sp>
+      <p:sp>
+        <p:nvSpPr>
+          <p:cNvPr id="21" name="TextBox 20"/>
+          <p:cNvSpPr txBox="1"/>
+          <p:nvPr/>
+        </p:nvSpPr>
+        <p:spPr>
+          <a:xfrm>
+            <a:off x="1409700" y="4848225"/>
+            <a:ext cx="895350" cy="542925"/>
+          </a:xfrm>
+          <a:prstGeom prst="rect">
+            <a:avLst/>
+          </a:prstGeom>
+          <a:noFill/>
+        </p:spPr>
+        <p:txBody>
+          <a:bodyPr wrap="square" lIns="0" rIns="0" tIns="0" bIns="0" anchor="ctr">
+            <a:spAutoFit/>
+          </a:bodyPr>
+          <a:lstStyle/>
+          <a:p>
+            <a:pPr algn="l">
+              <a:lnSpc>
+                <a:spcPct val="100000"/>
+              </a:lnSpc>
+            </a:pPr>
+            <a:r>
+              <a:rPr sz="2175" b="1">
+                <a:solidFill>
+                  <a:srgbClr val="FFFFFF"/>
+                </a:solidFill>
+                <a:latin typeface="Pretendard"/>
+                <a:ea typeface="Pretendard"/>
+                <a:cs typeface="Pretendard"/>
+              </a:rPr>
+              <a:t>10</a:t>
+            </a:r>
+          </a:p>
+        </p:txBody>
+      </p:sp>
+      <p:sp>
+        <p:nvSpPr>
+          <p:cNvPr id="22" name="Rectangle 21"/>
+          <p:cNvSpPr/>
+          <p:nvPr/>
+        </p:nvSpPr>
+        <p:spPr>
+          <a:xfrm>
+            <a:off x="2571750" y="4848225"/>
+            <a:ext cx="14573250" cy="542925"/>
+          </a:xfrm>
+          <a:prstGeom prst="rect">
+            <a:avLst/>
+          </a:prstGeom>
+          <a:solidFill>
+            <a:srgbClr val="FAFBFD"/>
+          </a:solidFill>
+          <a:ln w="9525">
+            <a:solidFill>
+              <a:srgbClr val="DCE1E8"/>
+            </a:solidFill>
+          </a:ln>
+          <a:effectLst/>
+        </p:spPr>
+        <p:txBody>
+          <a:bodyPr rtlCol="0" anchor="ctr" wrap="square"/>
+          <a:lstStyle/>
+          <a:p>
+            <a:pPr algn="ctr"/>
+          </a:p>
+        </p:txBody>
+      </p:sp>
+      <p:sp>
+        <p:nvSpPr>
+          <p:cNvPr id="23" name="TextBox 22"/>
+          <p:cNvSpPr txBox="1"/>
+          <p:nvPr/>
+        </p:nvSpPr>
+        <p:spPr>
+          <a:xfrm>
+            <a:off x="2857500" y="4848225"/>
+            <a:ext cx="14001750" cy="542925"/>
+          </a:xfrm>
+          <a:prstGeom prst="rect">
+            <a:avLst/>
+          </a:prstGeom>
+          <a:noFill/>
+        </p:spPr>
+        <p:txBody>
+          <a:bodyPr wrap="square" lIns="0" rIns="0" tIns="0" bIns="0" anchor="ctr">
+            <a:spAutoFit/>
+          </a:bodyPr>
+          <a:lstStyle/>
+          <a:p>
+            <a:pPr algn="l">
+              <a:lnSpc>
+                <a:spcPct val="100000"/>
+              </a:lnSpc>
+            </a:pPr>
+            <a:r>
+              <a:rPr sz="2100" b="0">
+                <a:solidFill>
+                  <a:srgbClr val="3D3D3D"/>
+                </a:solidFill>
+                <a:latin typeface="Pretendard"/>
+                <a:ea typeface="Pretendard"/>
+                <a:cs typeface="Pretendard"/>
+              </a:rPr>
+              <a:t>master 값이 local[*] 에서 spark://… 로 바뀐 것을 확인했다</a:t>
+            </a:r>
+          </a:p>
+        </p:txBody>
+      </p:sp>
+      <p:sp>
+        <p:nvSpPr>
+          <p:cNvPr id="24" name="Rectangle 23"/>
+          <p:cNvSpPr/>
+          <p:nvPr/>
+        </p:nvSpPr>
+        <p:spPr>
+          <a:xfrm>
+            <a:off x="1143000" y="5505450"/>
+            <a:ext cx="1428750" cy="542925"/>
+          </a:xfrm>
+          <a:prstGeom prst="rect">
+            <a:avLst/>
+          </a:prstGeom>
+          <a:solidFill>
+            <a:srgbClr val="0D2B5E"/>
+          </a:solidFill>
+          <a:ln>
+            <a:noFill/>
+          </a:ln>
+          <a:effectLst/>
+        </p:spPr>
+        <p:txBody>
+          <a:bodyPr rtlCol="0" anchor="ctr" wrap="square"/>
+          <a:lstStyle/>
+          <a:p>
+            <a:pPr algn="ctr"/>
+          </a:p>
+        </p:txBody>
+      </p:sp>
+      <p:sp>
+        <p:nvSpPr>
+          <p:cNvPr id="25" name="TextBox 24"/>
+          <p:cNvSpPr txBox="1"/>
+          <p:nvPr/>
+        </p:nvSpPr>
+        <p:spPr>
+          <a:xfrm>
+            <a:off x="1409700" y="5505450"/>
+            <a:ext cx="895350" cy="542925"/>
+          </a:xfrm>
+          <a:prstGeom prst="rect">
+            <a:avLst/>
+          </a:prstGeom>
+          <a:noFill/>
+        </p:spPr>
+        <p:txBody>
+          <a:bodyPr wrap="square" lIns="0" rIns="0" tIns="0" bIns="0" anchor="ctr">
+            <a:spAutoFit/>
+          </a:bodyPr>
+          <a:lstStyle/>
+          <a:p>
+            <a:pPr algn="l">
+              <a:lnSpc>
+                <a:spcPct val="100000"/>
+              </a:lnSpc>
+            </a:pPr>
+            <a:r>
+              <a:rPr sz="2175" b="1">
+                <a:solidFill>
+                  <a:srgbClr val="FFFFFF"/>
+                </a:solidFill>
+                <a:latin typeface="Pretendard"/>
+                <a:ea typeface="Pretendard"/>
+                <a:cs typeface="Pretendard"/>
+              </a:rPr>
+              <a:t>11</a:t>
+            </a:r>
+          </a:p>
+        </p:txBody>
+      </p:sp>
+      <p:sp>
+        <p:nvSpPr>
+          <p:cNvPr id="26" name="Rectangle 25"/>
+          <p:cNvSpPr/>
+          <p:nvPr/>
+        </p:nvSpPr>
+        <p:spPr>
+          <a:xfrm>
+            <a:off x="2571750" y="5505450"/>
+            <a:ext cx="14573250" cy="542925"/>
+          </a:xfrm>
+          <a:prstGeom prst="rect">
+            <a:avLst/>
+          </a:prstGeom>
+          <a:solidFill>
+            <a:srgbClr val="FAFBFD"/>
+          </a:solidFill>
+          <a:ln w="9525">
+            <a:solidFill>
+              <a:srgbClr val="DCE1E8"/>
+            </a:solidFill>
+          </a:ln>
+          <a:effectLst/>
+        </p:spPr>
+        <p:txBody>
+          <a:bodyPr rtlCol="0" anchor="ctr" wrap="square"/>
+          <a:lstStyle/>
+          <a:p>
+            <a:pPr algn="ctr"/>
+          </a:p>
+        </p:txBody>
+      </p:sp>
+      <p:sp>
+        <p:nvSpPr>
+          <p:cNvPr id="27" name="TextBox 26"/>
+          <p:cNvSpPr txBox="1"/>
+          <p:nvPr/>
+        </p:nvSpPr>
+        <p:spPr>
+          <a:xfrm>
+            <a:off x="2857500" y="5505450"/>
+            <a:ext cx="14001750" cy="542925"/>
+          </a:xfrm>
+          <a:prstGeom prst="rect">
+            <a:avLst/>
+          </a:prstGeom>
+          <a:noFill/>
+        </p:spPr>
+        <p:txBody>
+          <a:bodyPr wrap="square" lIns="0" rIns="0" tIns="0" bIns="0" anchor="ctr">
+            <a:spAutoFit/>
+          </a:bodyPr>
+          <a:lstStyle/>
+          <a:p>
+            <a:pPr algn="l">
+              <a:lnSpc>
+                <a:spcPct val="100000"/>
+              </a:lnSpc>
+            </a:pPr>
+            <a:r>
+              <a:rPr sz="2100" b="0">
+                <a:solidFill>
+                  <a:srgbClr val="3D3D3D"/>
+                </a:solidFill>
+                <a:latin typeface="Pretendard"/>
+                <a:ea typeface="Pretendard"/>
+                <a:cs typeface="Pretendard"/>
+              </a:rPr>
+              <a:t>자원을 과하게 요구해 WAITING 상태를 직접 만들어 봤다</a:t>
+            </a:r>
+          </a:p>
+        </p:txBody>
+      </p:sp>
+      <p:sp>
+        <p:nvSpPr>
+          <p:cNvPr id="28" name="Rectangle 27"/>
+          <p:cNvSpPr/>
+          <p:nvPr/>
+        </p:nvSpPr>
+        <p:spPr>
+          <a:xfrm>
+            <a:off x="1143000" y="6162675"/>
+            <a:ext cx="1428750" cy="542925"/>
+          </a:xfrm>
+          <a:prstGeom prst="rect">
+            <a:avLst/>
+          </a:prstGeom>
+          <a:solidFill>
+            <a:srgbClr val="0D2B5E"/>
+          </a:solidFill>
+          <a:ln>
+            <a:noFill/>
+          </a:ln>
+          <a:effectLst/>
+        </p:spPr>
+        <p:txBody>
+          <a:bodyPr rtlCol="0" anchor="ctr" wrap="square"/>
+          <a:lstStyle/>
+          <a:p>
+            <a:pPr algn="ctr"/>
+          </a:p>
+        </p:txBody>
+      </p:sp>
+      <p:sp>
+        <p:nvSpPr>
+          <p:cNvPr id="29" name="TextBox 28"/>
+          <p:cNvSpPr txBox="1"/>
+          <p:nvPr/>
+        </p:nvSpPr>
+        <p:spPr>
+          <a:xfrm>
+            <a:off x="1409700" y="6162675"/>
+            <a:ext cx="895350" cy="542925"/>
+          </a:xfrm>
+          <a:prstGeom prst="rect">
+            <a:avLst/>
+          </a:prstGeom>
+          <a:noFill/>
+        </p:spPr>
+        <p:txBody>
+          <a:bodyPr wrap="square" lIns="0" rIns="0" tIns="0" bIns="0" anchor="ctr">
+            <a:spAutoFit/>
+          </a:bodyPr>
+          <a:lstStyle/>
+          <a:p>
+            <a:pPr algn="l">
+              <a:lnSpc>
+                <a:spcPct val="100000"/>
+              </a:lnSpc>
+            </a:pPr>
+            <a:r>
+              <a:rPr sz="2175" b="1">
+                <a:solidFill>
+                  <a:srgbClr val="FFFFFF"/>
+                </a:solidFill>
+                <a:latin typeface="Pretendard"/>
+                <a:ea typeface="Pretendard"/>
+                <a:cs typeface="Pretendard"/>
+              </a:rPr>
+              <a:t>12</a:t>
+            </a:r>
+          </a:p>
+        </p:txBody>
+      </p:sp>
+      <p:sp>
+        <p:nvSpPr>
+          <p:cNvPr id="30" name="Rectangle 29"/>
+          <p:cNvSpPr/>
+          <p:nvPr/>
+        </p:nvSpPr>
+        <p:spPr>
+          <a:xfrm>
+            <a:off x="2571750" y="6162675"/>
+            <a:ext cx="14573250" cy="542925"/>
+          </a:xfrm>
+          <a:prstGeom prst="rect">
+            <a:avLst/>
+          </a:prstGeom>
+          <a:solidFill>
+            <a:srgbClr val="FAFBFD"/>
+          </a:solidFill>
+          <a:ln w="9525">
+            <a:solidFill>
+              <a:srgbClr val="DCE1E8"/>
+            </a:solidFill>
+          </a:ln>
+          <a:effectLst/>
+        </p:spPr>
+        <p:txBody>
+          <a:bodyPr rtlCol="0" anchor="ctr" wrap="square"/>
+          <a:lstStyle/>
+          <a:p>
+            <a:pPr algn="ctr"/>
+          </a:p>
+        </p:txBody>
+      </p:sp>
+      <p:sp>
+        <p:nvSpPr>
+          <p:cNvPr id="31" name="TextBox 30"/>
+          <p:cNvSpPr txBox="1"/>
+          <p:nvPr/>
+        </p:nvSpPr>
+        <p:spPr>
+          <a:xfrm>
+            <a:off x="2857500" y="6162675"/>
+            <a:ext cx="14001750" cy="542925"/>
+          </a:xfrm>
+          <a:prstGeom prst="rect">
+            <a:avLst/>
+          </a:prstGeom>
+          <a:noFill/>
+        </p:spPr>
+        <p:txBody>
+          <a:bodyPr wrap="square" lIns="0" rIns="0" tIns="0" bIns="0" anchor="ctr">
+            <a:spAutoFit/>
+          </a:bodyPr>
+          <a:lstStyle/>
+          <a:p>
+            <a:pPr algn="l">
+              <a:lnSpc>
+                <a:spcPct val="100000"/>
+              </a:lnSpc>
+            </a:pPr>
+            <a:r>
+              <a:rPr sz="2100" b="0">
+                <a:solidFill>
+                  <a:srgbClr val="3D3D3D"/>
+                </a:solidFill>
+                <a:latin typeface="Pretendard"/>
+                <a:ea typeface="Pretendard"/>
+                <a:cs typeface="Pretendard"/>
+              </a:rPr>
+              <a:t>--total-executor-cores 로 두 잡을 동시에 돌려 봤다</a:t>
+            </a:r>
+          </a:p>
+        </p:txBody>
+      </p:sp>
+      <p:sp>
+        <p:nvSpPr>
+          <p:cNvPr id="32" name="Rounded Rectangle 31"/>
+          <p:cNvSpPr/>
+          <p:nvPr/>
+        </p:nvSpPr>
+        <p:spPr>
+          <a:xfrm>
+            <a:off x="1143000" y="6953250"/>
+            <a:ext cx="16002000" cy="876300"/>
           </a:xfrm>
           <a:prstGeom prst="roundRect">
             <a:avLst>
-              <a:gd name="adj" fmla="val 5882"/>
+              <a:gd name="adj" fmla="val 5434"/>
             </a:avLst>
           </a:prstGeom>
           <a:solidFill>
@@ -10772,33 +12275,33 @@
       </p:sp>
       <p:sp>
         <p:nvSpPr>
-          <p:cNvPr id="15" name="TextBox 14"/>
-          <p:cNvSpPr txBox="1"/>
-          <p:nvPr/>
-        </p:nvSpPr>
-        <p:spPr>
-          <a:xfrm>
-            <a:off x="1238250" y="3448050"/>
-            <a:ext cx="3931920" cy="647700"/>
-          </a:xfrm>
-          <a:prstGeom prst="rect">
-            <a:avLst/>
-          </a:prstGeom>
-          <a:noFill/>
-        </p:spPr>
-        <p:txBody>
-          <a:bodyPr wrap="square" lIns="0" rIns="0" tIns="0" bIns="0" anchor="ctr">
-            <a:spAutoFit/>
-          </a:bodyPr>
-          <a:lstStyle/>
-          <a:p>
-            <a:pPr algn="l">
-              <a:lnSpc>
-                <a:spcPct val="115000"/>
-              </a:lnSpc>
-            </a:pPr>
-            <a:r>
-              <a:rPr sz="1875" b="1">
+          <p:cNvPr id="33" name="TextBox 32"/>
+          <p:cNvSpPr txBox="1"/>
+          <p:nvPr/>
+        </p:nvSpPr>
+        <p:spPr>
+          <a:xfrm>
+            <a:off x="1143000" y="7200900"/>
+            <a:ext cx="16002000" cy="438150"/>
+          </a:xfrm>
+          <a:prstGeom prst="rect">
+            <a:avLst/>
+          </a:prstGeom>
+          <a:noFill/>
+        </p:spPr>
+        <p:txBody>
+          <a:bodyPr wrap="square" lIns="0" rIns="0" tIns="0" bIns="0" anchor="t">
+            <a:spAutoFit/>
+          </a:bodyPr>
+          <a:lstStyle/>
+          <a:p>
+            <a:pPr algn="ctr">
+              <a:lnSpc>
+                <a:spcPct val="100000"/>
+              </a:lnSpc>
+            </a:pPr>
+            <a:r>
+              <a:rPr sz="2475" b="1">
                 <a:solidFill>
                   <a:srgbClr val="0D2B5E"/>
                 </a:solidFill>
@@ -10806,1096 +12309,14 @@
                 <a:ea typeface="Pretendard"/>
                 <a:cs typeface="Pretendard"/>
               </a:rPr>
-              <a:t>Workers 표가</a:t>
-            </a:r>
-          </a:p>
-          <a:p>
-            <a:pPr algn="l">
-              <a:lnSpc>
-                <a:spcPct val="115000"/>
-              </a:lnSpc>
-            </a:pPr>
-            <a:r>
-              <a:rPr sz="1875" b="1">
-                <a:solidFill>
-                  <a:srgbClr val="0D2B5E"/>
-                </a:solidFill>
-                <a:latin typeface="Pretendard"/>
-                <a:ea typeface="Pretendard"/>
-                <a:cs typeface="Pretendard"/>
-              </a:rPr>
-              <a:t>비어 있다</a:t>
-            </a:r>
-          </a:p>
-        </p:txBody>
-      </p:sp>
-      <p:sp>
-        <p:nvSpPr>
-          <p:cNvPr id="16" name="Rounded Rectangle 15"/>
-          <p:cNvSpPr/>
-          <p:nvPr/>
-        </p:nvSpPr>
-        <p:spPr>
-          <a:xfrm>
-            <a:off x="5303520" y="3448050"/>
-            <a:ext cx="5402580" cy="647700"/>
-          </a:xfrm>
-          <a:prstGeom prst="roundRect">
-            <a:avLst>
-              <a:gd name="adj" fmla="val 5882"/>
-            </a:avLst>
-          </a:prstGeom>
-          <a:solidFill>
-            <a:srgbClr val="FAFBFD"/>
-          </a:solidFill>
-          <a:ln w="9525">
-            <a:solidFill>
-              <a:srgbClr val="DCE1E8"/>
-            </a:solidFill>
-          </a:ln>
-          <a:effectLst/>
-        </p:spPr>
-        <p:txBody>
-          <a:bodyPr rtlCol="0" anchor="ctr" wrap="square"/>
-          <a:lstStyle/>
-          <a:p>
-            <a:pPr algn="ctr"/>
-          </a:p>
-        </p:txBody>
-      </p:sp>
-      <p:sp>
-        <p:nvSpPr>
-          <p:cNvPr id="17" name="TextBox 16"/>
-          <p:cNvSpPr txBox="1"/>
-          <p:nvPr/>
-        </p:nvSpPr>
-        <p:spPr>
-          <a:xfrm>
-            <a:off x="5398770" y="3448050"/>
-            <a:ext cx="5212080" cy="647700"/>
-          </a:xfrm>
-          <a:prstGeom prst="rect">
-            <a:avLst/>
-          </a:prstGeom>
-          <a:noFill/>
-        </p:spPr>
-        <p:txBody>
-          <a:bodyPr wrap="square" lIns="0" rIns="0" tIns="0" bIns="0" anchor="ctr">
-            <a:spAutoFit/>
-          </a:bodyPr>
-          <a:lstStyle/>
-          <a:p>
-            <a:pPr algn="ctr">
-              <a:lnSpc>
-                <a:spcPct val="115000"/>
-              </a:lnSpc>
-            </a:pPr>
-            <a:r>
-              <a:rPr sz="1875" b="0">
-                <a:solidFill>
-                  <a:srgbClr val="3D3D3D"/>
-                </a:solidFill>
-                <a:latin typeface="Pretendard"/>
-                <a:ea typeface="Pretendard"/>
-                <a:cs typeface="Pretendard"/>
-              </a:rPr>
-              <a:t>마스터 주소 오타 ·</a:t>
-            </a:r>
-          </a:p>
-          <a:p>
-            <a:pPr algn="ctr">
-              <a:lnSpc>
-                <a:spcPct val="115000"/>
-              </a:lnSpc>
-            </a:pPr>
-            <a:r>
-              <a:rPr sz="1875" b="0">
-                <a:solidFill>
-                  <a:srgbClr val="3D3D3D"/>
-                </a:solidFill>
-                <a:latin typeface="Pretendard"/>
-                <a:ea typeface="Pretendard"/>
-                <a:cs typeface="Pretendard"/>
-              </a:rPr>
-              <a:t>워커가 마스터보다 먼저 뜸</a:t>
-            </a:r>
-          </a:p>
-        </p:txBody>
-      </p:sp>
-      <p:sp>
-        <p:nvSpPr>
-          <p:cNvPr id="18" name="Rounded Rectangle 17"/>
-          <p:cNvSpPr/>
-          <p:nvPr/>
-        </p:nvSpPr>
-        <p:spPr>
-          <a:xfrm>
-            <a:off x="10744200" y="3448050"/>
-            <a:ext cx="6400800" cy="647700"/>
-          </a:xfrm>
-          <a:prstGeom prst="roundRect">
-            <a:avLst>
-              <a:gd name="adj" fmla="val 5882"/>
-            </a:avLst>
-          </a:prstGeom>
-          <a:solidFill>
-            <a:srgbClr val="FAFBFD"/>
-          </a:solidFill>
-          <a:ln w="9525">
-            <a:solidFill>
-              <a:srgbClr val="DCE1E8"/>
-            </a:solidFill>
-          </a:ln>
-          <a:effectLst/>
-        </p:spPr>
-        <p:txBody>
-          <a:bodyPr rtlCol="0" anchor="ctr" wrap="square"/>
-          <a:lstStyle/>
-          <a:p>
-            <a:pPr algn="ctr"/>
-          </a:p>
-        </p:txBody>
-      </p:sp>
-      <p:sp>
-        <p:nvSpPr>
-          <p:cNvPr id="19" name="TextBox 18"/>
-          <p:cNvSpPr txBox="1"/>
-          <p:nvPr/>
-        </p:nvSpPr>
-        <p:spPr>
-          <a:xfrm>
-            <a:off x="10839450" y="3448050"/>
-            <a:ext cx="6210300" cy="647700"/>
-          </a:xfrm>
-          <a:prstGeom prst="rect">
-            <a:avLst/>
-          </a:prstGeom>
-          <a:noFill/>
-        </p:spPr>
-        <p:txBody>
-          <a:bodyPr wrap="square" lIns="0" rIns="0" tIns="0" bIns="0" anchor="ctr">
-            <a:spAutoFit/>
-          </a:bodyPr>
-          <a:lstStyle/>
-          <a:p>
-            <a:pPr algn="ctr">
-              <a:lnSpc>
-                <a:spcPct val="115000"/>
-              </a:lnSpc>
-            </a:pPr>
-            <a:r>
-              <a:rPr sz="1875" b="0">
-                <a:solidFill>
-                  <a:srgbClr val="3D3D3D"/>
-                </a:solidFill>
-                <a:latin typeface="Pretendard"/>
-                <a:ea typeface="Pretendard"/>
-                <a:cs typeface="Pretendard"/>
-              </a:rPr>
-              <a:t>spark-master:7077 확인 ·</a:t>
-            </a:r>
-          </a:p>
-          <a:p>
-            <a:pPr algn="ctr">
-              <a:lnSpc>
-                <a:spcPct val="115000"/>
-              </a:lnSpc>
-            </a:pPr>
-            <a:r>
-              <a:rPr sz="1875" b="0">
-                <a:solidFill>
-                  <a:srgbClr val="3D3D3D"/>
-                </a:solidFill>
-                <a:latin typeface="Pretendard"/>
-                <a:ea typeface="Pretendard"/>
-                <a:cs typeface="Pretendard"/>
-              </a:rPr>
-              <a:t>restart spark-worker</a:t>
-            </a:r>
-          </a:p>
-        </p:txBody>
-      </p:sp>
-      <p:sp>
-        <p:nvSpPr>
-          <p:cNvPr id="20" name="Rounded Rectangle 19"/>
-          <p:cNvSpPr/>
-          <p:nvPr/>
-        </p:nvSpPr>
-        <p:spPr>
-          <a:xfrm>
-            <a:off x="1143000" y="4171950"/>
-            <a:ext cx="4122420" cy="647700"/>
-          </a:xfrm>
-          <a:prstGeom prst="roundRect">
-            <a:avLst>
-              <a:gd name="adj" fmla="val 5882"/>
-            </a:avLst>
-          </a:prstGeom>
-          <a:solidFill>
-            <a:srgbClr val="EDF3FD"/>
-          </a:solidFill>
-          <a:ln w="9525">
-            <a:solidFill>
-              <a:srgbClr val="BFD3F5"/>
-            </a:solidFill>
-          </a:ln>
-          <a:effectLst/>
-        </p:spPr>
-        <p:txBody>
-          <a:bodyPr rtlCol="0" anchor="ctr" wrap="square"/>
-          <a:lstStyle/>
-          <a:p>
-            <a:pPr algn="ctr"/>
-          </a:p>
-        </p:txBody>
-      </p:sp>
-      <p:sp>
-        <p:nvSpPr>
-          <p:cNvPr id="21" name="TextBox 20"/>
-          <p:cNvSpPr txBox="1"/>
-          <p:nvPr/>
-        </p:nvSpPr>
-        <p:spPr>
-          <a:xfrm>
-            <a:off x="1238250" y="4171950"/>
-            <a:ext cx="3931920" cy="647700"/>
-          </a:xfrm>
-          <a:prstGeom prst="rect">
-            <a:avLst/>
-          </a:prstGeom>
-          <a:noFill/>
-        </p:spPr>
-        <p:txBody>
-          <a:bodyPr wrap="square" lIns="0" rIns="0" tIns="0" bIns="0" anchor="ctr">
-            <a:spAutoFit/>
-          </a:bodyPr>
-          <a:lstStyle/>
-          <a:p>
-            <a:pPr algn="l">
-              <a:lnSpc>
-                <a:spcPct val="115000"/>
-              </a:lnSpc>
-            </a:pPr>
-            <a:r>
-              <a:rPr sz="1875" b="1">
-                <a:solidFill>
-                  <a:srgbClr val="0D2B5E"/>
-                </a:solidFill>
-                <a:latin typeface="Pretendard"/>
-                <a:ea typeface="Pretendard"/>
-                <a:cs typeface="Pretendard"/>
-              </a:rPr>
-              <a:t>port is already</a:t>
-            </a:r>
-          </a:p>
-          <a:p>
-            <a:pPr algn="l">
-              <a:lnSpc>
-                <a:spcPct val="115000"/>
-              </a:lnSpc>
-            </a:pPr>
-            <a:r>
-              <a:rPr sz="1875" b="1">
-                <a:solidFill>
-                  <a:srgbClr val="0D2B5E"/>
-                </a:solidFill>
-                <a:latin typeface="Pretendard"/>
-                <a:ea typeface="Pretendard"/>
-                <a:cs typeface="Pretendard"/>
-              </a:rPr>
-              <a:t>allocated</a:t>
-            </a:r>
-          </a:p>
-        </p:txBody>
-      </p:sp>
-      <p:sp>
-        <p:nvSpPr>
-          <p:cNvPr id="22" name="Rounded Rectangle 21"/>
-          <p:cNvSpPr/>
-          <p:nvPr/>
-        </p:nvSpPr>
-        <p:spPr>
-          <a:xfrm>
-            <a:off x="5303520" y="4171950"/>
-            <a:ext cx="5402580" cy="647700"/>
-          </a:xfrm>
-          <a:prstGeom prst="roundRect">
-            <a:avLst>
-              <a:gd name="adj" fmla="val 5882"/>
-            </a:avLst>
-          </a:prstGeom>
-          <a:solidFill>
-            <a:srgbClr val="FAFBFD"/>
-          </a:solidFill>
-          <a:ln w="9525">
-            <a:solidFill>
-              <a:srgbClr val="DCE1E8"/>
-            </a:solidFill>
-          </a:ln>
-          <a:effectLst/>
-        </p:spPr>
-        <p:txBody>
-          <a:bodyPr rtlCol="0" anchor="ctr" wrap="square"/>
-          <a:lstStyle/>
-          <a:p>
-            <a:pPr algn="ctr"/>
-          </a:p>
-        </p:txBody>
-      </p:sp>
-      <p:sp>
-        <p:nvSpPr>
-          <p:cNvPr id="23" name="TextBox 22"/>
-          <p:cNvSpPr txBox="1"/>
-          <p:nvPr/>
-        </p:nvSpPr>
-        <p:spPr>
-          <a:xfrm>
-            <a:off x="5398770" y="4171950"/>
-            <a:ext cx="5212080" cy="647700"/>
-          </a:xfrm>
-          <a:prstGeom prst="rect">
-            <a:avLst/>
-          </a:prstGeom>
-          <a:noFill/>
-        </p:spPr>
-        <p:txBody>
-          <a:bodyPr wrap="square" lIns="0" rIns="0" tIns="0" bIns="0" anchor="ctr">
-            <a:spAutoFit/>
-          </a:bodyPr>
-          <a:lstStyle/>
-          <a:p>
-            <a:pPr algn="ctr">
-              <a:lnSpc>
-                <a:spcPct val="115000"/>
-              </a:lnSpc>
-            </a:pPr>
-            <a:r>
-              <a:rPr sz="1875" b="0">
-                <a:solidFill>
-                  <a:srgbClr val="3D3D3D"/>
-                </a:solidFill>
-                <a:latin typeface="Pretendard"/>
-                <a:ea typeface="Pretendard"/>
-                <a:cs typeface="Pretendard"/>
-              </a:rPr>
-              <a:t>8080·7077 을 다른 것이</a:t>
-            </a:r>
-          </a:p>
-          <a:p>
-            <a:pPr algn="ctr">
-              <a:lnSpc>
-                <a:spcPct val="115000"/>
-              </a:lnSpc>
-            </a:pPr>
-            <a:r>
-              <a:rPr sz="1875" b="0">
-                <a:solidFill>
-                  <a:srgbClr val="3D3D3D"/>
-                </a:solidFill>
-                <a:latin typeface="Pretendard"/>
-                <a:ea typeface="Pretendard"/>
-                <a:cs typeface="Pretendard"/>
-              </a:rPr>
-              <a:t>사용 중(4주차 Trino)</a:t>
-            </a:r>
-          </a:p>
-        </p:txBody>
-      </p:sp>
-      <p:sp>
-        <p:nvSpPr>
-          <p:cNvPr id="24" name="Rounded Rectangle 23"/>
-          <p:cNvSpPr/>
-          <p:nvPr/>
-        </p:nvSpPr>
-        <p:spPr>
-          <a:xfrm>
-            <a:off x="10744200" y="4171950"/>
-            <a:ext cx="6400800" cy="647700"/>
-          </a:xfrm>
-          <a:prstGeom prst="roundRect">
-            <a:avLst>
-              <a:gd name="adj" fmla="val 5882"/>
-            </a:avLst>
-          </a:prstGeom>
-          <a:solidFill>
-            <a:srgbClr val="FAFBFD"/>
-          </a:solidFill>
-          <a:ln w="9525">
-            <a:solidFill>
-              <a:srgbClr val="DCE1E8"/>
-            </a:solidFill>
-          </a:ln>
-          <a:effectLst/>
-        </p:spPr>
-        <p:txBody>
-          <a:bodyPr rtlCol="0" anchor="ctr" wrap="square"/>
-          <a:lstStyle/>
-          <a:p>
-            <a:pPr algn="ctr"/>
-          </a:p>
-        </p:txBody>
-      </p:sp>
-      <p:sp>
-        <p:nvSpPr>
-          <p:cNvPr id="25" name="TextBox 24"/>
-          <p:cNvSpPr txBox="1"/>
-          <p:nvPr/>
-        </p:nvSpPr>
-        <p:spPr>
-          <a:xfrm>
-            <a:off x="10839450" y="4171950"/>
-            <a:ext cx="6210300" cy="647700"/>
-          </a:xfrm>
-          <a:prstGeom prst="rect">
-            <a:avLst/>
-          </a:prstGeom>
-          <a:noFill/>
-        </p:spPr>
-        <p:txBody>
-          <a:bodyPr wrap="square" lIns="0" rIns="0" tIns="0" bIns="0" anchor="ctr">
-            <a:spAutoFit/>
-          </a:bodyPr>
-          <a:lstStyle/>
-          <a:p>
-            <a:pPr algn="ctr">
-              <a:lnSpc>
-                <a:spcPct val="115000"/>
-              </a:lnSpc>
-            </a:pPr>
-            <a:r>
-              <a:rPr sz="1875" b="0">
-                <a:solidFill>
-                  <a:srgbClr val="3D3D3D"/>
-                </a:solidFill>
-                <a:latin typeface="Pretendard"/>
-                <a:ea typeface="Pretendard"/>
-                <a:cs typeface="Pretendard"/>
-              </a:rPr>
-              <a:t>점유 컨테이너 내리기 ·</a:t>
-            </a:r>
-          </a:p>
-          <a:p>
-            <a:pPr algn="ctr">
-              <a:lnSpc>
-                <a:spcPct val="115000"/>
-              </a:lnSpc>
-            </a:pPr>
-            <a:r>
-              <a:rPr sz="1875" b="0">
-                <a:solidFill>
-                  <a:srgbClr val="3D3D3D"/>
-                </a:solidFill>
-                <a:latin typeface="Pretendard"/>
-                <a:ea typeface="Pretendard"/>
-                <a:cs typeface="Pretendard"/>
-              </a:rPr>
-              <a:t>8081:8080 으로 매핑</a:t>
-            </a:r>
-          </a:p>
-        </p:txBody>
-      </p:sp>
-      <p:sp>
-        <p:nvSpPr>
-          <p:cNvPr id="26" name="Rounded Rectangle 25"/>
-          <p:cNvSpPr/>
-          <p:nvPr/>
-        </p:nvSpPr>
-        <p:spPr>
-          <a:xfrm>
-            <a:off x="1143000" y="4895850"/>
-            <a:ext cx="4122420" cy="647700"/>
-          </a:xfrm>
-          <a:prstGeom prst="roundRect">
-            <a:avLst>
-              <a:gd name="adj" fmla="val 5882"/>
-            </a:avLst>
-          </a:prstGeom>
-          <a:solidFill>
-            <a:srgbClr val="EDF3FD"/>
-          </a:solidFill>
-          <a:ln w="9525">
-            <a:solidFill>
-              <a:srgbClr val="BFD3F5"/>
-            </a:solidFill>
-          </a:ln>
-          <a:effectLst/>
-        </p:spPr>
-        <p:txBody>
-          <a:bodyPr rtlCol="0" anchor="ctr" wrap="square"/>
-          <a:lstStyle/>
-          <a:p>
-            <a:pPr algn="ctr"/>
-          </a:p>
-        </p:txBody>
-      </p:sp>
-      <p:sp>
-        <p:nvSpPr>
-          <p:cNvPr id="27" name="TextBox 26"/>
-          <p:cNvSpPr txBox="1"/>
-          <p:nvPr/>
-        </p:nvSpPr>
-        <p:spPr>
-          <a:xfrm>
-            <a:off x="1238250" y="4895850"/>
-            <a:ext cx="3931920" cy="647700"/>
-          </a:xfrm>
-          <a:prstGeom prst="rect">
-            <a:avLst/>
-          </a:prstGeom>
-          <a:noFill/>
-        </p:spPr>
-        <p:txBody>
-          <a:bodyPr wrap="square" lIns="0" rIns="0" tIns="0" bIns="0" anchor="ctr">
-            <a:spAutoFit/>
-          </a:bodyPr>
-          <a:lstStyle/>
-          <a:p>
-            <a:pPr algn="l">
-              <a:lnSpc>
-                <a:spcPct val="115000"/>
-              </a:lnSpc>
-            </a:pPr>
-            <a:r>
-              <a:rPr sz="1875" b="1">
-                <a:solidFill>
-                  <a:srgbClr val="0D2B5E"/>
-                </a:solidFill>
-                <a:latin typeface="Pretendard"/>
-                <a:ea typeface="Pretendard"/>
-                <a:cs typeface="Pretendard"/>
-              </a:rPr>
-              <a:t>not accepted</a:t>
-            </a:r>
-          </a:p>
-          <a:p>
-            <a:pPr algn="l">
-              <a:lnSpc>
-                <a:spcPct val="115000"/>
-              </a:lnSpc>
-            </a:pPr>
-            <a:r>
-              <a:rPr sz="1875" b="1">
-                <a:solidFill>
-                  <a:srgbClr val="0D2B5E"/>
-                </a:solidFill>
-                <a:latin typeface="Pretendard"/>
-                <a:ea typeface="Pretendard"/>
-                <a:cs typeface="Pretendard"/>
-              </a:rPr>
-              <a:t>any resources</a:t>
-            </a:r>
-          </a:p>
-        </p:txBody>
-      </p:sp>
-      <p:sp>
-        <p:nvSpPr>
-          <p:cNvPr id="28" name="Rounded Rectangle 27"/>
-          <p:cNvSpPr/>
-          <p:nvPr/>
-        </p:nvSpPr>
-        <p:spPr>
-          <a:xfrm>
-            <a:off x="5303520" y="4895850"/>
-            <a:ext cx="5402580" cy="647700"/>
-          </a:xfrm>
-          <a:prstGeom prst="roundRect">
-            <a:avLst>
-              <a:gd name="adj" fmla="val 5882"/>
-            </a:avLst>
-          </a:prstGeom>
-          <a:solidFill>
-            <a:srgbClr val="FAFBFD"/>
-          </a:solidFill>
-          <a:ln w="9525">
-            <a:solidFill>
-              <a:srgbClr val="DCE1E8"/>
-            </a:solidFill>
-          </a:ln>
-          <a:effectLst/>
-        </p:spPr>
-        <p:txBody>
-          <a:bodyPr rtlCol="0" anchor="ctr" wrap="square"/>
-          <a:lstStyle/>
-          <a:p>
-            <a:pPr algn="ctr"/>
-          </a:p>
-        </p:txBody>
-      </p:sp>
-      <p:sp>
-        <p:nvSpPr>
-          <p:cNvPr id="29" name="TextBox 28"/>
-          <p:cNvSpPr txBox="1"/>
-          <p:nvPr/>
-        </p:nvSpPr>
-        <p:spPr>
-          <a:xfrm>
-            <a:off x="5398770" y="4895850"/>
-            <a:ext cx="5212080" cy="647700"/>
-          </a:xfrm>
-          <a:prstGeom prst="rect">
-            <a:avLst/>
-          </a:prstGeom>
-          <a:noFill/>
-        </p:spPr>
-        <p:txBody>
-          <a:bodyPr wrap="square" lIns="0" rIns="0" tIns="0" bIns="0" anchor="ctr">
-            <a:spAutoFit/>
-          </a:bodyPr>
-          <a:lstStyle/>
-          <a:p>
-            <a:pPr algn="ctr">
-              <a:lnSpc>
-                <a:spcPct val="115000"/>
-              </a:lnSpc>
-            </a:pPr>
-            <a:r>
-              <a:rPr sz="1875" b="0">
-                <a:solidFill>
-                  <a:srgbClr val="3D3D3D"/>
-                </a:solidFill>
-                <a:latin typeface="Pretendard"/>
-                <a:ea typeface="Pretendard"/>
-                <a:cs typeface="Pretendard"/>
-              </a:rPr>
-              <a:t>요청한 코어·메모리를</a:t>
-            </a:r>
-          </a:p>
-          <a:p>
-            <a:pPr algn="ctr">
-              <a:lnSpc>
-                <a:spcPct val="115000"/>
-              </a:lnSpc>
-            </a:pPr>
-            <a:r>
-              <a:rPr sz="1875" b="0">
-                <a:solidFill>
-                  <a:srgbClr val="3D3D3D"/>
-                </a:solidFill>
-                <a:latin typeface="Pretendard"/>
-                <a:ea typeface="Pretendard"/>
-                <a:cs typeface="Pretendard"/>
-              </a:rPr>
-              <a:t>채울 워커가 없다</a:t>
-            </a:r>
-          </a:p>
-        </p:txBody>
-      </p:sp>
-      <p:sp>
-        <p:nvSpPr>
-          <p:cNvPr id="30" name="Rounded Rectangle 29"/>
-          <p:cNvSpPr/>
-          <p:nvPr/>
-        </p:nvSpPr>
-        <p:spPr>
-          <a:xfrm>
-            <a:off x="10744200" y="4895850"/>
-            <a:ext cx="6400800" cy="647700"/>
-          </a:xfrm>
-          <a:prstGeom prst="roundRect">
-            <a:avLst>
-              <a:gd name="adj" fmla="val 5882"/>
-            </a:avLst>
-          </a:prstGeom>
-          <a:solidFill>
-            <a:srgbClr val="FAFBFD"/>
-          </a:solidFill>
-          <a:ln w="9525">
-            <a:solidFill>
-              <a:srgbClr val="DCE1E8"/>
-            </a:solidFill>
-          </a:ln>
-          <a:effectLst/>
-        </p:spPr>
-        <p:txBody>
-          <a:bodyPr rtlCol="0" anchor="ctr" wrap="square"/>
-          <a:lstStyle/>
-          <a:p>
-            <a:pPr algn="ctr"/>
-          </a:p>
-        </p:txBody>
-      </p:sp>
-      <p:sp>
-        <p:nvSpPr>
-          <p:cNvPr id="31" name="TextBox 30"/>
-          <p:cNvSpPr txBox="1"/>
-          <p:nvPr/>
-        </p:nvSpPr>
-        <p:spPr>
-          <a:xfrm>
-            <a:off x="10839450" y="4895850"/>
-            <a:ext cx="6210300" cy="647700"/>
-          </a:xfrm>
-          <a:prstGeom prst="rect">
-            <a:avLst/>
-          </a:prstGeom>
-          <a:noFill/>
-        </p:spPr>
-        <p:txBody>
-          <a:bodyPr wrap="square" lIns="0" rIns="0" tIns="0" bIns="0" anchor="ctr">
-            <a:spAutoFit/>
-          </a:bodyPr>
-          <a:lstStyle/>
-          <a:p>
-            <a:pPr algn="ctr">
-              <a:lnSpc>
-                <a:spcPct val="115000"/>
-              </a:lnSpc>
-            </a:pPr>
-            <a:r>
-              <a:rPr sz="1875" b="0">
-                <a:solidFill>
-                  <a:srgbClr val="3D3D3D"/>
-                </a:solidFill>
-                <a:latin typeface="Pretendard"/>
-                <a:ea typeface="Pretendard"/>
-                <a:cs typeface="Pretendard"/>
-              </a:rPr>
-              <a:t>워커 등록 확인 ·</a:t>
-            </a:r>
-          </a:p>
-          <a:p>
-            <a:pPr algn="ctr">
-              <a:lnSpc>
-                <a:spcPct val="115000"/>
-              </a:lnSpc>
-            </a:pPr>
-            <a:r>
-              <a:rPr sz="1875" b="0">
-                <a:solidFill>
-                  <a:srgbClr val="3D3D3D"/>
-                </a:solidFill>
-                <a:latin typeface="Pretendard"/>
-                <a:ea typeface="Pretendard"/>
-                <a:cs typeface="Pretendard"/>
-              </a:rPr>
-              <a:t>--executor-memory 2g 이하</a:t>
-            </a:r>
-          </a:p>
-        </p:txBody>
-      </p:sp>
-      <p:sp>
-        <p:nvSpPr>
-          <p:cNvPr id="32" name="Rounded Rectangle 31"/>
-          <p:cNvSpPr/>
-          <p:nvPr/>
-        </p:nvSpPr>
-        <p:spPr>
-          <a:xfrm>
-            <a:off x="1143000" y="5619750"/>
-            <a:ext cx="4122420" cy="647700"/>
-          </a:xfrm>
-          <a:prstGeom prst="roundRect">
-            <a:avLst>
-              <a:gd name="adj" fmla="val 5882"/>
-            </a:avLst>
-          </a:prstGeom>
-          <a:solidFill>
-            <a:srgbClr val="EDF3FD"/>
-          </a:solidFill>
-          <a:ln w="9525">
-            <a:solidFill>
-              <a:srgbClr val="BFD3F5"/>
-            </a:solidFill>
-          </a:ln>
-          <a:effectLst/>
-        </p:spPr>
-        <p:txBody>
-          <a:bodyPr rtlCol="0" anchor="ctr" wrap="square"/>
-          <a:lstStyle/>
-          <a:p>
-            <a:pPr algn="ctr"/>
-          </a:p>
-        </p:txBody>
-      </p:sp>
-      <p:sp>
-        <p:nvSpPr>
-          <p:cNvPr id="33" name="TextBox 32"/>
-          <p:cNvSpPr txBox="1"/>
-          <p:nvPr/>
-        </p:nvSpPr>
-        <p:spPr>
-          <a:xfrm>
-            <a:off x="1238250" y="5619750"/>
-            <a:ext cx="3931920" cy="647700"/>
-          </a:xfrm>
-          <a:prstGeom prst="rect">
-            <a:avLst/>
-          </a:prstGeom>
-          <a:noFill/>
-        </p:spPr>
-        <p:txBody>
-          <a:bodyPr wrap="square" lIns="0" rIns="0" tIns="0" bIns="0" anchor="ctr">
-            <a:spAutoFit/>
-          </a:bodyPr>
-          <a:lstStyle/>
-          <a:p>
-            <a:pPr algn="l">
-              <a:lnSpc>
-                <a:spcPct val="115000"/>
-              </a:lnSpc>
-            </a:pPr>
-            <a:r>
-              <a:rPr sz="1875" b="1">
-                <a:solidFill>
-                  <a:srgbClr val="0D2B5E"/>
-                </a:solidFill>
-                <a:latin typeface="Pretendard"/>
-                <a:ea typeface="Pretendard"/>
-                <a:cs typeface="Pretendard"/>
-              </a:rPr>
-              <a:t>--scale 뒤</a:t>
-            </a:r>
-          </a:p>
-          <a:p>
-            <a:pPr algn="l">
-              <a:lnSpc>
-                <a:spcPct val="115000"/>
-              </a:lnSpc>
-            </a:pPr>
-            <a:r>
-              <a:rPr sz="1875" b="1">
-                <a:solidFill>
-                  <a:srgbClr val="0D2B5E"/>
-                </a:solidFill>
-                <a:latin typeface="Pretendard"/>
-                <a:ea typeface="Pretendard"/>
-                <a:cs typeface="Pretendard"/>
-              </a:rPr>
-              <a:t>컨테이너가 바로 죽음</a:t>
-            </a:r>
-          </a:p>
-        </p:txBody>
-      </p:sp>
-      <p:sp>
-        <p:nvSpPr>
-          <p:cNvPr id="34" name="Rounded Rectangle 33"/>
-          <p:cNvSpPr/>
-          <p:nvPr/>
-        </p:nvSpPr>
-        <p:spPr>
-          <a:xfrm>
-            <a:off x="5303520" y="5619750"/>
-            <a:ext cx="5402580" cy="647700"/>
-          </a:xfrm>
-          <a:prstGeom prst="roundRect">
-            <a:avLst>
-              <a:gd name="adj" fmla="val 5882"/>
-            </a:avLst>
-          </a:prstGeom>
-          <a:solidFill>
-            <a:srgbClr val="FAFBFD"/>
-          </a:solidFill>
-          <a:ln w="9525">
-            <a:solidFill>
-              <a:srgbClr val="DCE1E8"/>
-            </a:solidFill>
-          </a:ln>
-          <a:effectLst/>
-        </p:spPr>
-        <p:txBody>
-          <a:bodyPr rtlCol="0" anchor="ctr" wrap="square"/>
-          <a:lstStyle/>
-          <a:p>
-            <a:pPr algn="ctr"/>
-          </a:p>
-        </p:txBody>
-      </p:sp>
-      <p:sp>
-        <p:nvSpPr>
-          <p:cNvPr id="35" name="TextBox 34"/>
-          <p:cNvSpPr txBox="1"/>
-          <p:nvPr/>
-        </p:nvSpPr>
-        <p:spPr>
-          <a:xfrm>
-            <a:off x="5398770" y="5619750"/>
-            <a:ext cx="5212080" cy="647700"/>
-          </a:xfrm>
-          <a:prstGeom prst="rect">
-            <a:avLst/>
-          </a:prstGeom>
-          <a:noFill/>
-        </p:spPr>
-        <p:txBody>
-          <a:bodyPr wrap="square" lIns="0" rIns="0" tIns="0" bIns="0" anchor="ctr">
-            <a:spAutoFit/>
-          </a:bodyPr>
-          <a:lstStyle/>
-          <a:p>
-            <a:pPr algn="ctr">
-              <a:lnSpc>
-                <a:spcPct val="115000"/>
-              </a:lnSpc>
-            </a:pPr>
-            <a:r>
-              <a:rPr sz="1875" b="0">
-                <a:solidFill>
-                  <a:srgbClr val="3D3D3D"/>
-                </a:solidFill>
-                <a:latin typeface="Pretendard"/>
-                <a:ea typeface="Pretendard"/>
-                <a:cs typeface="Pretendard"/>
-              </a:rPr>
-              <a:t>Docker 에 할당된</a:t>
-            </a:r>
-          </a:p>
-          <a:p>
-            <a:pPr algn="ctr">
-              <a:lnSpc>
-                <a:spcPct val="115000"/>
-              </a:lnSpc>
-            </a:pPr>
-            <a:r>
-              <a:rPr sz="1875" b="0">
-                <a:solidFill>
-                  <a:srgbClr val="3D3D3D"/>
-                </a:solidFill>
-                <a:latin typeface="Pretendard"/>
-                <a:ea typeface="Pretendard"/>
-                <a:cs typeface="Pretendard"/>
-              </a:rPr>
-              <a:t>메모리를 넘었다</a:t>
-            </a:r>
-          </a:p>
-        </p:txBody>
-      </p:sp>
-      <p:sp>
-        <p:nvSpPr>
-          <p:cNvPr id="36" name="Rounded Rectangle 35"/>
-          <p:cNvSpPr/>
-          <p:nvPr/>
-        </p:nvSpPr>
-        <p:spPr>
-          <a:xfrm>
-            <a:off x="10744200" y="5619750"/>
-            <a:ext cx="6400800" cy="647700"/>
-          </a:xfrm>
-          <a:prstGeom prst="roundRect">
-            <a:avLst>
-              <a:gd name="adj" fmla="val 5882"/>
-            </a:avLst>
-          </a:prstGeom>
-          <a:solidFill>
-            <a:srgbClr val="FAFBFD"/>
-          </a:solidFill>
-          <a:ln w="9525">
-            <a:solidFill>
-              <a:srgbClr val="DCE1E8"/>
-            </a:solidFill>
-          </a:ln>
-          <a:effectLst/>
-        </p:spPr>
-        <p:txBody>
-          <a:bodyPr rtlCol="0" anchor="ctr" wrap="square"/>
-          <a:lstStyle/>
-          <a:p>
-            <a:pPr algn="ctr"/>
-          </a:p>
-        </p:txBody>
-      </p:sp>
-      <p:sp>
-        <p:nvSpPr>
-          <p:cNvPr id="37" name="TextBox 36"/>
-          <p:cNvSpPr txBox="1"/>
-          <p:nvPr/>
-        </p:nvSpPr>
-        <p:spPr>
-          <a:xfrm>
-            <a:off x="10839450" y="5619750"/>
-            <a:ext cx="6210300" cy="647700"/>
-          </a:xfrm>
-          <a:prstGeom prst="rect">
-            <a:avLst/>
-          </a:prstGeom>
-          <a:noFill/>
-        </p:spPr>
-        <p:txBody>
-          <a:bodyPr wrap="square" lIns="0" rIns="0" tIns="0" bIns="0" anchor="ctr">
-            <a:spAutoFit/>
-          </a:bodyPr>
-          <a:lstStyle/>
-          <a:p>
-            <a:pPr algn="ctr">
-              <a:lnSpc>
-                <a:spcPct val="115000"/>
-              </a:lnSpc>
-            </a:pPr>
-            <a:r>
-              <a:rPr sz="1875" b="0">
-                <a:solidFill>
-                  <a:srgbClr val="3D3D3D"/>
-                </a:solidFill>
-                <a:latin typeface="Pretendard"/>
-                <a:ea typeface="Pretendard"/>
-                <a:cs typeface="Pretendard"/>
-              </a:rPr>
-              <a:t>logs 확인 ·</a:t>
-            </a:r>
-          </a:p>
-          <a:p>
-            <a:pPr algn="ctr">
-              <a:lnSpc>
-                <a:spcPct val="115000"/>
-              </a:lnSpc>
-            </a:pPr>
-            <a:r>
-              <a:rPr sz="1875" b="0">
-                <a:solidFill>
-                  <a:srgbClr val="3D3D3D"/>
-                </a:solidFill>
-                <a:latin typeface="Pretendard"/>
-                <a:ea typeface="Pretendard"/>
-                <a:cs typeface="Pretendard"/>
-              </a:rPr>
-              <a:t>워커 수·--memory 줄이기</a:t>
-            </a:r>
-          </a:p>
-        </p:txBody>
-      </p:sp>
-      <p:sp>
-        <p:nvSpPr>
-          <p:cNvPr id="38" name="TextBox 37"/>
-          <p:cNvSpPr txBox="1"/>
-          <p:nvPr/>
-        </p:nvSpPr>
-        <p:spPr>
-          <a:xfrm>
-            <a:off x="1143000" y="7620000"/>
-            <a:ext cx="16002000" cy="342900"/>
-          </a:xfrm>
-          <a:prstGeom prst="rect">
-            <a:avLst/>
-          </a:prstGeom>
-          <a:noFill/>
-        </p:spPr>
-        <p:txBody>
-          <a:bodyPr wrap="square" lIns="0" rIns="0" tIns="0" bIns="0" anchor="t">
-            <a:spAutoFit/>
-          </a:bodyPr>
-          <a:lstStyle/>
-          <a:p>
-            <a:pPr algn="l">
-              <a:lnSpc>
-                <a:spcPct val="100000"/>
-              </a:lnSpc>
-            </a:pPr>
-            <a:r>
-              <a:rPr sz="1875" b="1">
-                <a:solidFill>
-                  <a:srgbClr val="7D7D7D"/>
-                </a:solidFill>
-                <a:latin typeface="Pretendard"/>
-                <a:ea typeface="Pretendard"/>
-                <a:cs typeface="Pretendard"/>
-              </a:rPr>
-              <a:t>16GB 환경에서는 워커 1~2개가 적당 — 「기다리는 중」인 경고를 멈춤으로 오해하지 않기</a:t>
-            </a:r>
-          </a:p>
-        </p:txBody>
-      </p:sp>
-      <p:sp>
-        <p:nvSpPr>
-          <p:cNvPr id="39" name="Rectangle 38"/>
+              <a:t>심화: --deploy-mode cluster 로 내면 파이썬 앱은 Standalone 에서 바로 끝난다(실측)</a:t>
+            </a:r>
+          </a:p>
+        </p:txBody>
+      </p:sp>
+      <p:sp>
+        <p:nvSpPr>
+          <p:cNvPr id="34" name="Rectangle 33"/>
           <p:cNvSpPr/>
           <p:nvPr/>
         </p:nvSpPr>
@@ -11925,7 +12346,7 @@
       </p:sp>
       <p:sp>
         <p:nvSpPr>
-          <p:cNvPr id="40" name="TextBox 39"/>
+          <p:cNvPr id="35" name="TextBox 34"/>
           <p:cNvSpPr txBox="1"/>
           <p:nvPr/>
         </p:nvSpPr>
@@ -11966,7 +12387,7 @@
       </p:sp>
       <p:sp>
         <p:nvSpPr>
-          <p:cNvPr id="41" name="TextBox 40"/>
+          <p:cNvPr id="36" name="TextBox 35"/>
           <p:cNvSpPr txBox="1"/>
           <p:nvPr/>
         </p:nvSpPr>
@@ -12025,7 +12446,7 @@
       <p:grpSpPr/>
       <p:sp>
         <p:nvSpPr>
-          <p:cNvPr id="2" name="Oval 1"/>
+          <p:cNvPr id="2" name="deckgen:decor"/>
           <p:cNvSpPr/>
           <p:nvPr/>
         </p:nvSpPr>
@@ -12055,7 +12476,7 @@
       </p:sp>
       <p:sp>
         <p:nvSpPr>
-          <p:cNvPr id="3" name="Oval 2"/>
+          <p:cNvPr id="3" name="deckgen:decor"/>
           <p:cNvSpPr/>
           <p:nvPr/>
         </p:nvSpPr>
@@ -12085,7 +12506,7 @@
       </p:sp>
       <p:sp>
         <p:nvSpPr>
-          <p:cNvPr id="4" name="Oval 3"/>
+          <p:cNvPr id="4" name="deckgen:decor"/>
           <p:cNvSpPr/>
           <p:nvPr/>
         </p:nvSpPr>
@@ -12149,7 +12570,7 @@
                 <a:ea typeface="Pretendard"/>
                 <a:cs typeface="Pretendard"/>
               </a:rPr>
-              <a:t>예상 질문</a:t>
+              <a:t>자주 겪는 오류</a:t>
             </a:r>
           </a:p>
         </p:txBody>
@@ -12190,7 +12611,7 @@
                 <a:ea typeface="Pretendard"/>
                 <a:cs typeface="Pretendard"/>
               </a:rPr>
-              <a:t>자주 나오는 질문 네 가지</a:t>
+              <a:t>증상으로 찾는 원인과 해결</a:t>
             </a:r>
           </a:p>
         </p:txBody>
@@ -12227,18 +12648,324 @@
       </p:sp>
       <p:sp>
         <p:nvSpPr>
-          <p:cNvPr id="8" name="Rounded Rectangle 7"/>
-          <p:cNvSpPr/>
-          <p:nvPr/>
-        </p:nvSpPr>
-        <p:spPr>
-          <a:xfrm>
-            <a:off x="1143000" y="3352800"/>
-            <a:ext cx="16002000" cy="914400"/>
+          <p:cNvPr id="8" name="Rectangle 7"/>
+          <p:cNvSpPr/>
+          <p:nvPr/>
+        </p:nvSpPr>
+        <p:spPr>
+          <a:xfrm>
+            <a:off x="1143000" y="2781300"/>
+            <a:ext cx="4122420" cy="590550"/>
+          </a:xfrm>
+          <a:prstGeom prst="rect">
+            <a:avLst/>
+          </a:prstGeom>
+          <a:solidFill>
+            <a:srgbClr val="0D2B5E"/>
+          </a:solidFill>
+          <a:ln>
+            <a:noFill/>
+          </a:ln>
+          <a:effectLst/>
+        </p:spPr>
+        <p:txBody>
+          <a:bodyPr rtlCol="0" anchor="ctr" wrap="square"/>
+          <a:lstStyle/>
+          <a:p>
+            <a:pPr algn="ctr"/>
+          </a:p>
+        </p:txBody>
+      </p:sp>
+      <p:sp>
+        <p:nvSpPr>
+          <p:cNvPr id="9" name="TextBox 8"/>
+          <p:cNvSpPr txBox="1"/>
+          <p:nvPr/>
+        </p:nvSpPr>
+        <p:spPr>
+          <a:xfrm>
+            <a:off x="1143000" y="2781300"/>
+            <a:ext cx="4122420" cy="590550"/>
+          </a:xfrm>
+          <a:prstGeom prst="rect">
+            <a:avLst/>
+          </a:prstGeom>
+          <a:noFill/>
+        </p:spPr>
+        <p:txBody>
+          <a:bodyPr wrap="square" lIns="0" rIns="0" tIns="0" bIns="0" anchor="ctr">
+            <a:spAutoFit/>
+          </a:bodyPr>
+          <a:lstStyle/>
+          <a:p>
+            <a:pPr algn="ctr">
+              <a:lnSpc>
+                <a:spcPct val="100000"/>
+              </a:lnSpc>
+            </a:pPr>
+            <a:r>
+              <a:rPr sz="2025" b="1">
+                <a:solidFill>
+                  <a:srgbClr val="FFFFFF"/>
+                </a:solidFill>
+                <a:latin typeface="Pretendard"/>
+                <a:ea typeface="Pretendard"/>
+                <a:cs typeface="Pretendard"/>
+              </a:rPr>
+              <a:t>증상</a:t>
+            </a:r>
+          </a:p>
+        </p:txBody>
+      </p:sp>
+      <p:sp>
+        <p:nvSpPr>
+          <p:cNvPr id="10" name="Rectangle 9"/>
+          <p:cNvSpPr/>
+          <p:nvPr/>
+        </p:nvSpPr>
+        <p:spPr>
+          <a:xfrm>
+            <a:off x="5303520" y="2781300"/>
+            <a:ext cx="5402580" cy="590550"/>
+          </a:xfrm>
+          <a:prstGeom prst="rect">
+            <a:avLst/>
+          </a:prstGeom>
+          <a:solidFill>
+            <a:srgbClr val="1E5BC6"/>
+          </a:solidFill>
+          <a:ln>
+            <a:noFill/>
+          </a:ln>
+          <a:effectLst/>
+        </p:spPr>
+        <p:txBody>
+          <a:bodyPr rtlCol="0" anchor="ctr" wrap="square"/>
+          <a:lstStyle/>
+          <a:p>
+            <a:pPr algn="ctr"/>
+          </a:p>
+        </p:txBody>
+      </p:sp>
+      <p:sp>
+        <p:nvSpPr>
+          <p:cNvPr id="11" name="TextBox 10"/>
+          <p:cNvSpPr txBox="1"/>
+          <p:nvPr/>
+        </p:nvSpPr>
+        <p:spPr>
+          <a:xfrm>
+            <a:off x="5303520" y="2781300"/>
+            <a:ext cx="5402580" cy="590550"/>
+          </a:xfrm>
+          <a:prstGeom prst="rect">
+            <a:avLst/>
+          </a:prstGeom>
+          <a:noFill/>
+        </p:spPr>
+        <p:txBody>
+          <a:bodyPr wrap="square" lIns="0" rIns="0" tIns="0" bIns="0" anchor="ctr">
+            <a:spAutoFit/>
+          </a:bodyPr>
+          <a:lstStyle/>
+          <a:p>
+            <a:pPr algn="ctr">
+              <a:lnSpc>
+                <a:spcPct val="100000"/>
+              </a:lnSpc>
+            </a:pPr>
+            <a:r>
+              <a:rPr sz="2025" b="1">
+                <a:solidFill>
+                  <a:srgbClr val="FFFFFF"/>
+                </a:solidFill>
+                <a:latin typeface="Pretendard"/>
+                <a:ea typeface="Pretendard"/>
+                <a:cs typeface="Pretendard"/>
+              </a:rPr>
+              <a:t>원인</a:t>
+            </a:r>
+          </a:p>
+        </p:txBody>
+      </p:sp>
+      <p:sp>
+        <p:nvSpPr>
+          <p:cNvPr id="12" name="Rectangle 11"/>
+          <p:cNvSpPr/>
+          <p:nvPr/>
+        </p:nvSpPr>
+        <p:spPr>
+          <a:xfrm>
+            <a:off x="10744200" y="2781300"/>
+            <a:ext cx="6400800" cy="590550"/>
+          </a:xfrm>
+          <a:prstGeom prst="rect">
+            <a:avLst/>
+          </a:prstGeom>
+          <a:solidFill>
+            <a:srgbClr val="1E5BC6"/>
+          </a:solidFill>
+          <a:ln>
+            <a:noFill/>
+          </a:ln>
+          <a:effectLst/>
+        </p:spPr>
+        <p:txBody>
+          <a:bodyPr rtlCol="0" anchor="ctr" wrap="square"/>
+          <a:lstStyle/>
+          <a:p>
+            <a:pPr algn="ctr"/>
+          </a:p>
+        </p:txBody>
+      </p:sp>
+      <p:sp>
+        <p:nvSpPr>
+          <p:cNvPr id="13" name="TextBox 12"/>
+          <p:cNvSpPr txBox="1"/>
+          <p:nvPr/>
+        </p:nvSpPr>
+        <p:spPr>
+          <a:xfrm>
+            <a:off x="10744200" y="2781300"/>
+            <a:ext cx="6400800" cy="590550"/>
+          </a:xfrm>
+          <a:prstGeom prst="rect">
+            <a:avLst/>
+          </a:prstGeom>
+          <a:noFill/>
+        </p:spPr>
+        <p:txBody>
+          <a:bodyPr wrap="square" lIns="0" rIns="0" tIns="0" bIns="0" anchor="ctr">
+            <a:spAutoFit/>
+          </a:bodyPr>
+          <a:lstStyle/>
+          <a:p>
+            <a:pPr algn="ctr">
+              <a:lnSpc>
+                <a:spcPct val="100000"/>
+              </a:lnSpc>
+            </a:pPr>
+            <a:r>
+              <a:rPr sz="2025" b="1">
+                <a:solidFill>
+                  <a:srgbClr val="FFFFFF"/>
+                </a:solidFill>
+                <a:latin typeface="Pretendard"/>
+                <a:ea typeface="Pretendard"/>
+                <a:cs typeface="Pretendard"/>
+              </a:rPr>
+              <a:t>해결</a:t>
+            </a:r>
+          </a:p>
+        </p:txBody>
+      </p:sp>
+      <p:sp>
+        <p:nvSpPr>
+          <p:cNvPr id="14" name="Rounded Rectangle 13"/>
+          <p:cNvSpPr/>
+          <p:nvPr/>
+        </p:nvSpPr>
+        <p:spPr>
+          <a:xfrm>
+            <a:off x="1143000" y="3448050"/>
+            <a:ext cx="4122420" cy="647700"/>
           </a:xfrm>
           <a:prstGeom prst="roundRect">
             <a:avLst>
-              <a:gd name="adj" fmla="val 5208"/>
+              <a:gd name="adj" fmla="val 5882"/>
+            </a:avLst>
+          </a:prstGeom>
+          <a:solidFill>
+            <a:srgbClr val="EDF3FD"/>
+          </a:solidFill>
+          <a:ln w="9525">
+            <a:solidFill>
+              <a:srgbClr val="BFD3F5"/>
+            </a:solidFill>
+          </a:ln>
+          <a:effectLst/>
+        </p:spPr>
+        <p:txBody>
+          <a:bodyPr rtlCol="0" anchor="ctr" wrap="square"/>
+          <a:lstStyle/>
+          <a:p>
+            <a:pPr algn="ctr"/>
+          </a:p>
+        </p:txBody>
+      </p:sp>
+      <p:sp>
+        <p:nvSpPr>
+          <p:cNvPr id="15" name="TextBox 14"/>
+          <p:cNvSpPr txBox="1"/>
+          <p:nvPr/>
+        </p:nvSpPr>
+        <p:spPr>
+          <a:xfrm>
+            <a:off x="1238250" y="3448050"/>
+            <a:ext cx="3931920" cy="647700"/>
+          </a:xfrm>
+          <a:prstGeom prst="rect">
+            <a:avLst/>
+          </a:prstGeom>
+          <a:noFill/>
+        </p:spPr>
+        <p:txBody>
+          <a:bodyPr wrap="square" lIns="0" rIns="0" tIns="0" bIns="0" anchor="ctr">
+            <a:spAutoFit/>
+          </a:bodyPr>
+          <a:lstStyle/>
+          <a:p>
+            <a:pPr algn="l">
+              <a:lnSpc>
+                <a:spcPct val="115000"/>
+              </a:lnSpc>
+            </a:pPr>
+            <a:r>
+              <a:rPr sz="1875" b="1">
+                <a:solidFill>
+                  <a:srgbClr val="0D2B5E"/>
+                </a:solidFill>
+                <a:latin typeface="Pretendard"/>
+                <a:ea typeface="Pretendard"/>
+                <a:cs typeface="Pretendard"/>
+              </a:rPr>
+              <a:t>Workers 표가</a:t>
+            </a:r>
+          </a:p>
+          <a:p>
+            <a:pPr algn="l">
+              <a:lnSpc>
+                <a:spcPct val="115000"/>
+              </a:lnSpc>
+            </a:pPr>
+            <a:r>
+              <a:rPr sz="1875" b="1">
+                <a:solidFill>
+                  <a:srgbClr val="0D2B5E"/>
+                </a:solidFill>
+                <a:latin typeface="Pretendard"/>
+                <a:ea typeface="Pretendard"/>
+                <a:cs typeface="Pretendard"/>
+              </a:rPr>
+              <a:t>비어 있다</a:t>
+            </a:r>
+          </a:p>
+        </p:txBody>
+      </p:sp>
+      <p:sp>
+        <p:nvSpPr>
+          <p:cNvPr id="16" name="Rounded Rectangle 15"/>
+          <p:cNvSpPr/>
+          <p:nvPr/>
+        </p:nvSpPr>
+        <p:spPr>
+          <a:xfrm>
+            <a:off x="5303520" y="3448050"/>
+            <a:ext cx="5402580" cy="647700"/>
+          </a:xfrm>
+          <a:prstGeom prst="roundRect">
+            <a:avLst>
+              <a:gd name="adj" fmla="val 5882"/>
             </a:avLst>
           </a:prstGeom>
           <a:solidFill>
@@ -12261,152 +12988,30 @@
       </p:sp>
       <p:sp>
         <p:nvSpPr>
-          <p:cNvPr id="9" name="Rectangle 8"/>
-          <p:cNvSpPr/>
-          <p:nvPr/>
-        </p:nvSpPr>
-        <p:spPr>
-          <a:xfrm>
-            <a:off x="1143000" y="3352800"/>
-            <a:ext cx="47625" cy="914400"/>
-          </a:xfrm>
-          <a:prstGeom prst="rect">
-            <a:avLst/>
-          </a:prstGeom>
-          <a:solidFill>
-            <a:srgbClr val="1E5BC6"/>
-          </a:solidFill>
-          <a:ln>
-            <a:noFill/>
-          </a:ln>
-          <a:effectLst/>
-        </p:spPr>
-        <p:txBody>
-          <a:bodyPr rtlCol="0" anchor="ctr" wrap="square"/>
-          <a:lstStyle/>
-          <a:p>
-            <a:pPr algn="ctr"/>
-          </a:p>
-        </p:txBody>
-      </p:sp>
-      <p:sp>
-        <p:nvSpPr>
-          <p:cNvPr id="10" name="Oval 9"/>
-          <p:cNvSpPr/>
-          <p:nvPr/>
-        </p:nvSpPr>
-        <p:spPr>
-          <a:xfrm>
-            <a:off x="1428750" y="3600450"/>
-            <a:ext cx="419100" cy="419100"/>
-          </a:xfrm>
-          <a:prstGeom prst="ellipse">
-            <a:avLst/>
-          </a:prstGeom>
-          <a:solidFill>
-            <a:srgbClr val="0D2B5E"/>
-          </a:solidFill>
-          <a:ln>
-            <a:noFill/>
-          </a:ln>
-          <a:effectLst/>
-        </p:spPr>
-        <p:txBody>
-          <a:bodyPr rtlCol="0" anchor="ctr" wrap="square"/>
-          <a:lstStyle/>
-          <a:p>
-            <a:pPr algn="ctr"/>
-          </a:p>
-        </p:txBody>
-      </p:sp>
-      <p:sp>
-        <p:nvSpPr>
-          <p:cNvPr id="11" name="TextBox 10"/>
-          <p:cNvSpPr txBox="1"/>
-          <p:nvPr/>
-        </p:nvSpPr>
-        <p:spPr>
-          <a:xfrm>
-            <a:off x="1428750" y="3667125"/>
-            <a:ext cx="419100" cy="304800"/>
-          </a:xfrm>
-          <a:prstGeom prst="rect">
-            <a:avLst/>
-          </a:prstGeom>
-          <a:noFill/>
-        </p:spPr>
-        <p:txBody>
-          <a:bodyPr wrap="square" lIns="0" rIns="0" tIns="0" bIns="0" anchor="t">
+          <p:cNvPr id="17" name="TextBox 16"/>
+          <p:cNvSpPr txBox="1"/>
+          <p:nvPr/>
+        </p:nvSpPr>
+        <p:spPr>
+          <a:xfrm>
+            <a:off x="5398770" y="3448050"/>
+            <a:ext cx="5212080" cy="647700"/>
+          </a:xfrm>
+          <a:prstGeom prst="rect">
+            <a:avLst/>
+          </a:prstGeom>
+          <a:noFill/>
+        </p:spPr>
+        <p:txBody>
+          <a:bodyPr wrap="square" lIns="0" rIns="0" tIns="0" bIns="0" anchor="ctr">
             <a:spAutoFit/>
           </a:bodyPr>
           <a:lstStyle/>
           <a:p>
             <a:pPr algn="ctr">
               <a:lnSpc>
-                <a:spcPct val="100000"/>
-              </a:lnSpc>
-            </a:pPr>
-            <a:r>
-              <a:rPr sz="1875" b="1">
-                <a:solidFill>
-                  <a:srgbClr val="FFFFFF"/>
-                </a:solidFill>
-                <a:latin typeface="Pretendard"/>
-                <a:ea typeface="Pretendard"/>
-                <a:cs typeface="Pretendard"/>
-              </a:rPr>
-              <a:t>1</a:t>
-            </a:r>
-          </a:p>
-        </p:txBody>
-      </p:sp>
-      <p:sp>
-        <p:nvSpPr>
-          <p:cNvPr id="12" name="TextBox 11"/>
-          <p:cNvSpPr txBox="1"/>
-          <p:nvPr/>
-        </p:nvSpPr>
-        <p:spPr>
-          <a:xfrm>
-            <a:off x="2057400" y="3448050"/>
-            <a:ext cx="14763750" cy="723900"/>
-          </a:xfrm>
-          <a:prstGeom prst="rect">
-            <a:avLst/>
-          </a:prstGeom>
-          <a:noFill/>
-        </p:spPr>
-        <p:txBody>
-          <a:bodyPr wrap="square" lIns="0" rIns="0" tIns="0" bIns="0" anchor="ctr">
-            <a:spAutoFit/>
-          </a:bodyPr>
-          <a:lstStyle/>
-          <a:p>
-            <a:pPr>
-              <a:lnSpc>
-                <a:spcPct val="120000"/>
-              </a:lnSpc>
-            </a:pPr>
-            <a:r>
-              <a:rPr sz="2175" b="1">
-                <a:solidFill>
-                  <a:srgbClr val="0D2B5E"/>
-                </a:solidFill>
-                <a:latin typeface="Pretendard"/>
-                <a:ea typeface="Pretendard"/>
-                <a:cs typeface="Pretendard"/>
-              </a:rPr>
-              <a:t>워커를 늘리면 항상 빨라지나요?</a:t>
-            </a:r>
-          </a:p>
-          <a:p>
-            <a:pPr>
-              <a:lnSpc>
-                <a:spcPct val="130000"/>
-              </a:lnSpc>
-              <a:spcBef>
-                <a:spcPts val="300"/>
-              </a:spcBef>
+                <a:spcPct val="115000"/>
+              </a:lnSpc>
             </a:pPr>
             <a:r>
               <a:rPr sz="1875" b="0">
@@ -12417,25 +13022,43 @@
                 <a:ea typeface="Pretendard"/>
                 <a:cs typeface="Pretendard"/>
               </a:rPr>
-              <a:t>아니다 — 데이터가 작으면 나누고 모으는 비용이 더 크다. 「한 대로 되면 한 대로」</a:t>
-            </a:r>
-          </a:p>
-        </p:txBody>
-      </p:sp>
-      <p:sp>
-        <p:nvSpPr>
-          <p:cNvPr id="13" name="Rounded Rectangle 12"/>
-          <p:cNvSpPr/>
-          <p:nvPr/>
-        </p:nvSpPr>
-        <p:spPr>
-          <a:xfrm>
-            <a:off x="1143000" y="4400550"/>
-            <a:ext cx="16002000" cy="914400"/>
+              <a:t>마스터 주소 오타 ·</a:t>
+            </a:r>
+          </a:p>
+          <a:p>
+            <a:pPr algn="ctr">
+              <a:lnSpc>
+                <a:spcPct val="115000"/>
+              </a:lnSpc>
+            </a:pPr>
+            <a:r>
+              <a:rPr sz="1875" b="0">
+                <a:solidFill>
+                  <a:srgbClr val="3D3D3D"/>
+                </a:solidFill>
+                <a:latin typeface="Pretendard"/>
+                <a:ea typeface="Pretendard"/>
+                <a:cs typeface="Pretendard"/>
+              </a:rPr>
+              <a:t>마스터가 아직 뜨는 중</a:t>
+            </a:r>
+          </a:p>
+        </p:txBody>
+      </p:sp>
+      <p:sp>
+        <p:nvSpPr>
+          <p:cNvPr id="18" name="Rounded Rectangle 17"/>
+          <p:cNvSpPr/>
+          <p:nvPr/>
+        </p:nvSpPr>
+        <p:spPr>
+          <a:xfrm>
+            <a:off x="10744200" y="3448050"/>
+            <a:ext cx="6400800" cy="647700"/>
           </a:xfrm>
           <a:prstGeom prst="roundRect">
             <a:avLst>
-              <a:gd name="adj" fmla="val 5208"/>
+              <a:gd name="adj" fmla="val 5882"/>
             </a:avLst>
           </a:prstGeom>
           <a:solidFill>
@@ -12458,152 +13081,30 @@
       </p:sp>
       <p:sp>
         <p:nvSpPr>
-          <p:cNvPr id="14" name="Rectangle 13"/>
-          <p:cNvSpPr/>
-          <p:nvPr/>
-        </p:nvSpPr>
-        <p:spPr>
-          <a:xfrm>
-            <a:off x="1143000" y="4400550"/>
-            <a:ext cx="47625" cy="914400"/>
-          </a:xfrm>
-          <a:prstGeom prst="rect">
-            <a:avLst/>
-          </a:prstGeom>
-          <a:solidFill>
-            <a:srgbClr val="1E5BC6"/>
-          </a:solidFill>
-          <a:ln>
-            <a:noFill/>
-          </a:ln>
-          <a:effectLst/>
-        </p:spPr>
-        <p:txBody>
-          <a:bodyPr rtlCol="0" anchor="ctr" wrap="square"/>
-          <a:lstStyle/>
-          <a:p>
-            <a:pPr algn="ctr"/>
-          </a:p>
-        </p:txBody>
-      </p:sp>
-      <p:sp>
-        <p:nvSpPr>
-          <p:cNvPr id="15" name="Oval 14"/>
-          <p:cNvSpPr/>
-          <p:nvPr/>
-        </p:nvSpPr>
-        <p:spPr>
-          <a:xfrm>
-            <a:off x="1428750" y="4648200"/>
-            <a:ext cx="419100" cy="419100"/>
-          </a:xfrm>
-          <a:prstGeom prst="ellipse">
-            <a:avLst/>
-          </a:prstGeom>
-          <a:solidFill>
-            <a:srgbClr val="0D2B5E"/>
-          </a:solidFill>
-          <a:ln>
-            <a:noFill/>
-          </a:ln>
-          <a:effectLst/>
-        </p:spPr>
-        <p:txBody>
-          <a:bodyPr rtlCol="0" anchor="ctr" wrap="square"/>
-          <a:lstStyle/>
-          <a:p>
-            <a:pPr algn="ctr"/>
-          </a:p>
-        </p:txBody>
-      </p:sp>
-      <p:sp>
-        <p:nvSpPr>
-          <p:cNvPr id="16" name="TextBox 15"/>
-          <p:cNvSpPr txBox="1"/>
-          <p:nvPr/>
-        </p:nvSpPr>
-        <p:spPr>
-          <a:xfrm>
-            <a:off x="1428750" y="4714875"/>
-            <a:ext cx="419100" cy="304800"/>
-          </a:xfrm>
-          <a:prstGeom prst="rect">
-            <a:avLst/>
-          </a:prstGeom>
-          <a:noFill/>
-        </p:spPr>
-        <p:txBody>
-          <a:bodyPr wrap="square" lIns="0" rIns="0" tIns="0" bIns="0" anchor="t">
+          <p:cNvPr id="19" name="TextBox 18"/>
+          <p:cNvSpPr txBox="1"/>
+          <p:nvPr/>
+        </p:nvSpPr>
+        <p:spPr>
+          <a:xfrm>
+            <a:off x="10839450" y="3448050"/>
+            <a:ext cx="6210300" cy="647700"/>
+          </a:xfrm>
+          <a:prstGeom prst="rect">
+            <a:avLst/>
+          </a:prstGeom>
+          <a:noFill/>
+        </p:spPr>
+        <p:txBody>
+          <a:bodyPr wrap="square" lIns="0" rIns="0" tIns="0" bIns="0" anchor="ctr">
             <a:spAutoFit/>
           </a:bodyPr>
           <a:lstStyle/>
           <a:p>
             <a:pPr algn="ctr">
               <a:lnSpc>
-                <a:spcPct val="100000"/>
-              </a:lnSpc>
-            </a:pPr>
-            <a:r>
-              <a:rPr sz="1875" b="1">
-                <a:solidFill>
-                  <a:srgbClr val="FFFFFF"/>
-                </a:solidFill>
-                <a:latin typeface="Pretendard"/>
-                <a:ea typeface="Pretendard"/>
-                <a:cs typeface="Pretendard"/>
-              </a:rPr>
-              <a:t>2</a:t>
-            </a:r>
-          </a:p>
-        </p:txBody>
-      </p:sp>
-      <p:sp>
-        <p:nvSpPr>
-          <p:cNvPr id="17" name="TextBox 16"/>
-          <p:cNvSpPr txBox="1"/>
-          <p:nvPr/>
-        </p:nvSpPr>
-        <p:spPr>
-          <a:xfrm>
-            <a:off x="2057400" y="4495800"/>
-            <a:ext cx="14763750" cy="723900"/>
-          </a:xfrm>
-          <a:prstGeom prst="rect">
-            <a:avLst/>
-          </a:prstGeom>
-          <a:noFill/>
-        </p:spPr>
-        <p:txBody>
-          <a:bodyPr wrap="square" lIns="0" rIns="0" tIns="0" bIns="0" anchor="ctr">
-            <a:spAutoFit/>
-          </a:bodyPr>
-          <a:lstStyle/>
-          <a:p>
-            <a:pPr>
-              <a:lnSpc>
-                <a:spcPct val="120000"/>
-              </a:lnSpc>
-            </a:pPr>
-            <a:r>
-              <a:rPr sz="2175" b="1">
-                <a:solidFill>
-                  <a:srgbClr val="0D2B5E"/>
-                </a:solidFill>
-                <a:latin typeface="Pretendard"/>
-                <a:ea typeface="Pretendard"/>
-                <a:cs typeface="Pretendard"/>
-              </a:rPr>
-              <a:t>마스터가 죽으면 어떻게 되나요?</a:t>
-            </a:r>
-          </a:p>
-          <a:p>
-            <a:pPr>
-              <a:lnSpc>
-                <a:spcPct val="130000"/>
-              </a:lnSpc>
-              <a:spcBef>
-                <a:spcPts val="300"/>
-              </a:spcBef>
+                <a:spcPct val="115000"/>
+              </a:lnSpc>
             </a:pPr>
             <a:r>
               <a:rPr sz="1875" b="0">
@@ -12614,25 +13115,136 @@
                 <a:ea typeface="Pretendard"/>
                 <a:cs typeface="Pretendard"/>
               </a:rPr>
-              <a:t>돌던 잡은 계속되지만 새 잡을 제출할 수 없다 — 운영에서는 마스터를 이중화(HA)</a:t>
-            </a:r>
-          </a:p>
-        </p:txBody>
-      </p:sp>
-      <p:sp>
-        <p:nvSpPr>
-          <p:cNvPr id="18" name="Rounded Rectangle 17"/>
-          <p:cNvSpPr/>
-          <p:nvPr/>
-        </p:nvSpPr>
-        <p:spPr>
-          <a:xfrm>
-            <a:off x="1143000" y="5448300"/>
-            <a:ext cx="16002000" cy="914400"/>
+              <a:t>logs spark-worker 확인 ·</a:t>
+            </a:r>
+          </a:p>
+          <a:p>
+            <a:pPr algn="ctr">
+              <a:lnSpc>
+                <a:spcPct val="115000"/>
+              </a:lnSpc>
+            </a:pPr>
+            <a:r>
+              <a:rPr sz="1875" b="0">
+                <a:solidFill>
+                  <a:srgbClr val="3D3D3D"/>
+                </a:solidFill>
+                <a:latin typeface="Pretendard"/>
+                <a:ea typeface="Pretendard"/>
+                <a:cs typeface="Pretendard"/>
+              </a:rPr>
+              <a:t>이름 맞춘 뒤 up -d</a:t>
+            </a:r>
+          </a:p>
+        </p:txBody>
+      </p:sp>
+      <p:sp>
+        <p:nvSpPr>
+          <p:cNvPr id="20" name="Rounded Rectangle 19"/>
+          <p:cNvSpPr/>
+          <p:nvPr/>
+        </p:nvSpPr>
+        <p:spPr>
+          <a:xfrm>
+            <a:off x="1143000" y="4171950"/>
+            <a:ext cx="4122420" cy="647700"/>
           </a:xfrm>
           <a:prstGeom prst="roundRect">
             <a:avLst>
-              <a:gd name="adj" fmla="val 5208"/>
+              <a:gd name="adj" fmla="val 5882"/>
+            </a:avLst>
+          </a:prstGeom>
+          <a:solidFill>
+            <a:srgbClr val="EDF3FD"/>
+          </a:solidFill>
+          <a:ln w="9525">
+            <a:solidFill>
+              <a:srgbClr val="BFD3F5"/>
+            </a:solidFill>
+          </a:ln>
+          <a:effectLst/>
+        </p:spPr>
+        <p:txBody>
+          <a:bodyPr rtlCol="0" anchor="ctr" wrap="square"/>
+          <a:lstStyle/>
+          <a:p>
+            <a:pPr algn="ctr"/>
+          </a:p>
+        </p:txBody>
+      </p:sp>
+      <p:sp>
+        <p:nvSpPr>
+          <p:cNvPr id="21" name="TextBox 20"/>
+          <p:cNvSpPr txBox="1"/>
+          <p:nvPr/>
+        </p:nvSpPr>
+        <p:spPr>
+          <a:xfrm>
+            <a:off x="1238250" y="4171950"/>
+            <a:ext cx="3931920" cy="647700"/>
+          </a:xfrm>
+          <a:prstGeom prst="rect">
+            <a:avLst/>
+          </a:prstGeom>
+          <a:noFill/>
+        </p:spPr>
+        <p:txBody>
+          <a:bodyPr wrap="square" lIns="0" rIns="0" tIns="0" bIns="0" anchor="ctr">
+            <a:spAutoFit/>
+          </a:bodyPr>
+          <a:lstStyle/>
+          <a:p>
+            <a:pPr algn="l">
+              <a:lnSpc>
+                <a:spcPct val="115000"/>
+              </a:lnSpc>
+            </a:pPr>
+            <a:r>
+              <a:rPr sz="1875" b="1">
+                <a:solidFill>
+                  <a:srgbClr val="0D2B5E"/>
+                </a:solidFill>
+                <a:latin typeface="Pretendard"/>
+                <a:ea typeface="Pretendard"/>
+                <a:cs typeface="Pretendard"/>
+              </a:rPr>
+              <a:t>port is already</a:t>
+            </a:r>
+          </a:p>
+          <a:p>
+            <a:pPr algn="l">
+              <a:lnSpc>
+                <a:spcPct val="115000"/>
+              </a:lnSpc>
+            </a:pPr>
+            <a:r>
+              <a:rPr sz="1875" b="1">
+                <a:solidFill>
+                  <a:srgbClr val="0D2B5E"/>
+                </a:solidFill>
+                <a:latin typeface="Pretendard"/>
+                <a:ea typeface="Pretendard"/>
+                <a:cs typeface="Pretendard"/>
+              </a:rPr>
+              <a:t>allocated</a:t>
+            </a:r>
+          </a:p>
+        </p:txBody>
+      </p:sp>
+      <p:sp>
+        <p:nvSpPr>
+          <p:cNvPr id="22" name="Rounded Rectangle 21"/>
+          <p:cNvSpPr/>
+          <p:nvPr/>
+        </p:nvSpPr>
+        <p:spPr>
+          <a:xfrm>
+            <a:off x="5303520" y="4171950"/>
+            <a:ext cx="5402580" cy="647700"/>
+          </a:xfrm>
+          <a:prstGeom prst="roundRect">
+            <a:avLst>
+              <a:gd name="adj" fmla="val 5882"/>
             </a:avLst>
           </a:prstGeom>
           <a:solidFill>
@@ -12655,152 +13267,30 @@
       </p:sp>
       <p:sp>
         <p:nvSpPr>
-          <p:cNvPr id="19" name="Rectangle 18"/>
-          <p:cNvSpPr/>
-          <p:nvPr/>
-        </p:nvSpPr>
-        <p:spPr>
-          <a:xfrm>
-            <a:off x="1143000" y="5448300"/>
-            <a:ext cx="47625" cy="914400"/>
-          </a:xfrm>
-          <a:prstGeom prst="rect">
-            <a:avLst/>
-          </a:prstGeom>
-          <a:solidFill>
-            <a:srgbClr val="1E5BC6"/>
-          </a:solidFill>
-          <a:ln>
-            <a:noFill/>
-          </a:ln>
-          <a:effectLst/>
-        </p:spPr>
-        <p:txBody>
-          <a:bodyPr rtlCol="0" anchor="ctr" wrap="square"/>
-          <a:lstStyle/>
-          <a:p>
-            <a:pPr algn="ctr"/>
-          </a:p>
-        </p:txBody>
-      </p:sp>
-      <p:sp>
-        <p:nvSpPr>
-          <p:cNvPr id="20" name="Oval 19"/>
-          <p:cNvSpPr/>
-          <p:nvPr/>
-        </p:nvSpPr>
-        <p:spPr>
-          <a:xfrm>
-            <a:off x="1428750" y="5695950"/>
-            <a:ext cx="419100" cy="419100"/>
-          </a:xfrm>
-          <a:prstGeom prst="ellipse">
-            <a:avLst/>
-          </a:prstGeom>
-          <a:solidFill>
-            <a:srgbClr val="0D2B5E"/>
-          </a:solidFill>
-          <a:ln>
-            <a:noFill/>
-          </a:ln>
-          <a:effectLst/>
-        </p:spPr>
-        <p:txBody>
-          <a:bodyPr rtlCol="0" anchor="ctr" wrap="square"/>
-          <a:lstStyle/>
-          <a:p>
-            <a:pPr algn="ctr"/>
-          </a:p>
-        </p:txBody>
-      </p:sp>
-      <p:sp>
-        <p:nvSpPr>
-          <p:cNvPr id="21" name="TextBox 20"/>
-          <p:cNvSpPr txBox="1"/>
-          <p:nvPr/>
-        </p:nvSpPr>
-        <p:spPr>
-          <a:xfrm>
-            <a:off x="1428750" y="5762625"/>
-            <a:ext cx="419100" cy="304800"/>
-          </a:xfrm>
-          <a:prstGeom prst="rect">
-            <a:avLst/>
-          </a:prstGeom>
-          <a:noFill/>
-        </p:spPr>
-        <p:txBody>
-          <a:bodyPr wrap="square" lIns="0" rIns="0" tIns="0" bIns="0" anchor="t">
+          <p:cNvPr id="23" name="TextBox 22"/>
+          <p:cNvSpPr txBox="1"/>
+          <p:nvPr/>
+        </p:nvSpPr>
+        <p:spPr>
+          <a:xfrm>
+            <a:off x="5398770" y="4171950"/>
+            <a:ext cx="5212080" cy="647700"/>
+          </a:xfrm>
+          <a:prstGeom prst="rect">
+            <a:avLst/>
+          </a:prstGeom>
+          <a:noFill/>
+        </p:spPr>
+        <p:txBody>
+          <a:bodyPr wrap="square" lIns="0" rIns="0" tIns="0" bIns="0" anchor="ctr">
             <a:spAutoFit/>
           </a:bodyPr>
           <a:lstStyle/>
           <a:p>
             <a:pPr algn="ctr">
               <a:lnSpc>
-                <a:spcPct val="100000"/>
-              </a:lnSpc>
-            </a:pPr>
-            <a:r>
-              <a:rPr sz="1875" b="1">
-                <a:solidFill>
-                  <a:srgbClr val="FFFFFF"/>
-                </a:solidFill>
-                <a:latin typeface="Pretendard"/>
-                <a:ea typeface="Pretendard"/>
-                <a:cs typeface="Pretendard"/>
-              </a:rPr>
-              <a:t>3</a:t>
-            </a:r>
-          </a:p>
-        </p:txBody>
-      </p:sp>
-      <p:sp>
-        <p:nvSpPr>
-          <p:cNvPr id="22" name="TextBox 21"/>
-          <p:cNvSpPr txBox="1"/>
-          <p:nvPr/>
-        </p:nvSpPr>
-        <p:spPr>
-          <a:xfrm>
-            <a:off x="2057400" y="5543550"/>
-            <a:ext cx="14763750" cy="723900"/>
-          </a:xfrm>
-          <a:prstGeom prst="rect">
-            <a:avLst/>
-          </a:prstGeom>
-          <a:noFill/>
-        </p:spPr>
-        <p:txBody>
-          <a:bodyPr wrap="square" lIns="0" rIns="0" tIns="0" bIns="0" anchor="ctr">
-            <a:spAutoFit/>
-          </a:bodyPr>
-          <a:lstStyle/>
-          <a:p>
-            <a:pPr>
-              <a:lnSpc>
-                <a:spcPct val="120000"/>
-              </a:lnSpc>
-            </a:pPr>
-            <a:r>
-              <a:rPr sz="2175" b="1">
-                <a:solidFill>
-                  <a:srgbClr val="0D2B5E"/>
-                </a:solidFill>
-                <a:latin typeface="Pretendard"/>
-                <a:ea typeface="Pretendard"/>
-                <a:cs typeface="Pretendard"/>
-              </a:rPr>
-              <a:t>실무에서도 Standalone 을 쓰나요?</a:t>
-            </a:r>
-          </a:p>
-          <a:p>
-            <a:pPr>
-              <a:lnSpc>
-                <a:spcPct val="130000"/>
-              </a:lnSpc>
-              <a:spcBef>
-                <a:spcPts val="300"/>
-              </a:spcBef>
+                <a:spcPct val="115000"/>
+              </a:lnSpc>
             </a:pPr>
             <a:r>
               <a:rPr sz="1875" b="0">
@@ -12811,25 +13301,43 @@
                 <a:ea typeface="Pretendard"/>
                 <a:cs typeface="Pretendard"/>
               </a:rPr>
-              <a:t>소규모 전용 클러스터에서는 쓴다 — 요즘 신규 구축은 Kubernetes 가 많고, 개념은 같다</a:t>
-            </a:r>
-          </a:p>
-        </p:txBody>
-      </p:sp>
-      <p:sp>
-        <p:nvSpPr>
-          <p:cNvPr id="23" name="Rounded Rectangle 22"/>
-          <p:cNvSpPr/>
-          <p:nvPr/>
-        </p:nvSpPr>
-        <p:spPr>
-          <a:xfrm>
-            <a:off x="1143000" y="6496050"/>
-            <a:ext cx="16002000" cy="914400"/>
+              <a:t>8080·7077 을 다른 것이</a:t>
+            </a:r>
+          </a:p>
+          <a:p>
+            <a:pPr algn="ctr">
+              <a:lnSpc>
+                <a:spcPct val="115000"/>
+              </a:lnSpc>
+            </a:pPr>
+            <a:r>
+              <a:rPr sz="1875" b="0">
+                <a:solidFill>
+                  <a:srgbClr val="3D3D3D"/>
+                </a:solidFill>
+                <a:latin typeface="Pretendard"/>
+                <a:ea typeface="Pretendard"/>
+                <a:cs typeface="Pretendard"/>
+              </a:rPr>
+              <a:t>사용 중(4주차 Trino)</a:t>
+            </a:r>
+          </a:p>
+        </p:txBody>
+      </p:sp>
+      <p:sp>
+        <p:nvSpPr>
+          <p:cNvPr id="24" name="Rounded Rectangle 23"/>
+          <p:cNvSpPr/>
+          <p:nvPr/>
+        </p:nvSpPr>
+        <p:spPr>
+          <a:xfrm>
+            <a:off x="10744200" y="4171950"/>
+            <a:ext cx="6400800" cy="647700"/>
           </a:xfrm>
           <a:prstGeom prst="roundRect">
             <a:avLst>
-              <a:gd name="adj" fmla="val 5208"/>
+              <a:gd name="adj" fmla="val 5882"/>
             </a:avLst>
           </a:prstGeom>
           <a:solidFill>
@@ -12852,20 +13360,678 @@
       </p:sp>
       <p:sp>
         <p:nvSpPr>
-          <p:cNvPr id="24" name="Rectangle 23"/>
-          <p:cNvSpPr/>
-          <p:nvPr/>
-        </p:nvSpPr>
-        <p:spPr>
-          <a:xfrm>
-            <a:off x="1143000" y="6496050"/>
-            <a:ext cx="47625" cy="914400"/>
-          </a:xfrm>
-          <a:prstGeom prst="rect">
-            <a:avLst/>
-          </a:prstGeom>
-          <a:solidFill>
-            <a:srgbClr val="1E5BC6"/>
+          <p:cNvPr id="25" name="TextBox 24"/>
+          <p:cNvSpPr txBox="1"/>
+          <p:nvPr/>
+        </p:nvSpPr>
+        <p:spPr>
+          <a:xfrm>
+            <a:off x="10839450" y="4171950"/>
+            <a:ext cx="6210300" cy="647700"/>
+          </a:xfrm>
+          <a:prstGeom prst="rect">
+            <a:avLst/>
+          </a:prstGeom>
+          <a:noFill/>
+        </p:spPr>
+        <p:txBody>
+          <a:bodyPr wrap="square" lIns="0" rIns="0" tIns="0" bIns="0" anchor="ctr">
+            <a:spAutoFit/>
+          </a:bodyPr>
+          <a:lstStyle/>
+          <a:p>
+            <a:pPr algn="ctr">
+              <a:lnSpc>
+                <a:spcPct val="115000"/>
+              </a:lnSpc>
+            </a:pPr>
+            <a:r>
+              <a:rPr sz="1875" b="0">
+                <a:solidFill>
+                  <a:srgbClr val="3D3D3D"/>
+                </a:solidFill>
+                <a:latin typeface="Pretendard"/>
+                <a:ea typeface="Pretendard"/>
+                <a:cs typeface="Pretendard"/>
+              </a:rPr>
+              <a:t>점유 컨테이너 내리기 ·</a:t>
+            </a:r>
+          </a:p>
+          <a:p>
+            <a:pPr algn="ctr">
+              <a:lnSpc>
+                <a:spcPct val="115000"/>
+              </a:lnSpc>
+            </a:pPr>
+            <a:r>
+              <a:rPr sz="1875" b="0">
+                <a:solidFill>
+                  <a:srgbClr val="3D3D3D"/>
+                </a:solidFill>
+                <a:latin typeface="Pretendard"/>
+                <a:ea typeface="Pretendard"/>
+                <a:cs typeface="Pretendard"/>
+              </a:rPr>
+              <a:t>8081:8080 으로 매핑</a:t>
+            </a:r>
+          </a:p>
+        </p:txBody>
+      </p:sp>
+      <p:sp>
+        <p:nvSpPr>
+          <p:cNvPr id="26" name="Rounded Rectangle 25"/>
+          <p:cNvSpPr/>
+          <p:nvPr/>
+        </p:nvSpPr>
+        <p:spPr>
+          <a:xfrm>
+            <a:off x="1143000" y="4895850"/>
+            <a:ext cx="4122420" cy="647700"/>
+          </a:xfrm>
+          <a:prstGeom prst="roundRect">
+            <a:avLst>
+              <a:gd name="adj" fmla="val 5882"/>
+            </a:avLst>
+          </a:prstGeom>
+          <a:solidFill>
+            <a:srgbClr val="EDF3FD"/>
+          </a:solidFill>
+          <a:ln w="9525">
+            <a:solidFill>
+              <a:srgbClr val="BFD3F5"/>
+            </a:solidFill>
+          </a:ln>
+          <a:effectLst/>
+        </p:spPr>
+        <p:txBody>
+          <a:bodyPr rtlCol="0" anchor="ctr" wrap="square"/>
+          <a:lstStyle/>
+          <a:p>
+            <a:pPr algn="ctr"/>
+          </a:p>
+        </p:txBody>
+      </p:sp>
+      <p:sp>
+        <p:nvSpPr>
+          <p:cNvPr id="27" name="TextBox 26"/>
+          <p:cNvSpPr txBox="1"/>
+          <p:nvPr/>
+        </p:nvSpPr>
+        <p:spPr>
+          <a:xfrm>
+            <a:off x="1238250" y="4895850"/>
+            <a:ext cx="3931920" cy="647700"/>
+          </a:xfrm>
+          <a:prstGeom prst="rect">
+            <a:avLst/>
+          </a:prstGeom>
+          <a:noFill/>
+        </p:spPr>
+        <p:txBody>
+          <a:bodyPr wrap="square" lIns="0" rIns="0" tIns="0" bIns="0" anchor="ctr">
+            <a:spAutoFit/>
+          </a:bodyPr>
+          <a:lstStyle/>
+          <a:p>
+            <a:pPr algn="l">
+              <a:lnSpc>
+                <a:spcPct val="115000"/>
+              </a:lnSpc>
+            </a:pPr>
+            <a:r>
+              <a:rPr sz="1875" b="1">
+                <a:solidFill>
+                  <a:srgbClr val="0D2B5E"/>
+                </a:solidFill>
+                <a:latin typeface="Pretendard"/>
+                <a:ea typeface="Pretendard"/>
+                <a:cs typeface="Pretendard"/>
+              </a:rPr>
+              <a:t>not accepted</a:t>
+            </a:r>
+          </a:p>
+          <a:p>
+            <a:pPr algn="l">
+              <a:lnSpc>
+                <a:spcPct val="115000"/>
+              </a:lnSpc>
+            </a:pPr>
+            <a:r>
+              <a:rPr sz="1875" b="1">
+                <a:solidFill>
+                  <a:srgbClr val="0D2B5E"/>
+                </a:solidFill>
+                <a:latin typeface="Pretendard"/>
+                <a:ea typeface="Pretendard"/>
+                <a:cs typeface="Pretendard"/>
+              </a:rPr>
+              <a:t>any resources</a:t>
+            </a:r>
+          </a:p>
+        </p:txBody>
+      </p:sp>
+      <p:sp>
+        <p:nvSpPr>
+          <p:cNvPr id="28" name="Rounded Rectangle 27"/>
+          <p:cNvSpPr/>
+          <p:nvPr/>
+        </p:nvSpPr>
+        <p:spPr>
+          <a:xfrm>
+            <a:off x="5303520" y="4895850"/>
+            <a:ext cx="5402580" cy="647700"/>
+          </a:xfrm>
+          <a:prstGeom prst="roundRect">
+            <a:avLst>
+              <a:gd name="adj" fmla="val 5882"/>
+            </a:avLst>
+          </a:prstGeom>
+          <a:solidFill>
+            <a:srgbClr val="FAFBFD"/>
+          </a:solidFill>
+          <a:ln w="9525">
+            <a:solidFill>
+              <a:srgbClr val="DCE1E8"/>
+            </a:solidFill>
+          </a:ln>
+          <a:effectLst/>
+        </p:spPr>
+        <p:txBody>
+          <a:bodyPr rtlCol="0" anchor="ctr" wrap="square"/>
+          <a:lstStyle/>
+          <a:p>
+            <a:pPr algn="ctr"/>
+          </a:p>
+        </p:txBody>
+      </p:sp>
+      <p:sp>
+        <p:nvSpPr>
+          <p:cNvPr id="29" name="TextBox 28"/>
+          <p:cNvSpPr txBox="1"/>
+          <p:nvPr/>
+        </p:nvSpPr>
+        <p:spPr>
+          <a:xfrm>
+            <a:off x="5398770" y="4895850"/>
+            <a:ext cx="5212080" cy="647700"/>
+          </a:xfrm>
+          <a:prstGeom prst="rect">
+            <a:avLst/>
+          </a:prstGeom>
+          <a:noFill/>
+        </p:spPr>
+        <p:txBody>
+          <a:bodyPr wrap="square" lIns="0" rIns="0" tIns="0" bIns="0" anchor="ctr">
+            <a:spAutoFit/>
+          </a:bodyPr>
+          <a:lstStyle/>
+          <a:p>
+            <a:pPr algn="ctr">
+              <a:lnSpc>
+                <a:spcPct val="115000"/>
+              </a:lnSpc>
+            </a:pPr>
+            <a:r>
+              <a:rPr sz="1875" b="0">
+                <a:solidFill>
+                  <a:srgbClr val="3D3D3D"/>
+                </a:solidFill>
+                <a:latin typeface="Pretendard"/>
+                <a:ea typeface="Pretendard"/>
+                <a:cs typeface="Pretendard"/>
+              </a:rPr>
+              <a:t>요청한 코어·메모리를</a:t>
+            </a:r>
+          </a:p>
+          <a:p>
+            <a:pPr algn="ctr">
+              <a:lnSpc>
+                <a:spcPct val="115000"/>
+              </a:lnSpc>
+            </a:pPr>
+            <a:r>
+              <a:rPr sz="1875" b="0">
+                <a:solidFill>
+                  <a:srgbClr val="3D3D3D"/>
+                </a:solidFill>
+                <a:latin typeface="Pretendard"/>
+                <a:ea typeface="Pretendard"/>
+                <a:cs typeface="Pretendard"/>
+              </a:rPr>
+              <a:t>채울 워커가 없다</a:t>
+            </a:r>
+          </a:p>
+        </p:txBody>
+      </p:sp>
+      <p:sp>
+        <p:nvSpPr>
+          <p:cNvPr id="30" name="Rounded Rectangle 29"/>
+          <p:cNvSpPr/>
+          <p:nvPr/>
+        </p:nvSpPr>
+        <p:spPr>
+          <a:xfrm>
+            <a:off x="10744200" y="4895850"/>
+            <a:ext cx="6400800" cy="647700"/>
+          </a:xfrm>
+          <a:prstGeom prst="roundRect">
+            <a:avLst>
+              <a:gd name="adj" fmla="val 5882"/>
+            </a:avLst>
+          </a:prstGeom>
+          <a:solidFill>
+            <a:srgbClr val="FAFBFD"/>
+          </a:solidFill>
+          <a:ln w="9525">
+            <a:solidFill>
+              <a:srgbClr val="DCE1E8"/>
+            </a:solidFill>
+          </a:ln>
+          <a:effectLst/>
+        </p:spPr>
+        <p:txBody>
+          <a:bodyPr rtlCol="0" anchor="ctr" wrap="square"/>
+          <a:lstStyle/>
+          <a:p>
+            <a:pPr algn="ctr"/>
+          </a:p>
+        </p:txBody>
+      </p:sp>
+      <p:sp>
+        <p:nvSpPr>
+          <p:cNvPr id="31" name="TextBox 30"/>
+          <p:cNvSpPr txBox="1"/>
+          <p:nvPr/>
+        </p:nvSpPr>
+        <p:spPr>
+          <a:xfrm>
+            <a:off x="10839450" y="4895850"/>
+            <a:ext cx="6210300" cy="647700"/>
+          </a:xfrm>
+          <a:prstGeom prst="rect">
+            <a:avLst/>
+          </a:prstGeom>
+          <a:noFill/>
+        </p:spPr>
+        <p:txBody>
+          <a:bodyPr wrap="square" lIns="0" rIns="0" tIns="0" bIns="0" anchor="ctr">
+            <a:spAutoFit/>
+          </a:bodyPr>
+          <a:lstStyle/>
+          <a:p>
+            <a:pPr algn="ctr">
+              <a:lnSpc>
+                <a:spcPct val="115000"/>
+              </a:lnSpc>
+            </a:pPr>
+            <a:r>
+              <a:rPr sz="1875" b="0">
+                <a:solidFill>
+                  <a:srgbClr val="3D3D3D"/>
+                </a:solidFill>
+                <a:latin typeface="Pretendard"/>
+                <a:ea typeface="Pretendard"/>
+                <a:cs typeface="Pretendard"/>
+              </a:rPr>
+              <a:t>UI 에서 워커·남은 자원 ·</a:t>
+            </a:r>
+          </a:p>
+          <a:p>
+            <a:pPr algn="ctr">
+              <a:lnSpc>
+                <a:spcPct val="115000"/>
+              </a:lnSpc>
+            </a:pPr>
+            <a:r>
+              <a:rPr sz="1875" b="0">
+                <a:solidFill>
+                  <a:srgbClr val="3D3D3D"/>
+                </a:solidFill>
+                <a:latin typeface="Pretendard"/>
+                <a:ea typeface="Pretendard"/>
+                <a:cs typeface="Pretendard"/>
+              </a:rPr>
+              <a:t>--executor-memory 2G 이하</a:t>
+            </a:r>
+          </a:p>
+        </p:txBody>
+      </p:sp>
+      <p:sp>
+        <p:nvSpPr>
+          <p:cNvPr id="32" name="Rounded Rectangle 31"/>
+          <p:cNvSpPr/>
+          <p:nvPr/>
+        </p:nvSpPr>
+        <p:spPr>
+          <a:xfrm>
+            <a:off x="1143000" y="5619750"/>
+            <a:ext cx="4122420" cy="647700"/>
+          </a:xfrm>
+          <a:prstGeom prst="roundRect">
+            <a:avLst>
+              <a:gd name="adj" fmla="val 5882"/>
+            </a:avLst>
+          </a:prstGeom>
+          <a:solidFill>
+            <a:srgbClr val="EDF3FD"/>
+          </a:solidFill>
+          <a:ln w="9525">
+            <a:solidFill>
+              <a:srgbClr val="BFD3F5"/>
+            </a:solidFill>
+          </a:ln>
+          <a:effectLst/>
+        </p:spPr>
+        <p:txBody>
+          <a:bodyPr rtlCol="0" anchor="ctr" wrap="square"/>
+          <a:lstStyle/>
+          <a:p>
+            <a:pPr algn="ctr"/>
+          </a:p>
+        </p:txBody>
+      </p:sp>
+      <p:sp>
+        <p:nvSpPr>
+          <p:cNvPr id="33" name="TextBox 32"/>
+          <p:cNvSpPr txBox="1"/>
+          <p:nvPr/>
+        </p:nvSpPr>
+        <p:spPr>
+          <a:xfrm>
+            <a:off x="1238250" y="5619750"/>
+            <a:ext cx="3931920" cy="647700"/>
+          </a:xfrm>
+          <a:prstGeom prst="rect">
+            <a:avLst/>
+          </a:prstGeom>
+          <a:noFill/>
+        </p:spPr>
+        <p:txBody>
+          <a:bodyPr wrap="square" lIns="0" rIns="0" tIns="0" bIns="0" anchor="ctr">
+            <a:spAutoFit/>
+          </a:bodyPr>
+          <a:lstStyle/>
+          <a:p>
+            <a:pPr algn="l">
+              <a:lnSpc>
+                <a:spcPct val="115000"/>
+              </a:lnSpc>
+            </a:pPr>
+            <a:r>
+              <a:rPr sz="1875" b="1">
+                <a:solidFill>
+                  <a:srgbClr val="0D2B5E"/>
+                </a:solidFill>
+                <a:latin typeface="Pretendard"/>
+                <a:ea typeface="Pretendard"/>
+                <a:cs typeface="Pretendard"/>
+              </a:rPr>
+              <a:t>--scale 뒤</a:t>
+            </a:r>
+          </a:p>
+          <a:p>
+            <a:pPr algn="l">
+              <a:lnSpc>
+                <a:spcPct val="115000"/>
+              </a:lnSpc>
+            </a:pPr>
+            <a:r>
+              <a:rPr sz="1875" b="1">
+                <a:solidFill>
+                  <a:srgbClr val="0D2B5E"/>
+                </a:solidFill>
+                <a:latin typeface="Pretendard"/>
+                <a:ea typeface="Pretendard"/>
+                <a:cs typeface="Pretendard"/>
+              </a:rPr>
+              <a:t>컨테이너가 바로 죽음</a:t>
+            </a:r>
+          </a:p>
+        </p:txBody>
+      </p:sp>
+      <p:sp>
+        <p:nvSpPr>
+          <p:cNvPr id="34" name="Rounded Rectangle 33"/>
+          <p:cNvSpPr/>
+          <p:nvPr/>
+        </p:nvSpPr>
+        <p:spPr>
+          <a:xfrm>
+            <a:off x="5303520" y="5619750"/>
+            <a:ext cx="5402580" cy="647700"/>
+          </a:xfrm>
+          <a:prstGeom prst="roundRect">
+            <a:avLst>
+              <a:gd name="adj" fmla="val 5882"/>
+            </a:avLst>
+          </a:prstGeom>
+          <a:solidFill>
+            <a:srgbClr val="FAFBFD"/>
+          </a:solidFill>
+          <a:ln w="9525">
+            <a:solidFill>
+              <a:srgbClr val="DCE1E8"/>
+            </a:solidFill>
+          </a:ln>
+          <a:effectLst/>
+        </p:spPr>
+        <p:txBody>
+          <a:bodyPr rtlCol="0" anchor="ctr" wrap="square"/>
+          <a:lstStyle/>
+          <a:p>
+            <a:pPr algn="ctr"/>
+          </a:p>
+        </p:txBody>
+      </p:sp>
+      <p:sp>
+        <p:nvSpPr>
+          <p:cNvPr id="35" name="TextBox 34"/>
+          <p:cNvSpPr txBox="1"/>
+          <p:nvPr/>
+        </p:nvSpPr>
+        <p:spPr>
+          <a:xfrm>
+            <a:off x="5398770" y="5619750"/>
+            <a:ext cx="5212080" cy="647700"/>
+          </a:xfrm>
+          <a:prstGeom prst="rect">
+            <a:avLst/>
+          </a:prstGeom>
+          <a:noFill/>
+        </p:spPr>
+        <p:txBody>
+          <a:bodyPr wrap="square" lIns="0" rIns="0" tIns="0" bIns="0" anchor="ctr">
+            <a:spAutoFit/>
+          </a:bodyPr>
+          <a:lstStyle/>
+          <a:p>
+            <a:pPr algn="ctr">
+              <a:lnSpc>
+                <a:spcPct val="115000"/>
+              </a:lnSpc>
+            </a:pPr>
+            <a:r>
+              <a:rPr sz="1875" b="0">
+                <a:solidFill>
+                  <a:srgbClr val="3D3D3D"/>
+                </a:solidFill>
+                <a:latin typeface="Pretendard"/>
+                <a:ea typeface="Pretendard"/>
+                <a:cs typeface="Pretendard"/>
+              </a:rPr>
+              <a:t>Docker 에 할당된</a:t>
+            </a:r>
+          </a:p>
+          <a:p>
+            <a:pPr algn="ctr">
+              <a:lnSpc>
+                <a:spcPct val="115000"/>
+              </a:lnSpc>
+            </a:pPr>
+            <a:r>
+              <a:rPr sz="1875" b="0">
+                <a:solidFill>
+                  <a:srgbClr val="3D3D3D"/>
+                </a:solidFill>
+                <a:latin typeface="Pretendard"/>
+                <a:ea typeface="Pretendard"/>
+                <a:cs typeface="Pretendard"/>
+              </a:rPr>
+              <a:t>메모리를 넘었다</a:t>
+            </a:r>
+          </a:p>
+        </p:txBody>
+      </p:sp>
+      <p:sp>
+        <p:nvSpPr>
+          <p:cNvPr id="36" name="Rounded Rectangle 35"/>
+          <p:cNvSpPr/>
+          <p:nvPr/>
+        </p:nvSpPr>
+        <p:spPr>
+          <a:xfrm>
+            <a:off x="10744200" y="5619750"/>
+            <a:ext cx="6400800" cy="647700"/>
+          </a:xfrm>
+          <a:prstGeom prst="roundRect">
+            <a:avLst>
+              <a:gd name="adj" fmla="val 5882"/>
+            </a:avLst>
+          </a:prstGeom>
+          <a:solidFill>
+            <a:srgbClr val="FAFBFD"/>
+          </a:solidFill>
+          <a:ln w="9525">
+            <a:solidFill>
+              <a:srgbClr val="DCE1E8"/>
+            </a:solidFill>
+          </a:ln>
+          <a:effectLst/>
+        </p:spPr>
+        <p:txBody>
+          <a:bodyPr rtlCol="0" anchor="ctr" wrap="square"/>
+          <a:lstStyle/>
+          <a:p>
+            <a:pPr algn="ctr"/>
+          </a:p>
+        </p:txBody>
+      </p:sp>
+      <p:sp>
+        <p:nvSpPr>
+          <p:cNvPr id="37" name="TextBox 36"/>
+          <p:cNvSpPr txBox="1"/>
+          <p:nvPr/>
+        </p:nvSpPr>
+        <p:spPr>
+          <a:xfrm>
+            <a:off x="10839450" y="5619750"/>
+            <a:ext cx="6210300" cy="647700"/>
+          </a:xfrm>
+          <a:prstGeom prst="rect">
+            <a:avLst/>
+          </a:prstGeom>
+          <a:noFill/>
+        </p:spPr>
+        <p:txBody>
+          <a:bodyPr wrap="square" lIns="0" rIns="0" tIns="0" bIns="0" anchor="ctr">
+            <a:spAutoFit/>
+          </a:bodyPr>
+          <a:lstStyle/>
+          <a:p>
+            <a:pPr algn="ctr">
+              <a:lnSpc>
+                <a:spcPct val="115000"/>
+              </a:lnSpc>
+            </a:pPr>
+            <a:r>
+              <a:rPr sz="1875" b="0">
+                <a:solidFill>
+                  <a:srgbClr val="3D3D3D"/>
+                </a:solidFill>
+                <a:latin typeface="Pretendard"/>
+                <a:ea typeface="Pretendard"/>
+                <a:cs typeface="Pretendard"/>
+              </a:rPr>
+              <a:t>logs 확인 ·</a:t>
+            </a:r>
+          </a:p>
+          <a:p>
+            <a:pPr algn="ctr">
+              <a:lnSpc>
+                <a:spcPct val="115000"/>
+              </a:lnSpc>
+            </a:pPr>
+            <a:r>
+              <a:rPr sz="1875" b="0">
+                <a:solidFill>
+                  <a:srgbClr val="3D3D3D"/>
+                </a:solidFill>
+                <a:latin typeface="Pretendard"/>
+                <a:ea typeface="Pretendard"/>
+                <a:cs typeface="Pretendard"/>
+              </a:rPr>
+              <a:t>워커 수·--memory 줄이기</a:t>
+            </a:r>
+          </a:p>
+        </p:txBody>
+      </p:sp>
+      <p:sp>
+        <p:nvSpPr>
+          <p:cNvPr id="38" name="TextBox 37"/>
+          <p:cNvSpPr txBox="1"/>
+          <p:nvPr/>
+        </p:nvSpPr>
+        <p:spPr>
+          <a:xfrm>
+            <a:off x="1143000" y="7620000"/>
+            <a:ext cx="16002000" cy="342900"/>
+          </a:xfrm>
+          <a:prstGeom prst="rect">
+            <a:avLst/>
+          </a:prstGeom>
+          <a:noFill/>
+        </p:spPr>
+        <p:txBody>
+          <a:bodyPr wrap="square" lIns="0" rIns="0" tIns="0" bIns="0" anchor="t">
+            <a:spAutoFit/>
+          </a:bodyPr>
+          <a:lstStyle/>
+          <a:p>
+            <a:pPr algn="l">
+              <a:lnSpc>
+                <a:spcPct val="100000"/>
+              </a:lnSpc>
+            </a:pPr>
+            <a:r>
+              <a:rPr sz="1875" b="1">
+                <a:solidFill>
+                  <a:srgbClr val="7D7D7D"/>
+                </a:solidFill>
+                <a:latin typeface="Pretendard"/>
+                <a:ea typeface="Pretendard"/>
+                <a:cs typeface="Pretendard"/>
+              </a:rPr>
+              <a:t>16GB 환경에서는 워커 1~2개가 적당 — 워커는 마스터를 못 찾으면 Retrying connection to master 를 반복하며 기다린다</a:t>
+            </a:r>
+          </a:p>
+        </p:txBody>
+      </p:sp>
+      <p:sp>
+        <p:nvSpPr>
+          <p:cNvPr id="39" name="Rectangle 38"/>
+          <p:cNvSpPr/>
+          <p:nvPr/>
+        </p:nvSpPr>
+        <p:spPr>
+          <a:xfrm>
+            <a:off x="1143000" y="8058150"/>
+            <a:ext cx="16002000" cy="9525"/>
+          </a:xfrm>
+          <a:prstGeom prst="rect">
+            <a:avLst/>
+          </a:prstGeom>
+          <a:solidFill>
+            <a:srgbClr val="DCE1E8"/>
           </a:solidFill>
           <a:ln>
             <a:noFill/>
@@ -12882,170 +14048,7 @@
       </p:sp>
       <p:sp>
         <p:nvSpPr>
-          <p:cNvPr id="25" name="Oval 24"/>
-          <p:cNvSpPr/>
-          <p:nvPr/>
-        </p:nvSpPr>
-        <p:spPr>
-          <a:xfrm>
-            <a:off x="1428750" y="6743700"/>
-            <a:ext cx="419100" cy="419100"/>
-          </a:xfrm>
-          <a:prstGeom prst="ellipse">
-            <a:avLst/>
-          </a:prstGeom>
-          <a:solidFill>
-            <a:srgbClr val="0D2B5E"/>
-          </a:solidFill>
-          <a:ln>
-            <a:noFill/>
-          </a:ln>
-          <a:effectLst/>
-        </p:spPr>
-        <p:txBody>
-          <a:bodyPr rtlCol="0" anchor="ctr" wrap="square"/>
-          <a:lstStyle/>
-          <a:p>
-            <a:pPr algn="ctr"/>
-          </a:p>
-        </p:txBody>
-      </p:sp>
-      <p:sp>
-        <p:nvSpPr>
-          <p:cNvPr id="26" name="TextBox 25"/>
-          <p:cNvSpPr txBox="1"/>
-          <p:nvPr/>
-        </p:nvSpPr>
-        <p:spPr>
-          <a:xfrm>
-            <a:off x="1428750" y="6810375"/>
-            <a:ext cx="419100" cy="304800"/>
-          </a:xfrm>
-          <a:prstGeom prst="rect">
-            <a:avLst/>
-          </a:prstGeom>
-          <a:noFill/>
-        </p:spPr>
-        <p:txBody>
-          <a:bodyPr wrap="square" lIns="0" rIns="0" tIns="0" bIns="0" anchor="t">
-            <a:spAutoFit/>
-          </a:bodyPr>
-          <a:lstStyle/>
-          <a:p>
-            <a:pPr algn="ctr">
-              <a:lnSpc>
-                <a:spcPct val="100000"/>
-              </a:lnSpc>
-            </a:pPr>
-            <a:r>
-              <a:rPr sz="1875" b="1">
-                <a:solidFill>
-                  <a:srgbClr val="FFFFFF"/>
-                </a:solidFill>
-                <a:latin typeface="Pretendard"/>
-                <a:ea typeface="Pretendard"/>
-                <a:cs typeface="Pretendard"/>
-              </a:rPr>
-              <a:t>4</a:t>
-            </a:r>
-          </a:p>
-        </p:txBody>
-      </p:sp>
-      <p:sp>
-        <p:nvSpPr>
-          <p:cNvPr id="27" name="TextBox 26"/>
-          <p:cNvSpPr txBox="1"/>
-          <p:nvPr/>
-        </p:nvSpPr>
-        <p:spPr>
-          <a:xfrm>
-            <a:off x="2057400" y="6591300"/>
-            <a:ext cx="14763750" cy="723900"/>
-          </a:xfrm>
-          <a:prstGeom prst="rect">
-            <a:avLst/>
-          </a:prstGeom>
-          <a:noFill/>
-        </p:spPr>
-        <p:txBody>
-          <a:bodyPr wrap="square" lIns="0" rIns="0" tIns="0" bIns="0" anchor="ctr">
-            <a:spAutoFit/>
-          </a:bodyPr>
-          <a:lstStyle/>
-          <a:p>
-            <a:pPr>
-              <a:lnSpc>
-                <a:spcPct val="120000"/>
-              </a:lnSpc>
-            </a:pPr>
-            <a:r>
-              <a:rPr sz="2175" b="1">
-                <a:solidFill>
-                  <a:srgbClr val="0D2B5E"/>
-                </a:solidFill>
-                <a:latin typeface="Pretendard"/>
-                <a:ea typeface="Pretendard"/>
-                <a:cs typeface="Pretendard"/>
-              </a:rPr>
-              <a:t>워커마다 다른 사양이어도 되나요?</a:t>
-            </a:r>
-          </a:p>
-          <a:p>
-            <a:pPr>
-              <a:lnSpc>
-                <a:spcPct val="130000"/>
-              </a:lnSpc>
-              <a:spcBef>
-                <a:spcPts val="300"/>
-              </a:spcBef>
-            </a:pPr>
-            <a:r>
-              <a:rPr sz="1875" b="0">
-                <a:solidFill>
-                  <a:srgbClr val="3D3D3D"/>
-                </a:solidFill>
-                <a:latin typeface="Pretendard"/>
-                <a:ea typeface="Pretendard"/>
-                <a:cs typeface="Pretendard"/>
-              </a:rPr>
-              <a:t>된다 — --cores 와 --memory 를 워커마다 다르게 주면 마스터가 알아서 배치</a:t>
-            </a:r>
-          </a:p>
-        </p:txBody>
-      </p:sp>
-      <p:sp>
-        <p:nvSpPr>
-          <p:cNvPr id="28" name="Rectangle 27"/>
-          <p:cNvSpPr/>
-          <p:nvPr/>
-        </p:nvSpPr>
-        <p:spPr>
-          <a:xfrm>
-            <a:off x="1143000" y="8058150"/>
-            <a:ext cx="16002000" cy="9525"/>
-          </a:xfrm>
-          <a:prstGeom prst="rect">
-            <a:avLst/>
-          </a:prstGeom>
-          <a:solidFill>
-            <a:srgbClr val="DCE1E8"/>
-          </a:solidFill>
-          <a:ln>
-            <a:noFill/>
-          </a:ln>
-          <a:effectLst/>
-        </p:spPr>
-        <p:txBody>
-          <a:bodyPr rtlCol="0" anchor="ctr" wrap="square"/>
-          <a:lstStyle/>
-          <a:p>
-            <a:pPr algn="ctr"/>
-          </a:p>
-        </p:txBody>
-      </p:sp>
-      <p:sp>
-        <p:nvSpPr>
-          <p:cNvPr id="29" name="TextBox 28"/>
+          <p:cNvPr id="40" name="TextBox 39"/>
           <p:cNvSpPr txBox="1"/>
           <p:nvPr/>
         </p:nvSpPr>
@@ -13086,7 +14089,7 @@
       </p:sp>
       <p:sp>
         <p:nvSpPr>
-          <p:cNvPr id="30" name="TextBox 29"/>
+          <p:cNvPr id="41" name="TextBox 40"/>
           <p:cNvSpPr txBox="1"/>
           <p:nvPr/>
         </p:nvSpPr>
@@ -13145,7 +14148,7 @@
       <p:grpSpPr/>
       <p:sp>
         <p:nvSpPr>
-          <p:cNvPr id="2" name="Oval 1"/>
+          <p:cNvPr id="2" name="deckgen:decor"/>
           <p:cNvSpPr/>
           <p:nvPr/>
         </p:nvSpPr>
@@ -13175,7 +14178,7 @@
       </p:sp>
       <p:sp>
         <p:nvSpPr>
-          <p:cNvPr id="3" name="Oval 2"/>
+          <p:cNvPr id="3" name="deckgen:decor"/>
           <p:cNvSpPr/>
           <p:nvPr/>
         </p:nvSpPr>
@@ -13205,7 +14208,7 @@
       </p:sp>
       <p:sp>
         <p:nvSpPr>
-          <p:cNvPr id="4" name="Oval 3"/>
+          <p:cNvPr id="4" name="deckgen:decor"/>
           <p:cNvSpPr/>
           <p:nvPr/>
         </p:nvSpPr>
@@ -13269,7 +14272,7 @@
                 <a:ea typeface="Pretendard"/>
                 <a:cs typeface="Pretendard"/>
               </a:rPr>
-              <a:t>다음 차시 준비</a:t>
+              <a:t>예상 질문</a:t>
             </a:r>
           </a:p>
         </p:txBody>
@@ -13310,7 +14313,7 @@
                 <a:ea typeface="Pretendard"/>
                 <a:cs typeface="Pretendard"/>
               </a:rPr>
-              <a:t>5-3 을 위한 상태 확인 — 세 가지</a:t>
+              <a:t>자주 나오는 질문 네 가지</a:t>
             </a:r>
           </a:p>
         </p:txBody>
@@ -13353,12 +14356,12 @@
         </p:nvSpPr>
         <p:spPr>
           <a:xfrm>
-            <a:off x="1143000" y="2933700"/>
-            <a:ext cx="11430000" cy="1095375"/>
+            <a:off x="1143000" y="3352800"/>
+            <a:ext cx="16002000" cy="914400"/>
           </a:xfrm>
           <a:prstGeom prst="roundRect">
             <a:avLst>
-              <a:gd name="adj" fmla="val 4347"/>
+              <a:gd name="adj" fmla="val 5208"/>
             </a:avLst>
           </a:prstGeom>
           <a:solidFill>
@@ -13381,20 +14384,20 @@
       </p:sp>
       <p:sp>
         <p:nvSpPr>
-          <p:cNvPr id="9" name="Oval 8"/>
-          <p:cNvSpPr/>
-          <p:nvPr/>
-        </p:nvSpPr>
-        <p:spPr>
-          <a:xfrm>
-            <a:off x="1447800" y="3181350"/>
-            <a:ext cx="590550" cy="590550"/>
-          </a:xfrm>
-          <a:prstGeom prst="ellipse">
-            <a:avLst/>
-          </a:prstGeom>
-          <a:solidFill>
-            <a:srgbClr val="0D2B5E"/>
+          <p:cNvPr id="9" name="Rectangle 8"/>
+          <p:cNvSpPr/>
+          <p:nvPr/>
+        </p:nvSpPr>
+        <p:spPr>
+          <a:xfrm>
+            <a:off x="1143000" y="3352800"/>
+            <a:ext cx="47625" cy="914400"/>
+          </a:xfrm>
+          <a:prstGeom prst="rect">
+            <a:avLst/>
+          </a:prstGeom>
+          <a:solidFill>
+            <a:srgbClr val="1E5BC6"/>
           </a:solidFill>
           <a:ln>
             <a:noFill/>
@@ -13411,14 +14414,44 @@
       </p:sp>
       <p:sp>
         <p:nvSpPr>
-          <p:cNvPr id="10" name="TextBox 9"/>
-          <p:cNvSpPr txBox="1"/>
-          <p:nvPr/>
-        </p:nvSpPr>
-        <p:spPr>
-          <a:xfrm>
-            <a:off x="1447800" y="3333750"/>
-            <a:ext cx="590550" cy="323850"/>
+          <p:cNvPr id="10" name="Oval 9"/>
+          <p:cNvSpPr/>
+          <p:nvPr/>
+        </p:nvSpPr>
+        <p:spPr>
+          <a:xfrm>
+            <a:off x="1428750" y="3600450"/>
+            <a:ext cx="419100" cy="419100"/>
+          </a:xfrm>
+          <a:prstGeom prst="ellipse">
+            <a:avLst/>
+          </a:prstGeom>
+          <a:solidFill>
+            <a:srgbClr val="0D2B5E"/>
+          </a:solidFill>
+          <a:ln>
+            <a:noFill/>
+          </a:ln>
+          <a:effectLst/>
+        </p:spPr>
+        <p:txBody>
+          <a:bodyPr rtlCol="0" anchor="ctr" wrap="square"/>
+          <a:lstStyle/>
+          <a:p>
+            <a:pPr algn="ctr"/>
+          </a:p>
+        </p:txBody>
+      </p:sp>
+      <p:sp>
+        <p:nvSpPr>
+          <p:cNvPr id="11" name="TextBox 10"/>
+          <p:cNvSpPr txBox="1"/>
+          <p:nvPr/>
+        </p:nvSpPr>
+        <p:spPr>
+          <a:xfrm>
+            <a:off x="1428750" y="3667125"/>
+            <a:ext cx="419100" cy="304800"/>
           </a:xfrm>
           <a:prstGeom prst="rect">
             <a:avLst/>
@@ -13437,7 +14470,7 @@
               </a:lnSpc>
             </a:pPr>
             <a:r>
-              <a:rPr sz="2250" b="1">
+              <a:rPr sz="1875" b="1">
                 <a:solidFill>
                   <a:srgbClr val="FFFFFF"/>
                 </a:solidFill>
@@ -13452,33 +14485,33 @@
       </p:sp>
       <p:sp>
         <p:nvSpPr>
-          <p:cNvPr id="11" name="TextBox 10"/>
-          <p:cNvSpPr txBox="1"/>
-          <p:nvPr/>
-        </p:nvSpPr>
-        <p:spPr>
-          <a:xfrm>
-            <a:off x="2324100" y="3143250"/>
-            <a:ext cx="9906000" cy="400050"/>
-          </a:xfrm>
-          <a:prstGeom prst="rect">
-            <a:avLst/>
-          </a:prstGeom>
-          <a:noFill/>
-        </p:spPr>
-        <p:txBody>
-          <a:bodyPr wrap="square" lIns="0" rIns="0" tIns="0" bIns="0" anchor="t">
-            <a:spAutoFit/>
-          </a:bodyPr>
-          <a:lstStyle/>
-          <a:p>
-            <a:pPr algn="l">
-              <a:lnSpc>
-                <a:spcPct val="110000"/>
-              </a:lnSpc>
-            </a:pPr>
-            <a:r>
-              <a:rPr sz="2475" b="1">
+          <p:cNvPr id="12" name="TextBox 11"/>
+          <p:cNvSpPr txBox="1"/>
+          <p:nvPr/>
+        </p:nvSpPr>
+        <p:spPr>
+          <a:xfrm>
+            <a:off x="2057400" y="3448050"/>
+            <a:ext cx="14763750" cy="723900"/>
+          </a:xfrm>
+          <a:prstGeom prst="rect">
+            <a:avLst/>
+          </a:prstGeom>
+          <a:noFill/>
+        </p:spPr>
+        <p:txBody>
+          <a:bodyPr wrap="square" lIns="0" rIns="0" tIns="0" bIns="0" anchor="ctr">
+            <a:spAutoFit/>
+          </a:bodyPr>
+          <a:lstStyle/>
+          <a:p>
+            <a:pPr>
+              <a:lnSpc>
+                <a:spcPct val="120000"/>
+              </a:lnSpc>
+            </a:pPr>
+            <a:r>
+              <a:rPr sz="2175" b="1">
                 <a:solidFill>
                   <a:srgbClr val="0D2B5E"/>
                 </a:solidFill>
@@ -13486,40 +14519,20 @@
                 <a:ea typeface="Pretendard"/>
                 <a:cs typeface="Pretendard"/>
               </a:rPr>
-              <a:t>docker compose ps</a:t>
-            </a:r>
-          </a:p>
-        </p:txBody>
-      </p:sp>
-      <p:sp>
-        <p:nvSpPr>
-          <p:cNvPr id="12" name="TextBox 11"/>
-          <p:cNvSpPr txBox="1"/>
-          <p:nvPr/>
-        </p:nvSpPr>
-        <p:spPr>
-          <a:xfrm>
-            <a:off x="2324100" y="3543300"/>
-            <a:ext cx="9906000" cy="361950"/>
-          </a:xfrm>
-          <a:prstGeom prst="rect">
-            <a:avLst/>
-          </a:prstGeom>
-          <a:noFill/>
-        </p:spPr>
-        <p:txBody>
-          <a:bodyPr wrap="square" lIns="0" rIns="0" tIns="0" bIns="0" anchor="t">
-            <a:spAutoFit/>
-          </a:bodyPr>
-          <a:lstStyle/>
-          <a:p>
-            <a:pPr algn="l">
-              <a:lnSpc>
-                <a:spcPct val="120000"/>
-              </a:lnSpc>
-            </a:pPr>
-            <a:r>
-              <a:rPr sz="2025" b="0">
+              <a:t>워커를 늘리면 항상 빨라지나요?</a:t>
+            </a:r>
+          </a:p>
+          <a:p>
+            <a:pPr>
+              <a:lnSpc>
+                <a:spcPct val="130000"/>
+              </a:lnSpc>
+              <a:spcBef>
+                <a:spcPts val="300"/>
+              </a:spcBef>
+            </a:pPr>
+            <a:r>
+              <a:rPr sz="1875" b="0">
                 <a:solidFill>
                   <a:srgbClr val="3D3D3D"/>
                 </a:solidFill>
@@ -13527,7 +14540,7 @@
                 <a:ea typeface="Pretendard"/>
                 <a:cs typeface="Pretendard"/>
               </a:rPr>
-              <a:t>~/data-eng/week5 의 클러스터가 Up 상태</a:t>
+              <a:t>아니다 — 데이터가 작으면 나누고 모으는 비용이 더 크다. 「한 대로 되면 한 대로」</a:t>
             </a:r>
           </a:p>
         </p:txBody>
@@ -13540,12 +14553,12 @@
         </p:nvSpPr>
         <p:spPr>
           <a:xfrm>
-            <a:off x="1143000" y="4200525"/>
-            <a:ext cx="11430000" cy="1095375"/>
+            <a:off x="1143000" y="4400550"/>
+            <a:ext cx="16002000" cy="914400"/>
           </a:xfrm>
           <a:prstGeom prst="roundRect">
             <a:avLst>
-              <a:gd name="adj" fmla="val 4347"/>
+              <a:gd name="adj" fmla="val 5208"/>
             </a:avLst>
           </a:prstGeom>
           <a:solidFill>
@@ -13568,20 +14581,20 @@
       </p:sp>
       <p:sp>
         <p:nvSpPr>
-          <p:cNvPr id="14" name="Oval 13"/>
-          <p:cNvSpPr/>
-          <p:nvPr/>
-        </p:nvSpPr>
-        <p:spPr>
-          <a:xfrm>
-            <a:off x="1447800" y="4448175"/>
-            <a:ext cx="590550" cy="590550"/>
-          </a:xfrm>
-          <a:prstGeom prst="ellipse">
-            <a:avLst/>
-          </a:prstGeom>
-          <a:solidFill>
-            <a:srgbClr val="0D2B5E"/>
+          <p:cNvPr id="14" name="Rectangle 13"/>
+          <p:cNvSpPr/>
+          <p:nvPr/>
+        </p:nvSpPr>
+        <p:spPr>
+          <a:xfrm>
+            <a:off x="1143000" y="4400550"/>
+            <a:ext cx="47625" cy="914400"/>
+          </a:xfrm>
+          <a:prstGeom prst="rect">
+            <a:avLst/>
+          </a:prstGeom>
+          <a:solidFill>
+            <a:srgbClr val="1E5BC6"/>
           </a:solidFill>
           <a:ln>
             <a:noFill/>
@@ -13598,14 +14611,44 @@
       </p:sp>
       <p:sp>
         <p:nvSpPr>
-          <p:cNvPr id="15" name="TextBox 14"/>
-          <p:cNvSpPr txBox="1"/>
-          <p:nvPr/>
-        </p:nvSpPr>
-        <p:spPr>
-          <a:xfrm>
-            <a:off x="1447800" y="4600575"/>
-            <a:ext cx="590550" cy="323850"/>
+          <p:cNvPr id="15" name="Oval 14"/>
+          <p:cNvSpPr/>
+          <p:nvPr/>
+        </p:nvSpPr>
+        <p:spPr>
+          <a:xfrm>
+            <a:off x="1428750" y="4648200"/>
+            <a:ext cx="419100" cy="419100"/>
+          </a:xfrm>
+          <a:prstGeom prst="ellipse">
+            <a:avLst/>
+          </a:prstGeom>
+          <a:solidFill>
+            <a:srgbClr val="0D2B5E"/>
+          </a:solidFill>
+          <a:ln>
+            <a:noFill/>
+          </a:ln>
+          <a:effectLst/>
+        </p:spPr>
+        <p:txBody>
+          <a:bodyPr rtlCol="0" anchor="ctr" wrap="square"/>
+          <a:lstStyle/>
+          <a:p>
+            <a:pPr algn="ctr"/>
+          </a:p>
+        </p:txBody>
+      </p:sp>
+      <p:sp>
+        <p:nvSpPr>
+          <p:cNvPr id="16" name="TextBox 15"/>
+          <p:cNvSpPr txBox="1"/>
+          <p:nvPr/>
+        </p:nvSpPr>
+        <p:spPr>
+          <a:xfrm>
+            <a:off x="1428750" y="4714875"/>
+            <a:ext cx="419100" cy="304800"/>
           </a:xfrm>
           <a:prstGeom prst="rect">
             <a:avLst/>
@@ -13624,7 +14667,7 @@
               </a:lnSpc>
             </a:pPr>
             <a:r>
-              <a:rPr sz="2250" b="1">
+              <a:rPr sz="1875" b="1">
                 <a:solidFill>
                   <a:srgbClr val="FFFFFF"/>
                 </a:solidFill>
@@ -13639,33 +14682,33 @@
       </p:sp>
       <p:sp>
         <p:nvSpPr>
-          <p:cNvPr id="16" name="TextBox 15"/>
-          <p:cNvSpPr txBox="1"/>
-          <p:nvPr/>
-        </p:nvSpPr>
-        <p:spPr>
-          <a:xfrm>
-            <a:off x="2324100" y="4410075"/>
-            <a:ext cx="9906000" cy="400050"/>
-          </a:xfrm>
-          <a:prstGeom prst="rect">
-            <a:avLst/>
-          </a:prstGeom>
-          <a:noFill/>
-        </p:spPr>
-        <p:txBody>
-          <a:bodyPr wrap="square" lIns="0" rIns="0" tIns="0" bIns="0" anchor="t">
-            <a:spAutoFit/>
-          </a:bodyPr>
-          <a:lstStyle/>
-          <a:p>
-            <a:pPr algn="l">
-              <a:lnSpc>
-                <a:spcPct val="110000"/>
-              </a:lnSpc>
-            </a:pPr>
-            <a:r>
-              <a:rPr sz="2475" b="1">
+          <p:cNvPr id="17" name="TextBox 16"/>
+          <p:cNvSpPr txBox="1"/>
+          <p:nvPr/>
+        </p:nvSpPr>
+        <p:spPr>
+          <a:xfrm>
+            <a:off x="2057400" y="4495800"/>
+            <a:ext cx="14763750" cy="723900"/>
+          </a:xfrm>
+          <a:prstGeom prst="rect">
+            <a:avLst/>
+          </a:prstGeom>
+          <a:noFill/>
+        </p:spPr>
+        <p:txBody>
+          <a:bodyPr wrap="square" lIns="0" rIns="0" tIns="0" bIns="0" anchor="ctr">
+            <a:spAutoFit/>
+          </a:bodyPr>
+          <a:lstStyle/>
+          <a:p>
+            <a:pPr>
+              <a:lnSpc>
+                <a:spcPct val="120000"/>
+              </a:lnSpc>
+            </a:pPr>
+            <a:r>
+              <a:rPr sz="2175" b="1">
                 <a:solidFill>
                   <a:srgbClr val="0D2B5E"/>
                 </a:solidFill>
@@ -13673,40 +14716,20 @@
                 <a:ea typeface="Pretendard"/>
                 <a:cs typeface="Pretendard"/>
               </a:rPr>
-              <a:t>curl … localhost:8080 → 200</a:t>
-            </a:r>
-          </a:p>
-        </p:txBody>
-      </p:sp>
-      <p:sp>
-        <p:nvSpPr>
-          <p:cNvPr id="17" name="TextBox 16"/>
-          <p:cNvSpPr txBox="1"/>
-          <p:nvPr/>
-        </p:nvSpPr>
-        <p:spPr>
-          <a:xfrm>
-            <a:off x="2324100" y="4810125"/>
-            <a:ext cx="9906000" cy="361950"/>
-          </a:xfrm>
-          <a:prstGeom prst="rect">
-            <a:avLst/>
-          </a:prstGeom>
-          <a:noFill/>
-        </p:spPr>
-        <p:txBody>
-          <a:bodyPr wrap="square" lIns="0" rIns="0" tIns="0" bIns="0" anchor="t">
-            <a:spAutoFit/>
-          </a:bodyPr>
-          <a:lstStyle/>
-          <a:p>
-            <a:pPr algn="l">
-              <a:lnSpc>
-                <a:spcPct val="120000"/>
-              </a:lnSpc>
-            </a:pPr>
-            <a:r>
-              <a:rPr sz="2025" b="0">
+              <a:t>마스터가 죽으면 어떻게 되나요?</a:t>
+            </a:r>
+          </a:p>
+          <a:p>
+            <a:pPr>
+              <a:lnSpc>
+                <a:spcPct val="130000"/>
+              </a:lnSpc>
+              <a:spcBef>
+                <a:spcPts val="300"/>
+              </a:spcBef>
+            </a:pPr>
+            <a:r>
+              <a:rPr sz="1875" b="0">
                 <a:solidFill>
                   <a:srgbClr val="3D3D3D"/>
                 </a:solidFill>
@@ -13714,7 +14737,7 @@
                 <a:ea typeface="Pretendard"/>
                 <a:cs typeface="Pretendard"/>
               </a:rPr>
-              <a:t>「마스터 UI: 200」 이 찍히면 살아 있다</a:t>
+              <a:t>돌던 잡은 계속, 새 잡은 못 낸다 — 마스터가 돌아오면 워커가 스스로 재등록, 운영은 HA</a:t>
             </a:r>
           </a:p>
         </p:txBody>
@@ -13727,12 +14750,12 @@
         </p:nvSpPr>
         <p:spPr>
           <a:xfrm>
-            <a:off x="1143000" y="5467350"/>
-            <a:ext cx="11430000" cy="1095375"/>
+            <a:off x="1143000" y="5448300"/>
+            <a:ext cx="16002000" cy="914400"/>
           </a:xfrm>
           <a:prstGeom prst="roundRect">
             <a:avLst>
-              <a:gd name="adj" fmla="val 4347"/>
+              <a:gd name="adj" fmla="val 5208"/>
             </a:avLst>
           </a:prstGeom>
           <a:solidFill>
@@ -13755,20 +14778,20 @@
       </p:sp>
       <p:sp>
         <p:nvSpPr>
-          <p:cNvPr id="19" name="Oval 18"/>
-          <p:cNvSpPr/>
-          <p:nvPr/>
-        </p:nvSpPr>
-        <p:spPr>
-          <a:xfrm>
-            <a:off x="1447800" y="5715000"/>
-            <a:ext cx="590550" cy="590550"/>
-          </a:xfrm>
-          <a:prstGeom prst="ellipse">
-            <a:avLst/>
-          </a:prstGeom>
-          <a:solidFill>
-            <a:srgbClr val="0D2B5E"/>
+          <p:cNvPr id="19" name="Rectangle 18"/>
+          <p:cNvSpPr/>
+          <p:nvPr/>
+        </p:nvSpPr>
+        <p:spPr>
+          <a:xfrm>
+            <a:off x="1143000" y="5448300"/>
+            <a:ext cx="47625" cy="914400"/>
+          </a:xfrm>
+          <a:prstGeom prst="rect">
+            <a:avLst/>
+          </a:prstGeom>
+          <a:solidFill>
+            <a:srgbClr val="1E5BC6"/>
           </a:solidFill>
           <a:ln>
             <a:noFill/>
@@ -13785,14 +14808,44 @@
       </p:sp>
       <p:sp>
         <p:nvSpPr>
-          <p:cNvPr id="20" name="TextBox 19"/>
-          <p:cNvSpPr txBox="1"/>
-          <p:nvPr/>
-        </p:nvSpPr>
-        <p:spPr>
-          <a:xfrm>
-            <a:off x="1447800" y="5867400"/>
-            <a:ext cx="590550" cy="323850"/>
+          <p:cNvPr id="20" name="Oval 19"/>
+          <p:cNvSpPr/>
+          <p:nvPr/>
+        </p:nvSpPr>
+        <p:spPr>
+          <a:xfrm>
+            <a:off x="1428750" y="5695950"/>
+            <a:ext cx="419100" cy="419100"/>
+          </a:xfrm>
+          <a:prstGeom prst="ellipse">
+            <a:avLst/>
+          </a:prstGeom>
+          <a:solidFill>
+            <a:srgbClr val="0D2B5E"/>
+          </a:solidFill>
+          <a:ln>
+            <a:noFill/>
+          </a:ln>
+          <a:effectLst/>
+        </p:spPr>
+        <p:txBody>
+          <a:bodyPr rtlCol="0" anchor="ctr" wrap="square"/>
+          <a:lstStyle/>
+          <a:p>
+            <a:pPr algn="ctr"/>
+          </a:p>
+        </p:txBody>
+      </p:sp>
+      <p:sp>
+        <p:nvSpPr>
+          <p:cNvPr id="21" name="TextBox 20"/>
+          <p:cNvSpPr txBox="1"/>
+          <p:nvPr/>
+        </p:nvSpPr>
+        <p:spPr>
+          <a:xfrm>
+            <a:off x="1428750" y="5762625"/>
+            <a:ext cx="419100" cy="304800"/>
           </a:xfrm>
           <a:prstGeom prst="rect">
             <a:avLst/>
@@ -13811,7 +14864,7 @@
               </a:lnSpc>
             </a:pPr>
             <a:r>
-              <a:rPr sz="2250" b="1">
+              <a:rPr sz="1875" b="1">
                 <a:solidFill>
                   <a:srgbClr val="FFFFFF"/>
                 </a:solidFill>
@@ -13826,33 +14879,33 @@
       </p:sp>
       <p:sp>
         <p:nvSpPr>
-          <p:cNvPr id="21" name="TextBox 20"/>
-          <p:cNvSpPr txBox="1"/>
-          <p:nvPr/>
-        </p:nvSpPr>
-        <p:spPr>
-          <a:xfrm>
-            <a:off x="2324100" y="5676900"/>
-            <a:ext cx="9906000" cy="400050"/>
-          </a:xfrm>
-          <a:prstGeom prst="rect">
-            <a:avLst/>
-          </a:prstGeom>
-          <a:noFill/>
-        </p:spPr>
-        <p:txBody>
-          <a:bodyPr wrap="square" lIns="0" rIns="0" tIns="0" bIns="0" anchor="t">
-            <a:spAutoFit/>
-          </a:bodyPr>
-          <a:lstStyle/>
-          <a:p>
-            <a:pPr algn="l">
-              <a:lnSpc>
-                <a:spcPct val="110000"/>
-              </a:lnSpc>
-            </a:pPr>
-            <a:r>
-              <a:rPr sz="2475" b="1">
+          <p:cNvPr id="22" name="TextBox 21"/>
+          <p:cNvSpPr txBox="1"/>
+          <p:nvPr/>
+        </p:nvSpPr>
+        <p:spPr>
+          <a:xfrm>
+            <a:off x="2057400" y="5543550"/>
+            <a:ext cx="14763750" cy="723900"/>
+          </a:xfrm>
+          <a:prstGeom prst="rect">
+            <a:avLst/>
+          </a:prstGeom>
+          <a:noFill/>
+        </p:spPr>
+        <p:txBody>
+          <a:bodyPr wrap="square" lIns="0" rIns="0" tIns="0" bIns="0" anchor="ctr">
+            <a:spAutoFit/>
+          </a:bodyPr>
+          <a:lstStyle/>
+          <a:p>
+            <a:pPr>
+              <a:lnSpc>
+                <a:spcPct val="120000"/>
+              </a:lnSpc>
+            </a:pPr>
+            <a:r>
+              <a:rPr sz="2175" b="1">
                 <a:solidFill>
                   <a:srgbClr val="0D2B5E"/>
                 </a:solidFill>
@@ -13860,40 +14913,20 @@
                 <a:ea typeface="Pretendard"/>
                 <a:cs typeface="Pretendard"/>
               </a:rPr>
-              <a:t>docker ps -a | grep -E "minio|rest"</a:t>
-            </a:r>
-          </a:p>
-        </p:txBody>
-      </p:sp>
-      <p:sp>
-        <p:nvSpPr>
-          <p:cNvPr id="22" name="TextBox 21"/>
-          <p:cNvSpPr txBox="1"/>
-          <p:nvPr/>
-        </p:nvSpPr>
-        <p:spPr>
-          <a:xfrm>
-            <a:off x="2324100" y="6076950"/>
-            <a:ext cx="9906000" cy="361950"/>
-          </a:xfrm>
-          <a:prstGeom prst="rect">
-            <a:avLst/>
-          </a:prstGeom>
-          <a:noFill/>
-        </p:spPr>
-        <p:txBody>
-          <a:bodyPr wrap="square" lIns="0" rIns="0" tIns="0" bIns="0" anchor="t">
-            <a:spAutoFit/>
-          </a:bodyPr>
-          <a:lstStyle/>
-          <a:p>
-            <a:pPr algn="l">
-              <a:lnSpc>
-                <a:spcPct val="120000"/>
-              </a:lnSpc>
-            </a:pPr>
-            <a:r>
-              <a:rPr sz="2025" b="0">
+              <a:t>실무에서도 Standalone 을 쓰나요?</a:t>
+            </a:r>
+          </a:p>
+          <a:p>
+            <a:pPr>
+              <a:lnSpc>
+                <a:spcPct val="130000"/>
+              </a:lnSpc>
+              <a:spcBef>
+                <a:spcPts val="300"/>
+              </a:spcBef>
+            </a:pPr>
+            <a:r>
+              <a:rPr sz="1875" b="0">
                 <a:solidFill>
                   <a:srgbClr val="3D3D3D"/>
                 </a:solidFill>
@@ -13901,7 +14934,7 @@
                 <a:ea typeface="Pretendard"/>
                 <a:cs typeface="Pretendard"/>
               </a:rPr>
-              <a:t>4주차 minio·rest 컨테이너가 정지 상태라도 남아 있으면 준비 끝</a:t>
+              <a:t>소규모 전용 클러스터에서는 쓴다 — 요즘 신규 구축은 Kubernetes 가 많고, 개념은 같다</a:t>
             </a:r>
           </a:p>
         </p:txBody>
@@ -13914,20 +14947,20 @@
         </p:nvSpPr>
         <p:spPr>
           <a:xfrm>
-            <a:off x="13144500" y="2933700"/>
-            <a:ext cx="4000500" cy="3629025"/>
+            <a:off x="1143000" y="6496050"/>
+            <a:ext cx="16002000" cy="914400"/>
           </a:xfrm>
           <a:prstGeom prst="roundRect">
             <a:avLst>
-              <a:gd name="adj" fmla="val 1312"/>
+              <a:gd name="adj" fmla="val 5208"/>
             </a:avLst>
           </a:prstGeom>
           <a:solidFill>
-            <a:srgbClr val="EDF3FD"/>
+            <a:srgbClr val="FAFBFD"/>
           </a:solidFill>
           <a:ln w="9525">
             <a:solidFill>
-              <a:srgbClr val="BFD3F5"/>
+              <a:srgbClr val="DCE1E8"/>
             </a:solidFill>
           </a:ln>
           <a:effectLst/>
@@ -13942,14 +14975,74 @@
       </p:sp>
       <p:sp>
         <p:nvSpPr>
-          <p:cNvPr id="24" name="TextBox 23"/>
-          <p:cNvSpPr txBox="1"/>
-          <p:nvPr/>
-        </p:nvSpPr>
-        <p:spPr>
-          <a:xfrm>
-            <a:off x="13487400" y="3929062"/>
-            <a:ext cx="3314700" cy="304800"/>
+          <p:cNvPr id="24" name="Rectangle 23"/>
+          <p:cNvSpPr/>
+          <p:nvPr/>
+        </p:nvSpPr>
+        <p:spPr>
+          <a:xfrm>
+            <a:off x="1143000" y="6496050"/>
+            <a:ext cx="47625" cy="914400"/>
+          </a:xfrm>
+          <a:prstGeom prst="rect">
+            <a:avLst/>
+          </a:prstGeom>
+          <a:solidFill>
+            <a:srgbClr val="1E5BC6"/>
+          </a:solidFill>
+          <a:ln>
+            <a:noFill/>
+          </a:ln>
+          <a:effectLst/>
+        </p:spPr>
+        <p:txBody>
+          <a:bodyPr rtlCol="0" anchor="ctr" wrap="square"/>
+          <a:lstStyle/>
+          <a:p>
+            <a:pPr algn="ctr"/>
+          </a:p>
+        </p:txBody>
+      </p:sp>
+      <p:sp>
+        <p:nvSpPr>
+          <p:cNvPr id="25" name="Oval 24"/>
+          <p:cNvSpPr/>
+          <p:nvPr/>
+        </p:nvSpPr>
+        <p:spPr>
+          <a:xfrm>
+            <a:off x="1428750" y="6743700"/>
+            <a:ext cx="419100" cy="419100"/>
+          </a:xfrm>
+          <a:prstGeom prst="ellipse">
+            <a:avLst/>
+          </a:prstGeom>
+          <a:solidFill>
+            <a:srgbClr val="0D2B5E"/>
+          </a:solidFill>
+          <a:ln>
+            <a:noFill/>
+          </a:ln>
+          <a:effectLst/>
+        </p:spPr>
+        <p:txBody>
+          <a:bodyPr rtlCol="0" anchor="ctr" wrap="square"/>
+          <a:lstStyle/>
+          <a:p>
+            <a:pPr algn="ctr"/>
+          </a:p>
+        </p:txBody>
+      </p:sp>
+      <p:sp>
+        <p:nvSpPr>
+          <p:cNvPr id="26" name="TextBox 25"/>
+          <p:cNvSpPr txBox="1"/>
+          <p:nvPr/>
+        </p:nvSpPr>
+        <p:spPr>
+          <a:xfrm>
+            <a:off x="1428750" y="6810375"/>
+            <a:ext cx="419100" cy="304800"/>
           </a:xfrm>
           <a:prstGeom prst="rect">
             <a:avLst/>
@@ -13962,54 +15055,54 @@
           </a:bodyPr>
           <a:lstStyle/>
           <a:p>
-            <a:pPr algn="l">
+            <a:pPr algn="ctr">
               <a:lnSpc>
                 <a:spcPct val="100000"/>
               </a:lnSpc>
             </a:pPr>
             <a:r>
-              <a:rPr sz="1800" b="1" spc="190">
-                <a:solidFill>
-                  <a:srgbClr val="1E5BC6"/>
-                </a:solidFill>
-                <a:latin typeface="Pretendard"/>
-                <a:ea typeface="Pretendard"/>
-                <a:cs typeface="Pretendard"/>
-              </a:rPr>
-              <a:t>5-3 에서 할 것</a:t>
-            </a:r>
-          </a:p>
-        </p:txBody>
-      </p:sp>
-      <p:sp>
-        <p:nvSpPr>
-          <p:cNvPr id="25" name="TextBox 24"/>
-          <p:cNvSpPr txBox="1"/>
-          <p:nvPr/>
-        </p:nvSpPr>
-        <p:spPr>
-          <a:xfrm>
-            <a:off x="13487400" y="4329112"/>
-            <a:ext cx="3314700" cy="1238250"/>
-          </a:xfrm>
-          <a:prstGeom prst="rect">
-            <a:avLst/>
-          </a:prstGeom>
-          <a:noFill/>
-        </p:spPr>
-        <p:txBody>
-          <a:bodyPr wrap="square" lIns="0" rIns="0" tIns="0" bIns="0" anchor="t">
-            <a:spAutoFit/>
-          </a:bodyPr>
-          <a:lstStyle/>
-          <a:p>
-            <a:pPr algn="l">
-              <a:lnSpc>
-                <a:spcPct val="138000"/>
-              </a:lnSpc>
-            </a:pPr>
-            <a:r>
-              <a:rPr sz="2700" b="1">
+              <a:rPr sz="1875" b="1">
+                <a:solidFill>
+                  <a:srgbClr val="FFFFFF"/>
+                </a:solidFill>
+                <a:latin typeface="Pretendard"/>
+                <a:ea typeface="Pretendard"/>
+                <a:cs typeface="Pretendard"/>
+              </a:rPr>
+              <a:t>4</a:t>
+            </a:r>
+          </a:p>
+        </p:txBody>
+      </p:sp>
+      <p:sp>
+        <p:nvSpPr>
+          <p:cNvPr id="27" name="TextBox 26"/>
+          <p:cNvSpPr txBox="1"/>
+          <p:nvPr/>
+        </p:nvSpPr>
+        <p:spPr>
+          <a:xfrm>
+            <a:off x="2057400" y="6591300"/>
+            <a:ext cx="14763750" cy="723900"/>
+          </a:xfrm>
+          <a:prstGeom prst="rect">
+            <a:avLst/>
+          </a:prstGeom>
+          <a:noFill/>
+        </p:spPr>
+        <p:txBody>
+          <a:bodyPr wrap="square" lIns="0" rIns="0" tIns="0" bIns="0" anchor="ctr">
+            <a:spAutoFit/>
+          </a:bodyPr>
+          <a:lstStyle/>
+          <a:p>
+            <a:pPr>
+              <a:lnSpc>
+                <a:spcPct val="120000"/>
+              </a:lnSpc>
+            </a:pPr>
+            <a:r>
+              <a:rPr sz="2175" b="1">
                 <a:solidFill>
                   <a:srgbClr val="0D2B5E"/>
                 </a:solidFill>
@@ -14017,32 +15110,35 @@
                 <a:ea typeface="Pretendard"/>
                 <a:cs typeface="Pretendard"/>
               </a:rPr>
-              <a:t>Iceberg</a:t>
-            </a:r>
-          </a:p>
-          <a:p>
-            <a:pPr algn="l">
-              <a:lnSpc>
-                <a:spcPct val="138000"/>
-              </a:lnSpc>
-            </a:pPr>
-            <a:r>
-              <a:rPr sz="2700" b="1">
-                <a:solidFill>
-                  <a:srgbClr val="0D2B5E"/>
-                </a:solidFill>
-                <a:latin typeface="Pretendard"/>
-                <a:ea typeface="Pretendard"/>
-                <a:cs typeface="Pretendard"/>
-              </a:rPr>
-              <a:t>테이블 읽기</a:t>
-            </a:r>
-          </a:p>
-        </p:txBody>
-      </p:sp>
-      <p:sp>
-        <p:nvSpPr>
-          <p:cNvPr id="26" name="Rectangle 25"/>
+              <a:t>워커마다 다른 사양이어도 되나요?</a:t>
+            </a:r>
+          </a:p>
+          <a:p>
+            <a:pPr>
+              <a:lnSpc>
+                <a:spcPct val="130000"/>
+              </a:lnSpc>
+              <a:spcBef>
+                <a:spcPts val="300"/>
+              </a:spcBef>
+            </a:pPr>
+            <a:r>
+              <a:rPr sz="1875" b="0">
+                <a:solidFill>
+                  <a:srgbClr val="3D3D3D"/>
+                </a:solidFill>
+                <a:latin typeface="Pretendard"/>
+                <a:ea typeface="Pretendard"/>
+                <a:cs typeface="Pretendard"/>
+              </a:rPr>
+              <a:t>된다 — --cores 와 --memory 를 워커마다 다르게 주면 마스터가 알아서 배치</a:t>
+            </a:r>
+          </a:p>
+        </p:txBody>
+      </p:sp>
+      <p:sp>
+        <p:nvSpPr>
+          <p:cNvPr id="28" name="Rectangle 27"/>
           <p:cNvSpPr/>
           <p:nvPr/>
         </p:nvSpPr>
@@ -14072,7 +15168,7 @@
       </p:sp>
       <p:sp>
         <p:nvSpPr>
-          <p:cNvPr id="27" name="TextBox 26"/>
+          <p:cNvPr id="29" name="TextBox 28"/>
           <p:cNvSpPr txBox="1"/>
           <p:nvPr/>
         </p:nvSpPr>
@@ -14113,7 +15209,7 @@
       </p:sp>
       <p:sp>
         <p:nvSpPr>
-          <p:cNvPr id="28" name="TextBox 27"/>
+          <p:cNvPr id="30" name="TextBox 29"/>
           <p:cNvSpPr txBox="1"/>
           <p:nvPr/>
         </p:nvSpPr>
@@ -14172,7 +15268,7 @@
       <p:grpSpPr/>
       <p:sp>
         <p:nvSpPr>
-          <p:cNvPr id="2" name="Oval 1"/>
+          <p:cNvPr id="2" name="deckgen:decor"/>
           <p:cNvSpPr/>
           <p:nvPr/>
         </p:nvSpPr>
@@ -14202,7 +15298,7 @@
       </p:sp>
       <p:sp>
         <p:nvSpPr>
-          <p:cNvPr id="3" name="Oval 2"/>
+          <p:cNvPr id="3" name="deckgen:decor"/>
           <p:cNvSpPr/>
           <p:nvPr/>
         </p:nvSpPr>
@@ -14232,7 +15328,7 @@
       </p:sp>
       <p:sp>
         <p:nvSpPr>
-          <p:cNvPr id="4" name="Oval 3"/>
+          <p:cNvPr id="4" name="deckgen:decor"/>
           <p:cNvSpPr/>
           <p:nvPr/>
         </p:nvSpPr>
@@ -14296,7 +15392,7 @@
                 <a:ea typeface="Pretendard"/>
                 <a:cs typeface="Pretendard"/>
               </a:rPr>
-              <a:t>다음 회차 예고</a:t>
+              <a:t>다음 차시 준비</a:t>
             </a:r>
           </a:p>
         </p:txBody>
@@ -14337,7 +15433,7 @@
                 <a:ea typeface="Pretendard"/>
                 <a:cs typeface="Pretendard"/>
               </a:rPr>
-              <a:t>5-3 · Iceberg · MinIO 연결과 대용량 분석 준비</a:t>
+              <a:t>5-3 준비 확인과 수업 뒤 정지</a:t>
             </a:r>
           </a:p>
         </p:txBody>
@@ -14380,12 +15476,12 @@
         </p:nvSpPr>
         <p:spPr>
           <a:xfrm>
-            <a:off x="1143000" y="3429000"/>
-            <a:ext cx="3714750" cy="2476500"/>
+            <a:off x="1143000" y="2933700"/>
+            <a:ext cx="11430000" cy="1095375"/>
           </a:xfrm>
           <a:prstGeom prst="roundRect">
             <a:avLst>
-              <a:gd name="adj" fmla="val 1923"/>
+              <a:gd name="adj" fmla="val 4347"/>
             </a:avLst>
           </a:prstGeom>
           <a:solidFill>
@@ -14408,20 +15504,20 @@
       </p:sp>
       <p:sp>
         <p:nvSpPr>
-          <p:cNvPr id="9" name="Rectangle 8"/>
-          <p:cNvSpPr/>
-          <p:nvPr/>
-        </p:nvSpPr>
-        <p:spPr>
-          <a:xfrm>
-            <a:off x="1143000" y="3429000"/>
-            <a:ext cx="3714750" cy="47625"/>
-          </a:xfrm>
-          <a:prstGeom prst="rect">
-            <a:avLst/>
-          </a:prstGeom>
-          <a:solidFill>
-            <a:srgbClr val="1E5BC6"/>
+          <p:cNvPr id="9" name="Oval 8"/>
+          <p:cNvSpPr/>
+          <p:nvPr/>
+        </p:nvSpPr>
+        <p:spPr>
+          <a:xfrm>
+            <a:off x="1447800" y="3181350"/>
+            <a:ext cx="590550" cy="590550"/>
+          </a:xfrm>
+          <a:prstGeom prst="ellipse">
+            <a:avLst/>
+          </a:prstGeom>
+          <a:solidFill>
+            <a:srgbClr val="0D2B5E"/>
           </a:solidFill>
           <a:ln>
             <a:noFill/>
@@ -14444,8 +15540,8 @@
         </p:nvSpPr>
         <p:spPr>
           <a:xfrm>
-            <a:off x="4000500" y="3638550"/>
-            <a:ext cx="590550" cy="400050"/>
+            <a:off x="1447800" y="3333750"/>
+            <a:ext cx="590550" cy="323850"/>
           </a:xfrm>
           <a:prstGeom prst="rect">
             <a:avLst/>
@@ -14458,21 +15554,21 @@
           </a:bodyPr>
           <a:lstStyle/>
           <a:p>
-            <a:pPr algn="r">
+            <a:pPr algn="ctr">
               <a:lnSpc>
                 <a:spcPct val="100000"/>
               </a:lnSpc>
             </a:pPr>
             <a:r>
-              <a:rPr sz="2550" b="1">
-                <a:solidFill>
-                  <a:srgbClr val="E4EBF4"/>
-                </a:solidFill>
-                <a:latin typeface="Pretendard"/>
-                <a:ea typeface="Pretendard"/>
-                <a:cs typeface="Pretendard"/>
-              </a:rPr>
-              <a:t>01</a:t>
+              <a:rPr sz="2250" b="1">
+                <a:solidFill>
+                  <a:srgbClr val="FFFFFF"/>
+                </a:solidFill>
+                <a:latin typeface="Pretendard"/>
+                <a:ea typeface="Pretendard"/>
+                <a:cs typeface="Pretendard"/>
+              </a:rPr>
+              <a:t>1</a:t>
             </a:r>
           </a:p>
         </p:txBody>
@@ -14485,27 +15581,27 @@
         </p:nvSpPr>
         <p:spPr>
           <a:xfrm>
-            <a:off x="1466850" y="3752850"/>
-            <a:ext cx="3067050" cy="1828800"/>
-          </a:xfrm>
-          <a:prstGeom prst="rect">
-            <a:avLst/>
-          </a:prstGeom>
-          <a:noFill/>
-        </p:spPr>
-        <p:txBody>
-          <a:bodyPr wrap="square" lIns="0" rIns="0" tIns="0" bIns="0" anchor="ctr">
-            <a:spAutoFit/>
-          </a:bodyPr>
-          <a:lstStyle/>
-          <a:p>
-            <a:pPr>
-              <a:lnSpc>
-                <a:spcPct val="115000"/>
-              </a:lnSpc>
-            </a:pPr>
-            <a:r>
-              <a:rPr sz="2700" b="1">
+            <a:off x="2324100" y="3143250"/>
+            <a:ext cx="9906000" cy="400050"/>
+          </a:xfrm>
+          <a:prstGeom prst="rect">
+            <a:avLst/>
+          </a:prstGeom>
+          <a:noFill/>
+        </p:spPr>
+        <p:txBody>
+          <a:bodyPr wrap="square" lIns="0" rIns="0" tIns="0" bIns="0" anchor="t">
+            <a:spAutoFit/>
+          </a:bodyPr>
+          <a:lstStyle/>
+          <a:p>
+            <a:pPr algn="l">
+              <a:lnSpc>
+                <a:spcPct val="110000"/>
+              </a:lnSpc>
+            </a:pPr>
+            <a:r>
+              <a:rPr sz="2475" b="1">
                 <a:solidFill>
                   <a:srgbClr val="0D2B5E"/>
                 </a:solidFill>
@@ -14513,17 +15609,37 @@
                 <a:ea typeface="Pretendard"/>
                 <a:cs typeface="Pretendard"/>
               </a:rPr>
-              <a:t>이론 1H</a:t>
-            </a:r>
-          </a:p>
-          <a:p>
-            <a:pPr>
-              <a:lnSpc>
-                <a:spcPct val="146000"/>
-              </a:lnSpc>
-              <a:spcBef>
-                <a:spcPts val="1050"/>
-              </a:spcBef>
+              <a:t>docker compose ps</a:t>
+            </a:r>
+          </a:p>
+        </p:txBody>
+      </p:sp>
+      <p:sp>
+        <p:nvSpPr>
+          <p:cNvPr id="12" name="TextBox 11"/>
+          <p:cNvSpPr txBox="1"/>
+          <p:nvPr/>
+        </p:nvSpPr>
+        <p:spPr>
+          <a:xfrm>
+            <a:off x="2324100" y="3543300"/>
+            <a:ext cx="9906000" cy="361950"/>
+          </a:xfrm>
+          <a:prstGeom prst="rect">
+            <a:avLst/>
+          </a:prstGeom>
+          <a:noFill/>
+        </p:spPr>
+        <p:txBody>
+          <a:bodyPr wrap="square" lIns="0" rIns="0" tIns="0" bIns="0" anchor="t">
+            <a:spAutoFit/>
+          </a:bodyPr>
+          <a:lstStyle/>
+          <a:p>
+            <a:pPr algn="l">
+              <a:lnSpc>
+                <a:spcPct val="120000"/>
+              </a:lnSpc>
             </a:pPr>
             <a:r>
               <a:rPr sz="2025" b="0">
@@ -14534,228 +15650,25 @@
                 <a:ea typeface="Pretendard"/>
                 <a:cs typeface="Pretendard"/>
               </a:rPr>
-              <a:t>레이크하우스와</a:t>
-            </a:r>
-          </a:p>
-          <a:p>
-            <a:pPr>
-              <a:lnSpc>
-                <a:spcPct val="146000"/>
-              </a:lnSpc>
-            </a:pPr>
-            <a:r>
-              <a:rPr sz="2025" b="0">
-                <a:solidFill>
-                  <a:srgbClr val="3D3D3D"/>
-                </a:solidFill>
-                <a:latin typeface="Pretendard"/>
-                <a:ea typeface="Pretendard"/>
-                <a:cs typeface="Pretendard"/>
-              </a:rPr>
-              <a:t>Spark 연동 구조</a:t>
-            </a:r>
-          </a:p>
-        </p:txBody>
-      </p:sp>
-      <p:sp>
-        <p:nvSpPr>
-          <p:cNvPr id="12" name="Rounded Rectangle 11"/>
-          <p:cNvSpPr/>
-          <p:nvPr/>
-        </p:nvSpPr>
-        <p:spPr>
-          <a:xfrm>
-            <a:off x="5238750" y="3429000"/>
-            <a:ext cx="3714750" cy="2476500"/>
+              <a:t>~/data-eng/week5 의 spark-master · 워커 둘, 셋 다 Up</a:t>
+            </a:r>
+          </a:p>
+        </p:txBody>
+      </p:sp>
+      <p:sp>
+        <p:nvSpPr>
+          <p:cNvPr id="13" name="Rounded Rectangle 12"/>
+          <p:cNvSpPr/>
+          <p:nvPr/>
+        </p:nvSpPr>
+        <p:spPr>
+          <a:xfrm>
+            <a:off x="1143000" y="4200525"/>
+            <a:ext cx="11430000" cy="1095375"/>
           </a:xfrm>
           <a:prstGeom prst="roundRect">
             <a:avLst>
-              <a:gd name="adj" fmla="val 1923"/>
-            </a:avLst>
-          </a:prstGeom>
-          <a:solidFill>
-            <a:srgbClr val="0D2B5E"/>
-          </a:solidFill>
-          <a:ln w="9525">
-            <a:solidFill>
-              <a:srgbClr val="0D2B5E"/>
-            </a:solidFill>
-          </a:ln>
-          <a:effectLst/>
-        </p:spPr>
-        <p:txBody>
-          <a:bodyPr rtlCol="0" anchor="ctr" wrap="square"/>
-          <a:lstStyle/>
-          <a:p>
-            <a:pPr algn="ctr"/>
-          </a:p>
-        </p:txBody>
-      </p:sp>
-      <p:sp>
-        <p:nvSpPr>
-          <p:cNvPr id="13" name="Rectangle 12"/>
-          <p:cNvSpPr/>
-          <p:nvPr/>
-        </p:nvSpPr>
-        <p:spPr>
-          <a:xfrm>
-            <a:off x="5238750" y="3429000"/>
-            <a:ext cx="3714750" cy="47625"/>
-          </a:xfrm>
-          <a:prstGeom prst="rect">
-            <a:avLst/>
-          </a:prstGeom>
-          <a:solidFill>
-            <a:srgbClr val="1E5BC6"/>
-          </a:solidFill>
-          <a:ln>
-            <a:noFill/>
-          </a:ln>
-          <a:effectLst/>
-        </p:spPr>
-        <p:txBody>
-          <a:bodyPr rtlCol="0" anchor="ctr" wrap="square"/>
-          <a:lstStyle/>
-          <a:p>
-            <a:pPr algn="ctr"/>
-          </a:p>
-        </p:txBody>
-      </p:sp>
-      <p:sp>
-        <p:nvSpPr>
-          <p:cNvPr id="14" name="TextBox 13"/>
-          <p:cNvSpPr txBox="1"/>
-          <p:nvPr/>
-        </p:nvSpPr>
-        <p:spPr>
-          <a:xfrm>
-            <a:off x="8096250" y="3638550"/>
-            <a:ext cx="590550" cy="400050"/>
-          </a:xfrm>
-          <a:prstGeom prst="rect">
-            <a:avLst/>
-          </a:prstGeom>
-          <a:noFill/>
-        </p:spPr>
-        <p:txBody>
-          <a:bodyPr wrap="square" lIns="0" rIns="0" tIns="0" bIns="0" anchor="t">
-            <a:spAutoFit/>
-          </a:bodyPr>
-          <a:lstStyle/>
-          <a:p>
-            <a:pPr algn="r">
-              <a:lnSpc>
-                <a:spcPct val="100000"/>
-              </a:lnSpc>
-            </a:pPr>
-            <a:r>
-              <a:rPr sz="2550" b="1">
-                <a:solidFill>
-                  <a:srgbClr val="3B4B7C"/>
-                </a:solidFill>
-                <a:latin typeface="Pretendard"/>
-                <a:ea typeface="Pretendard"/>
-                <a:cs typeface="Pretendard"/>
-              </a:rPr>
-              <a:t>02</a:t>
-            </a:r>
-          </a:p>
-        </p:txBody>
-      </p:sp>
-      <p:sp>
-        <p:nvSpPr>
-          <p:cNvPr id="15" name="TextBox 14"/>
-          <p:cNvSpPr txBox="1"/>
-          <p:nvPr/>
-        </p:nvSpPr>
-        <p:spPr>
-          <a:xfrm>
-            <a:off x="5562600" y="3752850"/>
-            <a:ext cx="3067050" cy="1828800"/>
-          </a:xfrm>
-          <a:prstGeom prst="rect">
-            <a:avLst/>
-          </a:prstGeom>
-          <a:noFill/>
-        </p:spPr>
-        <p:txBody>
-          <a:bodyPr wrap="square" lIns="0" rIns="0" tIns="0" bIns="0" anchor="ctr">
-            <a:spAutoFit/>
-          </a:bodyPr>
-          <a:lstStyle/>
-          <a:p>
-            <a:pPr>
-              <a:lnSpc>
-                <a:spcPct val="115000"/>
-              </a:lnSpc>
-            </a:pPr>
-            <a:r>
-              <a:rPr sz="2700" b="1">
-                <a:solidFill>
-                  <a:srgbClr val="FFFFFF"/>
-                </a:solidFill>
-                <a:latin typeface="Pretendard"/>
-                <a:ea typeface="Pretendard"/>
-                <a:cs typeface="Pretendard"/>
-              </a:rPr>
-              <a:t>실습 1.5H</a:t>
-            </a:r>
-          </a:p>
-          <a:p>
-            <a:pPr>
-              <a:lnSpc>
-                <a:spcPct val="146000"/>
-              </a:lnSpc>
-              <a:spcBef>
-                <a:spcPts val="1050"/>
-              </a:spcBef>
-            </a:pPr>
-            <a:r>
-              <a:rPr sz="2025" b="0">
-                <a:solidFill>
-                  <a:srgbClr val="D9E2F0"/>
-                </a:solidFill>
-                <a:latin typeface="Pretendard"/>
-                <a:ea typeface="Pretendard"/>
-                <a:cs typeface="Pretendard"/>
-              </a:rPr>
-              <a:t>Spark ↔ MinIO</a:t>
-            </a:r>
-          </a:p>
-          <a:p>
-            <a:pPr>
-              <a:lnSpc>
-                <a:spcPct val="146000"/>
-              </a:lnSpc>
-            </a:pPr>
-            <a:r>
-              <a:rPr sz="2025" b="0">
-                <a:solidFill>
-                  <a:srgbClr val="D9E2F0"/>
-                </a:solidFill>
-                <a:latin typeface="Pretendard"/>
-                <a:ea typeface="Pretendard"/>
-                <a:cs typeface="Pretendard"/>
-              </a:rPr>
-              <a:t>(s3a) 연결</a:t>
-            </a:r>
-          </a:p>
-        </p:txBody>
-      </p:sp>
-      <p:sp>
-        <p:nvSpPr>
-          <p:cNvPr id="16" name="Rounded Rectangle 15"/>
-          <p:cNvSpPr/>
-          <p:nvPr/>
-        </p:nvSpPr>
-        <p:spPr>
-          <a:xfrm>
-            <a:off x="9334500" y="3429000"/>
-            <a:ext cx="3714750" cy="2476500"/>
-          </a:xfrm>
-          <a:prstGeom prst="roundRect">
-            <a:avLst>
-              <a:gd name="adj" fmla="val 1923"/>
+              <a:gd name="adj" fmla="val 4347"/>
             </a:avLst>
           </a:prstGeom>
           <a:solidFill>
@@ -14778,20 +15691,20 @@
       </p:sp>
       <p:sp>
         <p:nvSpPr>
-          <p:cNvPr id="17" name="Rectangle 16"/>
-          <p:cNvSpPr/>
-          <p:nvPr/>
-        </p:nvSpPr>
-        <p:spPr>
-          <a:xfrm>
-            <a:off x="9334500" y="3429000"/>
-            <a:ext cx="3714750" cy="47625"/>
-          </a:xfrm>
-          <a:prstGeom prst="rect">
-            <a:avLst/>
-          </a:prstGeom>
-          <a:solidFill>
-            <a:srgbClr val="1E5BC6"/>
+          <p:cNvPr id="14" name="Oval 13"/>
+          <p:cNvSpPr/>
+          <p:nvPr/>
+        </p:nvSpPr>
+        <p:spPr>
+          <a:xfrm>
+            <a:off x="1447800" y="4448175"/>
+            <a:ext cx="590550" cy="590550"/>
+          </a:xfrm>
+          <a:prstGeom prst="ellipse">
+            <a:avLst/>
+          </a:prstGeom>
+          <a:solidFill>
+            <a:srgbClr val="0D2B5E"/>
           </a:solidFill>
           <a:ln>
             <a:noFill/>
@@ -14808,14 +15721,14 @@
       </p:sp>
       <p:sp>
         <p:nvSpPr>
-          <p:cNvPr id="18" name="TextBox 17"/>
-          <p:cNvSpPr txBox="1"/>
-          <p:nvPr/>
-        </p:nvSpPr>
-        <p:spPr>
-          <a:xfrm>
-            <a:off x="12192000" y="3638550"/>
-            <a:ext cx="590550" cy="400050"/>
+          <p:cNvPr id="15" name="TextBox 14"/>
+          <p:cNvSpPr txBox="1"/>
+          <p:nvPr/>
+        </p:nvSpPr>
+        <p:spPr>
+          <a:xfrm>
+            <a:off x="1447800" y="4600575"/>
+            <a:ext cx="590550" cy="323850"/>
           </a:xfrm>
           <a:prstGeom prst="rect">
             <a:avLst/>
@@ -14828,54 +15741,54 @@
           </a:bodyPr>
           <a:lstStyle/>
           <a:p>
-            <a:pPr algn="r">
+            <a:pPr algn="ctr">
               <a:lnSpc>
                 <a:spcPct val="100000"/>
               </a:lnSpc>
             </a:pPr>
             <a:r>
-              <a:rPr sz="2550" b="1">
-                <a:solidFill>
-                  <a:srgbClr val="E4EBF4"/>
-                </a:solidFill>
-                <a:latin typeface="Pretendard"/>
-                <a:ea typeface="Pretendard"/>
-                <a:cs typeface="Pretendard"/>
-              </a:rPr>
-              <a:t>03</a:t>
-            </a:r>
-          </a:p>
-        </p:txBody>
-      </p:sp>
-      <p:sp>
-        <p:nvSpPr>
-          <p:cNvPr id="19" name="TextBox 18"/>
-          <p:cNvSpPr txBox="1"/>
-          <p:nvPr/>
-        </p:nvSpPr>
-        <p:spPr>
-          <a:xfrm>
-            <a:off x="9658350" y="3752850"/>
-            <a:ext cx="3067050" cy="1828800"/>
-          </a:xfrm>
-          <a:prstGeom prst="rect">
-            <a:avLst/>
-          </a:prstGeom>
-          <a:noFill/>
-        </p:spPr>
-        <p:txBody>
-          <a:bodyPr wrap="square" lIns="0" rIns="0" tIns="0" bIns="0" anchor="ctr">
-            <a:spAutoFit/>
-          </a:bodyPr>
-          <a:lstStyle/>
-          <a:p>
-            <a:pPr>
-              <a:lnSpc>
-                <a:spcPct val="115000"/>
-              </a:lnSpc>
-            </a:pPr>
-            <a:r>
-              <a:rPr sz="2700" b="1">
+              <a:rPr sz="2250" b="1">
+                <a:solidFill>
+                  <a:srgbClr val="FFFFFF"/>
+                </a:solidFill>
+                <a:latin typeface="Pretendard"/>
+                <a:ea typeface="Pretendard"/>
+                <a:cs typeface="Pretendard"/>
+              </a:rPr>
+              <a:t>2</a:t>
+            </a:r>
+          </a:p>
+        </p:txBody>
+      </p:sp>
+      <p:sp>
+        <p:nvSpPr>
+          <p:cNvPr id="16" name="TextBox 15"/>
+          <p:cNvSpPr txBox="1"/>
+          <p:nvPr/>
+        </p:nvSpPr>
+        <p:spPr>
+          <a:xfrm>
+            <a:off x="2324100" y="4410075"/>
+            <a:ext cx="9906000" cy="400050"/>
+          </a:xfrm>
+          <a:prstGeom prst="rect">
+            <a:avLst/>
+          </a:prstGeom>
+          <a:noFill/>
+        </p:spPr>
+        <p:txBody>
+          <a:bodyPr wrap="square" lIns="0" rIns="0" tIns="0" bIns="0" anchor="t">
+            <a:spAutoFit/>
+          </a:bodyPr>
+          <a:lstStyle/>
+          <a:p>
+            <a:pPr algn="l">
+              <a:lnSpc>
+                <a:spcPct val="110000"/>
+              </a:lnSpc>
+            </a:pPr>
+            <a:r>
+              <a:rPr sz="2475" b="1">
                 <a:solidFill>
                   <a:srgbClr val="0D2B5E"/>
                 </a:solidFill>
@@ -14883,17 +15796,37 @@
                 <a:ea typeface="Pretendard"/>
                 <a:cs typeface="Pretendard"/>
               </a:rPr>
-              <a:t>실습 1H</a:t>
-            </a:r>
-          </a:p>
-          <a:p>
-            <a:pPr>
-              <a:lnSpc>
-                <a:spcPct val="146000"/>
-              </a:lnSpc>
-              <a:spcBef>
-                <a:spcPts val="1050"/>
-              </a:spcBef>
+              <a:t>curl … localhost:8080 → 200</a:t>
+            </a:r>
+          </a:p>
+        </p:txBody>
+      </p:sp>
+      <p:sp>
+        <p:nvSpPr>
+          <p:cNvPr id="17" name="TextBox 16"/>
+          <p:cNvSpPr txBox="1"/>
+          <p:nvPr/>
+        </p:nvSpPr>
+        <p:spPr>
+          <a:xfrm>
+            <a:off x="2324100" y="4810125"/>
+            <a:ext cx="9906000" cy="361950"/>
+          </a:xfrm>
+          <a:prstGeom prst="rect">
+            <a:avLst/>
+          </a:prstGeom>
+          <a:noFill/>
+        </p:spPr>
+        <p:txBody>
+          <a:bodyPr wrap="square" lIns="0" rIns="0" tIns="0" bIns="0" anchor="t">
+            <a:spAutoFit/>
+          </a:bodyPr>
+          <a:lstStyle/>
+          <a:p>
+            <a:pPr algn="l">
+              <a:lnSpc>
+                <a:spcPct val="120000"/>
+              </a:lnSpc>
             </a:pPr>
             <a:r>
               <a:rPr sz="2025" b="0">
@@ -14904,43 +15837,25 @@
                 <a:ea typeface="Pretendard"/>
                 <a:cs typeface="Pretendard"/>
               </a:rPr>
-              <a:t>Iceberg 카탈로그</a:t>
-            </a:r>
-          </a:p>
-          <a:p>
-            <a:pPr>
-              <a:lnSpc>
-                <a:spcPct val="146000"/>
-              </a:lnSpc>
-            </a:pPr>
-            <a:r>
-              <a:rPr sz="2025" b="0">
-                <a:solidFill>
-                  <a:srgbClr val="3D3D3D"/>
-                </a:solidFill>
-                <a:latin typeface="Pretendard"/>
-                <a:ea typeface="Pretendard"/>
-                <a:cs typeface="Pretendard"/>
-              </a:rPr>
-              <a:t>구성·테이블 생성</a:t>
-            </a:r>
-          </a:p>
-        </p:txBody>
-      </p:sp>
-      <p:sp>
-        <p:nvSpPr>
-          <p:cNvPr id="20" name="Rounded Rectangle 19"/>
-          <p:cNvSpPr/>
-          <p:nvPr/>
-        </p:nvSpPr>
-        <p:spPr>
-          <a:xfrm>
-            <a:off x="13430250" y="3429000"/>
-            <a:ext cx="3714750" cy="2476500"/>
+              <a:t>「마스터 UI: 200」 이 찍히면 살아 있다</a:t>
+            </a:r>
+          </a:p>
+        </p:txBody>
+      </p:sp>
+      <p:sp>
+        <p:nvSpPr>
+          <p:cNvPr id="18" name="Rounded Rectangle 17"/>
+          <p:cNvSpPr/>
+          <p:nvPr/>
+        </p:nvSpPr>
+        <p:spPr>
+          <a:xfrm>
+            <a:off x="1143000" y="5467350"/>
+            <a:ext cx="11430000" cy="1095375"/>
           </a:xfrm>
           <a:prstGeom prst="roundRect">
             <a:avLst>
-              <a:gd name="adj" fmla="val 1923"/>
+              <a:gd name="adj" fmla="val 4347"/>
             </a:avLst>
           </a:prstGeom>
           <a:solidFill>
@@ -14963,20 +15878,20 @@
       </p:sp>
       <p:sp>
         <p:nvSpPr>
-          <p:cNvPr id="21" name="Rectangle 20"/>
-          <p:cNvSpPr/>
-          <p:nvPr/>
-        </p:nvSpPr>
-        <p:spPr>
-          <a:xfrm>
-            <a:off x="13430250" y="3429000"/>
-            <a:ext cx="3714750" cy="47625"/>
-          </a:xfrm>
-          <a:prstGeom prst="rect">
-            <a:avLst/>
-          </a:prstGeom>
-          <a:solidFill>
-            <a:srgbClr val="1E5BC6"/>
+          <p:cNvPr id="19" name="Oval 18"/>
+          <p:cNvSpPr/>
+          <p:nvPr/>
+        </p:nvSpPr>
+        <p:spPr>
+          <a:xfrm>
+            <a:off x="1447800" y="5715000"/>
+            <a:ext cx="590550" cy="590550"/>
+          </a:xfrm>
+          <a:prstGeom prst="ellipse">
+            <a:avLst/>
+          </a:prstGeom>
+          <a:solidFill>
+            <a:srgbClr val="0D2B5E"/>
           </a:solidFill>
           <a:ln>
             <a:noFill/>
@@ -14993,14 +15908,96 @@
       </p:sp>
       <p:sp>
         <p:nvSpPr>
+          <p:cNvPr id="20" name="TextBox 19"/>
+          <p:cNvSpPr txBox="1"/>
+          <p:nvPr/>
+        </p:nvSpPr>
+        <p:spPr>
+          <a:xfrm>
+            <a:off x="1447800" y="5867400"/>
+            <a:ext cx="590550" cy="323850"/>
+          </a:xfrm>
+          <a:prstGeom prst="rect">
+            <a:avLst/>
+          </a:prstGeom>
+          <a:noFill/>
+        </p:spPr>
+        <p:txBody>
+          <a:bodyPr wrap="square" lIns="0" rIns="0" tIns="0" bIns="0" anchor="t">
+            <a:spAutoFit/>
+          </a:bodyPr>
+          <a:lstStyle/>
+          <a:p>
+            <a:pPr algn="ctr">
+              <a:lnSpc>
+                <a:spcPct val="100000"/>
+              </a:lnSpc>
+            </a:pPr>
+            <a:r>
+              <a:rPr sz="2250" b="1">
+                <a:solidFill>
+                  <a:srgbClr val="FFFFFF"/>
+                </a:solidFill>
+                <a:latin typeface="Pretendard"/>
+                <a:ea typeface="Pretendard"/>
+                <a:cs typeface="Pretendard"/>
+              </a:rPr>
+              <a:t>3</a:t>
+            </a:r>
+          </a:p>
+        </p:txBody>
+      </p:sp>
+      <p:sp>
+        <p:nvSpPr>
+          <p:cNvPr id="21" name="TextBox 20"/>
+          <p:cNvSpPr txBox="1"/>
+          <p:nvPr/>
+        </p:nvSpPr>
+        <p:spPr>
+          <a:xfrm>
+            <a:off x="2324100" y="5676900"/>
+            <a:ext cx="9906000" cy="400050"/>
+          </a:xfrm>
+          <a:prstGeom prst="rect">
+            <a:avLst/>
+          </a:prstGeom>
+          <a:noFill/>
+        </p:spPr>
+        <p:txBody>
+          <a:bodyPr wrap="square" lIns="0" rIns="0" tIns="0" bIns="0" anchor="t">
+            <a:spAutoFit/>
+          </a:bodyPr>
+          <a:lstStyle/>
+          <a:p>
+            <a:pPr algn="l">
+              <a:lnSpc>
+                <a:spcPct val="110000"/>
+              </a:lnSpc>
+            </a:pPr>
+            <a:r>
+              <a:rPr sz="2475" b="1">
+                <a:solidFill>
+                  <a:srgbClr val="0D2B5E"/>
+                </a:solidFill>
+                <a:latin typeface="Pretendard"/>
+                <a:ea typeface="Pretendard"/>
+                <a:cs typeface="Pretendard"/>
+              </a:rPr>
+              <a:t>docker ps -a | grep -E "minio|rest"</a:t>
+            </a:r>
+          </a:p>
+        </p:txBody>
+      </p:sp>
+      <p:sp>
+        <p:nvSpPr>
           <p:cNvPr id="22" name="TextBox 21"/>
           <p:cNvSpPr txBox="1"/>
           <p:nvPr/>
         </p:nvSpPr>
         <p:spPr>
           <a:xfrm>
-            <a:off x="16287750" y="3638550"/>
-            <a:ext cx="590550" cy="400050"/>
+            <a:off x="2324100" y="6076950"/>
+            <a:ext cx="9906000" cy="361950"/>
           </a:xfrm>
           <a:prstGeom prst="rect">
             <a:avLst/>
@@ -15013,72 +16010,10 @@
           </a:bodyPr>
           <a:lstStyle/>
           <a:p>
-            <a:pPr algn="r">
-              <a:lnSpc>
-                <a:spcPct val="100000"/>
-              </a:lnSpc>
-            </a:pPr>
-            <a:r>
-              <a:rPr sz="2550" b="1">
-                <a:solidFill>
-                  <a:srgbClr val="E4EBF4"/>
-                </a:solidFill>
-                <a:latin typeface="Pretendard"/>
-                <a:ea typeface="Pretendard"/>
-                <a:cs typeface="Pretendard"/>
-              </a:rPr>
-              <a:t>04</a:t>
-            </a:r>
-          </a:p>
-        </p:txBody>
-      </p:sp>
-      <p:sp>
-        <p:nvSpPr>
-          <p:cNvPr id="23" name="TextBox 22"/>
-          <p:cNvSpPr txBox="1"/>
-          <p:nvPr/>
-        </p:nvSpPr>
-        <p:spPr>
-          <a:xfrm>
-            <a:off x="13754100" y="3752850"/>
-            <a:ext cx="3067050" cy="1828800"/>
-          </a:xfrm>
-          <a:prstGeom prst="rect">
-            <a:avLst/>
-          </a:prstGeom>
-          <a:noFill/>
-        </p:spPr>
-        <p:txBody>
-          <a:bodyPr wrap="square" lIns="0" rIns="0" tIns="0" bIns="0" anchor="ctr">
-            <a:spAutoFit/>
-          </a:bodyPr>
-          <a:lstStyle/>
-          <a:p>
-            <a:pPr>
-              <a:lnSpc>
-                <a:spcPct val="115000"/>
-              </a:lnSpc>
-            </a:pPr>
-            <a:r>
-              <a:rPr sz="2700" b="1">
-                <a:solidFill>
-                  <a:srgbClr val="0D2B5E"/>
-                </a:solidFill>
-                <a:latin typeface="Pretendard"/>
-                <a:ea typeface="Pretendard"/>
-                <a:cs typeface="Pretendard"/>
-              </a:rPr>
-              <a:t>정리 0.5H</a:t>
-            </a:r>
-          </a:p>
-          <a:p>
-            <a:pPr>
-              <a:lnSpc>
-                <a:spcPct val="146000"/>
-              </a:lnSpc>
-              <a:spcBef>
-                <a:spcPts val="1050"/>
-              </a:spcBef>
+            <a:pPr algn="l">
+              <a:lnSpc>
+                <a:spcPct val="120000"/>
+              </a:lnSpc>
             </a:pPr>
             <a:r>
               <a:rPr sz="2025" b="0">
@@ -15089,45 +16024,61 @@
                 <a:ea typeface="Pretendard"/>
                 <a:cs typeface="Pretendard"/>
               </a:rPr>
-              <a:t>정리·회고</a:t>
-            </a:r>
-          </a:p>
-          <a:p>
-            <a:pPr>
-              <a:lnSpc>
-                <a:spcPct val="146000"/>
-              </a:lnSpc>
-            </a:pPr>
-            <a:r>
-              <a:rPr sz="2025" b="0">
-                <a:solidFill>
-                  <a:srgbClr val="3D3D3D"/>
-                </a:solidFill>
-                <a:latin typeface="Pretendard"/>
-                <a:ea typeface="Pretendard"/>
-                <a:cs typeface="Pretendard"/>
-              </a:rPr>
-              <a:t>산출물 확인</a:t>
-            </a:r>
-          </a:p>
-        </p:txBody>
-      </p:sp>
-      <p:sp>
-        <p:nvSpPr>
-          <p:cNvPr id="24" name="Rectangle 23"/>
-          <p:cNvSpPr/>
-          <p:nvPr/>
-        </p:nvSpPr>
-        <p:spPr>
-          <a:xfrm>
-            <a:off x="1143000" y="6496050"/>
-            <a:ext cx="47625" cy="723900"/>
-          </a:xfrm>
-          <a:prstGeom prst="rect">
-            <a:avLst/>
-          </a:prstGeom>
-          <a:solidFill>
-            <a:srgbClr val="1E5BC6"/>
+              <a:t>4주차 iceberg-rest · minio 가 Exited 로라도 남아 있으면 준비 끝</a:t>
+            </a:r>
+          </a:p>
+        </p:txBody>
+      </p:sp>
+      <p:sp>
+        <p:nvSpPr>
+          <p:cNvPr id="23" name="Rounded Rectangle 22"/>
+          <p:cNvSpPr/>
+          <p:nvPr/>
+        </p:nvSpPr>
+        <p:spPr>
+          <a:xfrm>
+            <a:off x="1143000" y="6734175"/>
+            <a:ext cx="11430000" cy="1095375"/>
+          </a:xfrm>
+          <a:prstGeom prst="roundRect">
+            <a:avLst>
+              <a:gd name="adj" fmla="val 4347"/>
+            </a:avLst>
+          </a:prstGeom>
+          <a:solidFill>
+            <a:srgbClr val="FAFBFD"/>
+          </a:solidFill>
+          <a:ln w="9525">
+            <a:solidFill>
+              <a:srgbClr val="DCE1E8"/>
+            </a:solidFill>
+          </a:ln>
+          <a:effectLst/>
+        </p:spPr>
+        <p:txBody>
+          <a:bodyPr rtlCol="0" anchor="ctr" wrap="square"/>
+          <a:lstStyle/>
+          <a:p>
+            <a:pPr algn="ctr"/>
+          </a:p>
+        </p:txBody>
+      </p:sp>
+      <p:sp>
+        <p:nvSpPr>
+          <p:cNvPr id="24" name="Oval 23"/>
+          <p:cNvSpPr/>
+          <p:nvPr/>
+        </p:nvSpPr>
+        <p:spPr>
+          <a:xfrm>
+            <a:off x="1447800" y="6981825"/>
+            <a:ext cx="590550" cy="590550"/>
+          </a:xfrm>
+          <a:prstGeom prst="ellipse">
+            <a:avLst/>
+          </a:prstGeom>
+          <a:solidFill>
+            <a:srgbClr val="0D2B5E"/>
           </a:solidFill>
           <a:ln>
             <a:noFill/>
@@ -15150,8 +16101,8 @@
         </p:nvSpPr>
         <p:spPr>
           <a:xfrm>
-            <a:off x="1390650" y="6553200"/>
-            <a:ext cx="15754350" cy="762000"/>
+            <a:off x="1447800" y="7134225"/>
+            <a:ext cx="590550" cy="323850"/>
           </a:xfrm>
           <a:prstGeom prst="rect">
             <a:avLst/>
@@ -15164,28 +16115,244 @@
           </a:bodyPr>
           <a:lstStyle/>
           <a:p>
+            <a:pPr algn="ctr">
+              <a:lnSpc>
+                <a:spcPct val="100000"/>
+              </a:lnSpc>
+            </a:pPr>
+            <a:r>
+              <a:rPr sz="2250" b="1">
+                <a:solidFill>
+                  <a:srgbClr val="FFFFFF"/>
+                </a:solidFill>
+                <a:latin typeface="Pretendard"/>
+                <a:ea typeface="Pretendard"/>
+                <a:cs typeface="Pretendard"/>
+              </a:rPr>
+              <a:t>4</a:t>
+            </a:r>
+          </a:p>
+        </p:txBody>
+      </p:sp>
+      <p:sp>
+        <p:nvSpPr>
+          <p:cNvPr id="26" name="TextBox 25"/>
+          <p:cNvSpPr txBox="1"/>
+          <p:nvPr/>
+        </p:nvSpPr>
+        <p:spPr>
+          <a:xfrm>
+            <a:off x="2324100" y="6943725"/>
+            <a:ext cx="9906000" cy="400050"/>
+          </a:xfrm>
+          <a:prstGeom prst="rect">
+            <a:avLst/>
+          </a:prstGeom>
+          <a:noFill/>
+        </p:spPr>
+        <p:txBody>
+          <a:bodyPr wrap="square" lIns="0" rIns="0" tIns="0" bIns="0" anchor="t">
+            <a:spAutoFit/>
+          </a:bodyPr>
+          <a:lstStyle/>
+          <a:p>
             <a:pPr algn="l">
               <a:lnSpc>
-                <a:spcPct val="150000"/>
-              </a:lnSpc>
-            </a:pPr>
-            <a:r>
-              <a:rPr sz="2025" b="1">
-                <a:solidFill>
-                  <a:srgbClr val="7D7D7D"/>
-                </a:solidFill>
-                <a:latin typeface="Pretendard"/>
-                <a:ea typeface="Pretendard"/>
-                <a:cs typeface="Pretendard"/>
-              </a:rPr>
-              <a:t>준비: 4주차 MinIO 컨테이너 필요 · 5-2 compose 에 MinIO 서비스를 합쳐 같은 네트워크에서 · Iceberg 스냅샷·메타데이터 복습</a:t>
-            </a:r>
-          </a:p>
-        </p:txBody>
-      </p:sp>
-      <p:sp>
-        <p:nvSpPr>
-          <p:cNvPr id="26" name="Rectangle 25"/>
+                <a:spcPct val="110000"/>
+              </a:lnSpc>
+            </a:pPr>
+            <a:r>
+              <a:rPr sz="2475" b="1">
+                <a:solidFill>
+                  <a:srgbClr val="0D2B5E"/>
+                </a:solidFill>
+                <a:latin typeface="Pretendard"/>
+                <a:ea typeface="Pretendard"/>
+                <a:cs typeface="Pretendard"/>
+              </a:rPr>
+              <a:t>수업 뒤 docker compose stop</a:t>
+            </a:r>
+          </a:p>
+        </p:txBody>
+      </p:sp>
+      <p:sp>
+        <p:nvSpPr>
+          <p:cNvPr id="27" name="TextBox 26"/>
+          <p:cNvSpPr txBox="1"/>
+          <p:nvPr/>
+        </p:nvSpPr>
+        <p:spPr>
+          <a:xfrm>
+            <a:off x="2324100" y="7343775"/>
+            <a:ext cx="9906000" cy="361950"/>
+          </a:xfrm>
+          <a:prstGeom prst="rect">
+            <a:avLst/>
+          </a:prstGeom>
+          <a:noFill/>
+        </p:spPr>
+        <p:txBody>
+          <a:bodyPr wrap="square" lIns="0" rIns="0" tIns="0" bIns="0" anchor="t">
+            <a:spAutoFit/>
+          </a:bodyPr>
+          <a:lstStyle/>
+          <a:p>
+            <a:pPr algn="l">
+              <a:lnSpc>
+                <a:spcPct val="120000"/>
+              </a:lnSpc>
+            </a:pPr>
+            <a:r>
+              <a:rPr sz="2025" b="0">
+                <a:solidFill>
+                  <a:srgbClr val="3D3D3D"/>
+                </a:solidFill>
+                <a:latin typeface="Pretendard"/>
+                <a:ea typeface="Pretendard"/>
+                <a:cs typeface="Pretendard"/>
+              </a:rPr>
+              <a:t>셋 Exited — 볼륨이 없어 down 해도 다시 up 하면 그대로</a:t>
+            </a:r>
+          </a:p>
+        </p:txBody>
+      </p:sp>
+      <p:sp>
+        <p:nvSpPr>
+          <p:cNvPr id="28" name="Rounded Rectangle 27"/>
+          <p:cNvSpPr/>
+          <p:nvPr/>
+        </p:nvSpPr>
+        <p:spPr>
+          <a:xfrm>
+            <a:off x="13144500" y="2933700"/>
+            <a:ext cx="4000500" cy="4895850"/>
+          </a:xfrm>
+          <a:prstGeom prst="roundRect">
+            <a:avLst>
+              <a:gd name="adj" fmla="val 1190"/>
+            </a:avLst>
+          </a:prstGeom>
+          <a:solidFill>
+            <a:srgbClr val="EDF3FD"/>
+          </a:solidFill>
+          <a:ln w="9525">
+            <a:solidFill>
+              <a:srgbClr val="BFD3F5"/>
+            </a:solidFill>
+          </a:ln>
+          <a:effectLst/>
+        </p:spPr>
+        <p:txBody>
+          <a:bodyPr rtlCol="0" anchor="ctr" wrap="square"/>
+          <a:lstStyle/>
+          <a:p>
+            <a:pPr algn="ctr"/>
+          </a:p>
+        </p:txBody>
+      </p:sp>
+      <p:sp>
+        <p:nvSpPr>
+          <p:cNvPr id="29" name="TextBox 28"/>
+          <p:cNvSpPr txBox="1"/>
+          <p:nvPr/>
+        </p:nvSpPr>
+        <p:spPr>
+          <a:xfrm>
+            <a:off x="13487400" y="4562475"/>
+            <a:ext cx="3314700" cy="304800"/>
+          </a:xfrm>
+          <a:prstGeom prst="rect">
+            <a:avLst/>
+          </a:prstGeom>
+          <a:noFill/>
+        </p:spPr>
+        <p:txBody>
+          <a:bodyPr wrap="square" lIns="0" rIns="0" tIns="0" bIns="0" anchor="t">
+            <a:spAutoFit/>
+          </a:bodyPr>
+          <a:lstStyle/>
+          <a:p>
+            <a:pPr algn="l">
+              <a:lnSpc>
+                <a:spcPct val="100000"/>
+              </a:lnSpc>
+            </a:pPr>
+            <a:r>
+              <a:rPr sz="1800" b="1" spc="190">
+                <a:solidFill>
+                  <a:srgbClr val="1E5BC6"/>
+                </a:solidFill>
+                <a:latin typeface="Pretendard"/>
+                <a:ea typeface="Pretendard"/>
+                <a:cs typeface="Pretendard"/>
+              </a:rPr>
+              <a:t>5-3 에서</a:t>
+            </a:r>
+          </a:p>
+        </p:txBody>
+      </p:sp>
+      <p:sp>
+        <p:nvSpPr>
+          <p:cNvPr id="30" name="TextBox 29"/>
+          <p:cNvSpPr txBox="1"/>
+          <p:nvPr/>
+        </p:nvSpPr>
+        <p:spPr>
+          <a:xfrm>
+            <a:off x="13487400" y="4962525"/>
+            <a:ext cx="3314700" cy="1238250"/>
+          </a:xfrm>
+          <a:prstGeom prst="rect">
+            <a:avLst/>
+          </a:prstGeom>
+          <a:noFill/>
+        </p:spPr>
+        <p:txBody>
+          <a:bodyPr wrap="square" lIns="0" rIns="0" tIns="0" bIns="0" anchor="t">
+            <a:spAutoFit/>
+          </a:bodyPr>
+          <a:lstStyle/>
+          <a:p>
+            <a:pPr algn="l">
+              <a:lnSpc>
+                <a:spcPct val="138000"/>
+              </a:lnSpc>
+            </a:pPr>
+            <a:r>
+              <a:rPr sz="2700" b="1">
+                <a:solidFill>
+                  <a:srgbClr val="0D2B5E"/>
+                </a:solidFill>
+                <a:latin typeface="Pretendard"/>
+                <a:ea typeface="Pretendard"/>
+                <a:cs typeface="Pretendard"/>
+              </a:rPr>
+              <a:t>up -d 로</a:t>
+            </a:r>
+          </a:p>
+          <a:p>
+            <a:pPr algn="l">
+              <a:lnSpc>
+                <a:spcPct val="138000"/>
+              </a:lnSpc>
+            </a:pPr>
+            <a:r>
+              <a:rPr sz="2700" b="1">
+                <a:solidFill>
+                  <a:srgbClr val="0D2B5E"/>
+                </a:solidFill>
+                <a:latin typeface="Pretendard"/>
+                <a:ea typeface="Pretendard"/>
+                <a:cs typeface="Pretendard"/>
+              </a:rPr>
+              <a:t>다시 띄움</a:t>
+            </a:r>
+          </a:p>
+        </p:txBody>
+      </p:sp>
+      <p:sp>
+        <p:nvSpPr>
+          <p:cNvPr id="31" name="Rectangle 30"/>
           <p:cNvSpPr/>
           <p:nvPr/>
         </p:nvSpPr>
@@ -15215,7 +16382,7 @@
       </p:sp>
       <p:sp>
         <p:nvSpPr>
-          <p:cNvPr id="27" name="TextBox 26"/>
+          <p:cNvPr id="32" name="TextBox 31"/>
           <p:cNvSpPr txBox="1"/>
           <p:nvPr/>
         </p:nvSpPr>
@@ -15256,7 +16423,7 @@
       </p:sp>
       <p:sp>
         <p:nvSpPr>
-          <p:cNvPr id="28" name="TextBox 27"/>
+          <p:cNvPr id="33" name="TextBox 32"/>
           <p:cNvSpPr txBox="1"/>
           <p:nvPr/>
         </p:nvSpPr>

--- a/data-eng/decks/w5d2s4.pptx
+++ b/data-eng/decks/w5d2s4.pptx
@@ -6404,7 +6404,7 @@
                 <a:ea typeface="Pretendard"/>
                 <a:cs typeface="Pretendard"/>
               </a:rPr>
-              <a:t>5-3 에서는 이 클러스터에서 MinIO 의 Iceberg 테이블을 읽습니다</a:t>
+              <a:t>5-3 에서는 이 클러스터에 MinIO 를 붙여 Iceberg 테이블을 만듭니다</a:t>
             </a:r>
           </a:p>
         </p:txBody>
